--- a/AI_Interview_Coach_Presentation.pptx
+++ b/AI_Interview_Coach_Presentation.pptx
@@ -5,18 +5,19 @@
     <p:sldMasterId id="2147483648" r:id="rId1"/>
   </p:sldMasterIdLst>
   <p:sldIdLst>
-    <p:sldId id="256" r:id="rId7"/>
-    <p:sldId id="257" r:id="rId8"/>
-    <p:sldId id="258" r:id="rId9"/>
-    <p:sldId id="259" r:id="rId10"/>
-    <p:sldId id="260" r:id="rId11"/>
-    <p:sldId id="261" r:id="rId12"/>
-    <p:sldId id="262" r:id="rId13"/>
-    <p:sldId id="263" r:id="rId14"/>
-    <p:sldId id="264" r:id="rId15"/>
-    <p:sldId id="265" r:id="rId16"/>
+    <p:sldId id="256" r:id="rId2"/>
+    <p:sldId id="257" r:id="rId3"/>
+    <p:sldId id="258" r:id="rId4"/>
+    <p:sldId id="266" r:id="rId5"/>
+    <p:sldId id="259" r:id="rId6"/>
+    <p:sldId id="260" r:id="rId7"/>
+    <p:sldId id="261" r:id="rId8"/>
+    <p:sldId id="262" r:id="rId9"/>
+    <p:sldId id="263" r:id="rId10"/>
+    <p:sldId id="264" r:id="rId11"/>
+    <p:sldId id="265" r:id="rId12"/>
   </p:sldIdLst>
-  <p:sldSz cx="12191695" cy="6858000" type="screen4x3"/>
+  <p:sldSz cx="12192000" cy="6858000"/>
   <p:notesSz cx="6858000" cy="9144000"/>
   <p:defaultTextStyle>
     <a:defPPr>
@@ -113,6 +114,22 @@
       </a:defRPr>
     </a:lvl9pPr>
   </p:defaultTextStyle>
+  <p:extLst>
+    <p:ext uri="{EFAFB233-063F-42B5-8137-9DF3F51BA10A}">
+      <p15:sldGuideLst xmlns:p15="http://schemas.microsoft.com/office/powerpoint/2012/main">
+        <p15:guide id="1" orient="horz" pos="2160">
+          <p15:clr>
+            <a:srgbClr val="A4A3A4"/>
+          </p15:clr>
+        </p15:guide>
+        <p15:guide id="2" pos="2880">
+          <p15:clr>
+            <a:srgbClr val="A4A3A4"/>
+          </p15:clr>
+        </p15:guide>
+      </p15:sldGuideLst>
+    </p:ext>
+  </p:extLst>
 </p:presentation>
 </file>
 
@@ -154,10 +171,9 @@
           <a:lstStyle/>
           <a:p>
             <a:r>
-              <a:rPr lang="en-US" smtClean="0"/>
+              <a:rPr lang="en-US"/>
               <a:t>Click to edit Master title style</a:t>
             </a:r>
-            <a:endParaRPr lang="en-US"/>
           </a:p>
         </p:txBody>
       </p:sp>
@@ -273,10 +289,9 @@
           </a:lstStyle>
           <a:p>
             <a:r>
-              <a:rPr lang="en-US" smtClean="0"/>
+              <a:rPr lang="en-US"/>
               <a:t>Click to edit Master subtitle style</a:t>
             </a:r>
-            <a:endParaRPr lang="en-US"/>
           </a:p>
         </p:txBody>
       </p:sp>
@@ -297,7 +312,7 @@
           <a:p>
             <a:fld id="{5BCAD085-E8A6-8845-BD4E-CB4CCA059FC4}" type="datetimeFigureOut">
               <a:rPr lang="en-US" smtClean="0"/>
-              <a:t>1/27/13</a:t>
+              <a:t>10/9/2026</a:t>
             </a:fld>
             <a:endParaRPr lang="en-US"/>
           </a:p>
@@ -391,10 +406,9 @@
           <a:lstStyle/>
           <a:p>
             <a:r>
-              <a:rPr lang="en-US" smtClean="0"/>
+              <a:rPr lang="en-US"/>
               <a:t>Click to edit Master title style</a:t>
             </a:r>
-            <a:endParaRPr lang="en-US"/>
           </a:p>
         </p:txBody>
       </p:sp>
@@ -415,38 +429,37 @@
           <a:p>
             <a:pPr lvl="0"/>
             <a:r>
-              <a:rPr lang="en-US" smtClean="0"/>
+              <a:rPr lang="en-US"/>
               <a:t>Click to edit Master text styles</a:t>
             </a:r>
           </a:p>
           <a:p>
             <a:pPr lvl="1"/>
             <a:r>
-              <a:rPr lang="en-US" smtClean="0"/>
+              <a:rPr lang="en-US"/>
               <a:t>Second level</a:t>
             </a:r>
           </a:p>
           <a:p>
             <a:pPr lvl="2"/>
             <a:r>
-              <a:rPr lang="en-US" smtClean="0"/>
+              <a:rPr lang="en-US"/>
               <a:t>Third level</a:t>
             </a:r>
           </a:p>
           <a:p>
             <a:pPr lvl="3"/>
             <a:r>
-              <a:rPr lang="en-US" smtClean="0"/>
+              <a:rPr lang="en-US"/>
               <a:t>Fourth level</a:t>
             </a:r>
           </a:p>
           <a:p>
             <a:pPr lvl="4"/>
             <a:r>
-              <a:rPr lang="en-US" smtClean="0"/>
+              <a:rPr lang="en-US"/>
               <a:t>Fifth level</a:t>
             </a:r>
-            <a:endParaRPr lang="en-US"/>
           </a:p>
         </p:txBody>
       </p:sp>
@@ -467,7 +480,7 @@
           <a:p>
             <a:fld id="{5BCAD085-E8A6-8845-BD4E-CB4CCA059FC4}" type="datetimeFigureOut">
               <a:rPr lang="en-US" smtClean="0"/>
-              <a:t>1/27/13</a:t>
+              <a:t>10/9/2026</a:t>
             </a:fld>
             <a:endParaRPr lang="en-US"/>
           </a:p>
@@ -566,10 +579,9 @@
           <a:lstStyle/>
           <a:p>
             <a:r>
-              <a:rPr lang="en-US" smtClean="0"/>
+              <a:rPr lang="en-US"/>
               <a:t>Click to edit Master title style</a:t>
             </a:r>
-            <a:endParaRPr lang="en-US"/>
           </a:p>
         </p:txBody>
       </p:sp>
@@ -595,38 +607,37 @@
           <a:p>
             <a:pPr lvl="0"/>
             <a:r>
-              <a:rPr lang="en-US" smtClean="0"/>
+              <a:rPr lang="en-US"/>
               <a:t>Click to edit Master text styles</a:t>
             </a:r>
           </a:p>
           <a:p>
             <a:pPr lvl="1"/>
             <a:r>
-              <a:rPr lang="en-US" smtClean="0"/>
+              <a:rPr lang="en-US"/>
               <a:t>Second level</a:t>
             </a:r>
           </a:p>
           <a:p>
             <a:pPr lvl="2"/>
             <a:r>
-              <a:rPr lang="en-US" smtClean="0"/>
+              <a:rPr lang="en-US"/>
               <a:t>Third level</a:t>
             </a:r>
           </a:p>
           <a:p>
             <a:pPr lvl="3"/>
             <a:r>
-              <a:rPr lang="en-US" smtClean="0"/>
+              <a:rPr lang="en-US"/>
               <a:t>Fourth level</a:t>
             </a:r>
           </a:p>
           <a:p>
             <a:pPr lvl="4"/>
             <a:r>
-              <a:rPr lang="en-US" smtClean="0"/>
+              <a:rPr lang="en-US"/>
               <a:t>Fifth level</a:t>
             </a:r>
-            <a:endParaRPr lang="en-US"/>
           </a:p>
         </p:txBody>
       </p:sp>
@@ -647,7 +658,7 @@
           <a:p>
             <a:fld id="{5BCAD085-E8A6-8845-BD4E-CB4CCA059FC4}" type="datetimeFigureOut">
               <a:rPr lang="en-US" smtClean="0"/>
-              <a:t>1/27/13</a:t>
+              <a:t>10/9/2026</a:t>
             </a:fld>
             <a:endParaRPr lang="en-US"/>
           </a:p>
@@ -741,10 +752,9 @@
           <a:lstStyle/>
           <a:p>
             <a:r>
-              <a:rPr lang="en-US" smtClean="0"/>
+              <a:rPr lang="en-US"/>
               <a:t>Click to edit Master title style</a:t>
             </a:r>
-            <a:endParaRPr lang="en-US"/>
           </a:p>
         </p:txBody>
       </p:sp>
@@ -765,38 +775,37 @@
           <a:p>
             <a:pPr lvl="0"/>
             <a:r>
-              <a:rPr lang="en-US" smtClean="0"/>
+              <a:rPr lang="en-US"/>
               <a:t>Click to edit Master text styles</a:t>
             </a:r>
           </a:p>
           <a:p>
             <a:pPr lvl="1"/>
             <a:r>
-              <a:rPr lang="en-US" smtClean="0"/>
+              <a:rPr lang="en-US"/>
               <a:t>Second level</a:t>
             </a:r>
           </a:p>
           <a:p>
             <a:pPr lvl="2"/>
             <a:r>
-              <a:rPr lang="en-US" smtClean="0"/>
+              <a:rPr lang="en-US"/>
               <a:t>Third level</a:t>
             </a:r>
           </a:p>
           <a:p>
             <a:pPr lvl="3"/>
             <a:r>
-              <a:rPr lang="en-US" smtClean="0"/>
+              <a:rPr lang="en-US"/>
               <a:t>Fourth level</a:t>
             </a:r>
           </a:p>
           <a:p>
             <a:pPr lvl="4"/>
             <a:r>
-              <a:rPr lang="en-US" smtClean="0"/>
+              <a:rPr lang="en-US"/>
               <a:t>Fifth level</a:t>
             </a:r>
-            <a:endParaRPr lang="en-US"/>
           </a:p>
         </p:txBody>
       </p:sp>
@@ -817,7 +826,7 @@
           <a:p>
             <a:fld id="{5BCAD085-E8A6-8845-BD4E-CB4CCA059FC4}" type="datetimeFigureOut">
               <a:rPr lang="en-US" smtClean="0"/>
-              <a:t>1/27/13</a:t>
+              <a:t>10/9/2026</a:t>
             </a:fld>
             <a:endParaRPr lang="en-US"/>
           </a:p>
@@ -920,10 +929,9 @@
           </a:lstStyle>
           <a:p>
             <a:r>
-              <a:rPr lang="en-US" smtClean="0"/>
+              <a:rPr lang="en-US"/>
               <a:t>Click to edit Master title style</a:t>
             </a:r>
-            <a:endParaRPr lang="en-US"/>
           </a:p>
         </p:txBody>
       </p:sp>
@@ -1040,7 +1048,7 @@
           <a:p>
             <a:pPr lvl="0"/>
             <a:r>
-              <a:rPr lang="en-US" smtClean="0"/>
+              <a:rPr lang="en-US"/>
               <a:t>Click to edit Master text styles</a:t>
             </a:r>
           </a:p>
@@ -1063,7 +1071,7 @@
           <a:p>
             <a:fld id="{5BCAD085-E8A6-8845-BD4E-CB4CCA059FC4}" type="datetimeFigureOut">
               <a:rPr lang="en-US" smtClean="0"/>
-              <a:t>1/27/13</a:t>
+              <a:t>10/9/2026</a:t>
             </a:fld>
             <a:endParaRPr lang="en-US"/>
           </a:p>
@@ -1157,10 +1165,9 @@
           <a:lstStyle/>
           <a:p>
             <a:r>
-              <a:rPr lang="en-US" smtClean="0"/>
+              <a:rPr lang="en-US"/>
               <a:t>Click to edit Master title style</a:t>
             </a:r>
-            <a:endParaRPr lang="en-US"/>
           </a:p>
         </p:txBody>
       </p:sp>
@@ -1214,38 +1221,37 @@
           <a:p>
             <a:pPr lvl="0"/>
             <a:r>
-              <a:rPr lang="en-US" smtClean="0"/>
+              <a:rPr lang="en-US"/>
               <a:t>Click to edit Master text styles</a:t>
             </a:r>
           </a:p>
           <a:p>
             <a:pPr lvl="1"/>
             <a:r>
-              <a:rPr lang="en-US" smtClean="0"/>
+              <a:rPr lang="en-US"/>
               <a:t>Second level</a:t>
             </a:r>
           </a:p>
           <a:p>
             <a:pPr lvl="2"/>
             <a:r>
-              <a:rPr lang="en-US" smtClean="0"/>
+              <a:rPr lang="en-US"/>
               <a:t>Third level</a:t>
             </a:r>
           </a:p>
           <a:p>
             <a:pPr lvl="3"/>
             <a:r>
-              <a:rPr lang="en-US" smtClean="0"/>
+              <a:rPr lang="en-US"/>
               <a:t>Fourth level</a:t>
             </a:r>
           </a:p>
           <a:p>
             <a:pPr lvl="4"/>
             <a:r>
-              <a:rPr lang="en-US" smtClean="0"/>
+              <a:rPr lang="en-US"/>
               <a:t>Fifth level</a:t>
             </a:r>
-            <a:endParaRPr lang="en-US"/>
           </a:p>
         </p:txBody>
       </p:sp>
@@ -1299,38 +1305,37 @@
           <a:p>
             <a:pPr lvl="0"/>
             <a:r>
-              <a:rPr lang="en-US" smtClean="0"/>
+              <a:rPr lang="en-US"/>
               <a:t>Click to edit Master text styles</a:t>
             </a:r>
           </a:p>
           <a:p>
             <a:pPr lvl="1"/>
             <a:r>
-              <a:rPr lang="en-US" smtClean="0"/>
+              <a:rPr lang="en-US"/>
               <a:t>Second level</a:t>
             </a:r>
           </a:p>
           <a:p>
             <a:pPr lvl="2"/>
             <a:r>
-              <a:rPr lang="en-US" smtClean="0"/>
+              <a:rPr lang="en-US"/>
               <a:t>Third level</a:t>
             </a:r>
           </a:p>
           <a:p>
             <a:pPr lvl="3"/>
             <a:r>
-              <a:rPr lang="en-US" smtClean="0"/>
+              <a:rPr lang="en-US"/>
               <a:t>Fourth level</a:t>
             </a:r>
           </a:p>
           <a:p>
             <a:pPr lvl="4"/>
             <a:r>
-              <a:rPr lang="en-US" smtClean="0"/>
+              <a:rPr lang="en-US"/>
               <a:t>Fifth level</a:t>
             </a:r>
-            <a:endParaRPr lang="en-US"/>
           </a:p>
         </p:txBody>
       </p:sp>
@@ -1351,7 +1356,7 @@
           <a:p>
             <a:fld id="{5BCAD085-E8A6-8845-BD4E-CB4CCA059FC4}" type="datetimeFigureOut">
               <a:rPr lang="en-US" smtClean="0"/>
-              <a:t>1/27/13</a:t>
+              <a:t>10/9/2026</a:t>
             </a:fld>
             <a:endParaRPr lang="en-US"/>
           </a:p>
@@ -1449,10 +1454,9 @@
           </a:lstStyle>
           <a:p>
             <a:r>
-              <a:rPr lang="en-US" smtClean="0"/>
+              <a:rPr lang="en-US"/>
               <a:t>Click to edit Master title style</a:t>
             </a:r>
-            <a:endParaRPr lang="en-US"/>
           </a:p>
         </p:txBody>
       </p:sp>
@@ -1515,7 +1519,7 @@
           <a:p>
             <a:pPr lvl="0"/>
             <a:r>
-              <a:rPr lang="en-US" smtClean="0"/>
+              <a:rPr lang="en-US"/>
               <a:t>Click to edit Master text styles</a:t>
             </a:r>
           </a:p>
@@ -1571,38 +1575,37 @@
           <a:p>
             <a:pPr lvl="0"/>
             <a:r>
-              <a:rPr lang="en-US" smtClean="0"/>
+              <a:rPr lang="en-US"/>
               <a:t>Click to edit Master text styles</a:t>
             </a:r>
           </a:p>
           <a:p>
             <a:pPr lvl="1"/>
             <a:r>
-              <a:rPr lang="en-US" smtClean="0"/>
+              <a:rPr lang="en-US"/>
               <a:t>Second level</a:t>
             </a:r>
           </a:p>
           <a:p>
             <a:pPr lvl="2"/>
             <a:r>
-              <a:rPr lang="en-US" smtClean="0"/>
+              <a:rPr lang="en-US"/>
               <a:t>Third level</a:t>
             </a:r>
           </a:p>
           <a:p>
             <a:pPr lvl="3"/>
             <a:r>
-              <a:rPr lang="en-US" smtClean="0"/>
+              <a:rPr lang="en-US"/>
               <a:t>Fourth level</a:t>
             </a:r>
           </a:p>
           <a:p>
             <a:pPr lvl="4"/>
             <a:r>
-              <a:rPr lang="en-US" smtClean="0"/>
+              <a:rPr lang="en-US"/>
               <a:t>Fifth level</a:t>
             </a:r>
-            <a:endParaRPr lang="en-US"/>
           </a:p>
         </p:txBody>
       </p:sp>
@@ -1665,7 +1668,7 @@
           <a:p>
             <a:pPr lvl="0"/>
             <a:r>
-              <a:rPr lang="en-US" smtClean="0"/>
+              <a:rPr lang="en-US"/>
               <a:t>Click to edit Master text styles</a:t>
             </a:r>
           </a:p>
@@ -1721,38 +1724,37 @@
           <a:p>
             <a:pPr lvl="0"/>
             <a:r>
-              <a:rPr lang="en-US" smtClean="0"/>
+              <a:rPr lang="en-US"/>
               <a:t>Click to edit Master text styles</a:t>
             </a:r>
           </a:p>
           <a:p>
             <a:pPr lvl="1"/>
             <a:r>
-              <a:rPr lang="en-US" smtClean="0"/>
+              <a:rPr lang="en-US"/>
               <a:t>Second level</a:t>
             </a:r>
           </a:p>
           <a:p>
             <a:pPr lvl="2"/>
             <a:r>
-              <a:rPr lang="en-US" smtClean="0"/>
+              <a:rPr lang="en-US"/>
               <a:t>Third level</a:t>
             </a:r>
           </a:p>
           <a:p>
             <a:pPr lvl="3"/>
             <a:r>
-              <a:rPr lang="en-US" smtClean="0"/>
+              <a:rPr lang="en-US"/>
               <a:t>Fourth level</a:t>
             </a:r>
           </a:p>
           <a:p>
             <a:pPr lvl="4"/>
             <a:r>
-              <a:rPr lang="en-US" smtClean="0"/>
+              <a:rPr lang="en-US"/>
               <a:t>Fifth level</a:t>
             </a:r>
-            <a:endParaRPr lang="en-US"/>
           </a:p>
         </p:txBody>
       </p:sp>
@@ -1773,7 +1775,7 @@
           <a:p>
             <a:fld id="{5BCAD085-E8A6-8845-BD4E-CB4CCA059FC4}" type="datetimeFigureOut">
               <a:rPr lang="en-US" smtClean="0"/>
-              <a:t>1/27/13</a:t>
+              <a:t>10/9/2026</a:t>
             </a:fld>
             <a:endParaRPr lang="en-US"/>
           </a:p>
@@ -1867,10 +1869,9 @@
           <a:lstStyle/>
           <a:p>
             <a:r>
-              <a:rPr lang="en-US" smtClean="0"/>
+              <a:rPr lang="en-US"/>
               <a:t>Click to edit Master title style</a:t>
             </a:r>
-            <a:endParaRPr lang="en-US"/>
           </a:p>
         </p:txBody>
       </p:sp>
@@ -1891,7 +1892,7 @@
           <a:p>
             <a:fld id="{5BCAD085-E8A6-8845-BD4E-CB4CCA059FC4}" type="datetimeFigureOut">
               <a:rPr lang="en-US" smtClean="0"/>
-              <a:t>1/27/13</a:t>
+              <a:t>10/9/2026</a:t>
             </a:fld>
             <a:endParaRPr lang="en-US"/>
           </a:p>
@@ -1986,7 +1987,7 @@
           <a:p>
             <a:fld id="{5BCAD085-E8A6-8845-BD4E-CB4CCA059FC4}" type="datetimeFigureOut">
               <a:rPr lang="en-US" smtClean="0"/>
-              <a:t>1/27/13</a:t>
+              <a:t>10/9/2026</a:t>
             </a:fld>
             <a:endParaRPr lang="en-US"/>
           </a:p>
@@ -2089,10 +2090,9 @@
           </a:lstStyle>
           <a:p>
             <a:r>
-              <a:rPr lang="en-US" smtClean="0"/>
+              <a:rPr lang="en-US"/>
               <a:t>Click to edit Master title style</a:t>
             </a:r>
-            <a:endParaRPr lang="en-US"/>
           </a:p>
         </p:txBody>
       </p:sp>
@@ -2146,38 +2146,37 @@
           <a:p>
             <a:pPr lvl="0"/>
             <a:r>
-              <a:rPr lang="en-US" smtClean="0"/>
+              <a:rPr lang="en-US"/>
               <a:t>Click to edit Master text styles</a:t>
             </a:r>
           </a:p>
           <a:p>
             <a:pPr lvl="1"/>
             <a:r>
-              <a:rPr lang="en-US" smtClean="0"/>
+              <a:rPr lang="en-US"/>
               <a:t>Second level</a:t>
             </a:r>
           </a:p>
           <a:p>
             <a:pPr lvl="2"/>
             <a:r>
-              <a:rPr lang="en-US" smtClean="0"/>
+              <a:rPr lang="en-US"/>
               <a:t>Third level</a:t>
             </a:r>
           </a:p>
           <a:p>
             <a:pPr lvl="3"/>
             <a:r>
-              <a:rPr lang="en-US" smtClean="0"/>
+              <a:rPr lang="en-US"/>
               <a:t>Fourth level</a:t>
             </a:r>
           </a:p>
           <a:p>
             <a:pPr lvl="4"/>
             <a:r>
-              <a:rPr lang="en-US" smtClean="0"/>
+              <a:rPr lang="en-US"/>
               <a:t>Fifth level</a:t>
             </a:r>
-            <a:endParaRPr lang="en-US"/>
           </a:p>
         </p:txBody>
       </p:sp>
@@ -2240,7 +2239,7 @@
           <a:p>
             <a:pPr lvl="0"/>
             <a:r>
-              <a:rPr lang="en-US" smtClean="0"/>
+              <a:rPr lang="en-US"/>
               <a:t>Click to edit Master text styles</a:t>
             </a:r>
           </a:p>
@@ -2263,7 +2262,7 @@
           <a:p>
             <a:fld id="{5BCAD085-E8A6-8845-BD4E-CB4CCA059FC4}" type="datetimeFigureOut">
               <a:rPr lang="en-US" smtClean="0"/>
-              <a:t>1/27/13</a:t>
+              <a:t>10/9/2026</a:t>
             </a:fld>
             <a:endParaRPr lang="en-US"/>
           </a:p>
@@ -2366,10 +2365,9 @@
           </a:lstStyle>
           <a:p>
             <a:r>
-              <a:rPr lang="en-US" smtClean="0"/>
+              <a:rPr lang="en-US"/>
               <a:t>Click to edit Master title style</a:t>
             </a:r>
-            <a:endParaRPr lang="en-US"/>
           </a:p>
         </p:txBody>
       </p:sp>
@@ -2493,7 +2491,7 @@
           <a:p>
             <a:pPr lvl="0"/>
             <a:r>
-              <a:rPr lang="en-US" smtClean="0"/>
+              <a:rPr lang="en-US"/>
               <a:t>Click to edit Master text styles</a:t>
             </a:r>
           </a:p>
@@ -2516,7 +2514,7 @@
           <a:p>
             <a:fld id="{5BCAD085-E8A6-8845-BD4E-CB4CCA059FC4}" type="datetimeFigureOut">
               <a:rPr lang="en-US" smtClean="0"/>
-              <a:t>1/27/13</a:t>
+              <a:t>10/9/2026</a:t>
             </a:fld>
             <a:endParaRPr lang="en-US"/>
           </a:p>
@@ -2625,10 +2623,9 @@
           <a:lstStyle/>
           <a:p>
             <a:r>
-              <a:rPr lang="en-US" smtClean="0"/>
+              <a:rPr lang="en-US"/>
               <a:t>Click to edit Master title style</a:t>
             </a:r>
-            <a:endParaRPr lang="en-US"/>
           </a:p>
         </p:txBody>
       </p:sp>
@@ -2659,38 +2656,37 @@
           <a:p>
             <a:pPr lvl="0"/>
             <a:r>
-              <a:rPr lang="en-US" smtClean="0"/>
+              <a:rPr lang="en-US"/>
               <a:t>Click to edit Master text styles</a:t>
             </a:r>
           </a:p>
           <a:p>
             <a:pPr lvl="1"/>
             <a:r>
-              <a:rPr lang="en-US" smtClean="0"/>
+              <a:rPr lang="en-US"/>
               <a:t>Second level</a:t>
             </a:r>
           </a:p>
           <a:p>
             <a:pPr lvl="2"/>
             <a:r>
-              <a:rPr lang="en-US" smtClean="0"/>
+              <a:rPr lang="en-US"/>
               <a:t>Third level</a:t>
             </a:r>
           </a:p>
           <a:p>
             <a:pPr lvl="3"/>
             <a:r>
-              <a:rPr lang="en-US" smtClean="0"/>
+              <a:rPr lang="en-US"/>
               <a:t>Fourth level</a:t>
             </a:r>
           </a:p>
           <a:p>
             <a:pPr lvl="4"/>
             <a:r>
-              <a:rPr lang="en-US" smtClean="0"/>
+              <a:rPr lang="en-US"/>
               <a:t>Fifth level</a:t>
             </a:r>
-            <a:endParaRPr lang="en-US"/>
           </a:p>
         </p:txBody>
       </p:sp>
@@ -2729,7 +2725,7 @@
           <a:p>
             <a:fld id="{5BCAD085-E8A6-8845-BD4E-CB4CCA059FC4}" type="datetimeFigureOut">
               <a:rPr lang="en-US" smtClean="0"/>
-              <a:t>1/27/13</a:t>
+              <a:t>10/9/2026</a:t>
             </a:fld>
             <a:endParaRPr lang="en-US"/>
           </a:p>
@@ -3088,7 +3084,7 @@
 </file>
 
 <file path=ppt/slides/slide1.xml><?xml version="1.0" encoding="utf-8"?>
-<p:sld xmlns:a="http://schemas.openxmlformats.org/drawingml/2006/main" xmlns:p="http://schemas.openxmlformats.org/presentationml/2006/main" xmlns:r="http://schemas.openxmlformats.org/officeDocument/2006/relationships">
+<p:sld xmlns:a="http://schemas.openxmlformats.org/drawingml/2006/main" xmlns:r="http://schemas.openxmlformats.org/officeDocument/2006/relationships" xmlns:p="http://schemas.openxmlformats.org/presentationml/2006/main">
   <p:cSld>
     <p:spTree>
       <p:nvGrpSpPr>
@@ -3096,7 +3092,14 @@
         <p:cNvGrpSpPr/>
         <p:nvPr/>
       </p:nvGrpSpPr>
-      <p:grpSpPr/>
+      <p:grpSpPr>
+        <a:xfrm>
+          <a:off x="0" y="0"/>
+          <a:ext cx="0" cy="0"/>
+          <a:chOff x="0" y="0"/>
+          <a:chExt cx="0" cy="0"/>
+        </a:xfrm>
+      </p:grpSpPr>
       <p:sp>
         <p:nvSpPr>
           <p:cNvPr id="2" name="Rectangle 1"/>
@@ -3105,7 +3108,7 @@
         </p:nvSpPr>
         <p:spPr>
           <a:xfrm>
-            <a:off x="0" y="0"/>
+            <a:off x="305" y="-182880"/>
             <a:ext cx="12191695" cy="6858000"/>
           </a:xfrm>
           <a:prstGeom prst="rect">
@@ -3137,6 +3140,7 @@
           <a:lstStyle/>
           <a:p>
             <a:pPr algn="ctr"/>
+            <a:endParaRPr/>
           </a:p>
         </p:txBody>
       </p:sp>
@@ -3180,6 +3184,7 @@
           <a:lstStyle/>
           <a:p>
             <a:pPr algn="ctr"/>
+            <a:endParaRPr/>
           </a:p>
         </p:txBody>
       </p:sp>
@@ -3226,7 +3231,7 @@
         </p:nvSpPr>
         <p:spPr>
           <a:xfrm>
-            <a:off x="822960" y="2286000"/>
+            <a:off x="838047" y="2286000"/>
             <a:ext cx="10515600" cy="914400"/>
           </a:xfrm>
           <a:prstGeom prst="rect">
@@ -3262,7 +3267,7 @@
         <p:spPr>
           <a:xfrm>
             <a:off x="822960" y="3246120"/>
-            <a:ext cx="10515600" cy="822960"/>
+            <a:ext cx="10515600" cy="646331"/>
           </a:xfrm>
           <a:prstGeom prst="rect">
             <a:avLst/>
@@ -3277,19 +3282,37 @@
           <a:p>
             <a:pPr algn="l"/>
             <a:r>
-              <a:rPr sz="1800" b="0">
+              <a:rPr sz="1800" b="0" dirty="0">
                 <a:solidFill>
                   <a:srgbClr val="EEE8F5"/>
                 </a:solidFill>
                 <a:latin typeface="Calibri"/>
               </a:rPr>
-              <a:t>A multi-agent mock interview system that personalizes practice</a:t>
-            </a:r>
-          </a:p>
-          <a:p>
-            <a:pPr algn="l"/>
-            <a:r>
-              <a:rPr sz="1800" b="0">
+              <a:t>A </a:t>
+            </a:r>
+            <a:r>
+              <a:rPr lang="en-US" dirty="0">
+                <a:solidFill>
+                  <a:srgbClr val="EEE8F5"/>
+                </a:solidFill>
+                <a:latin typeface="Calibri"/>
+              </a:rPr>
+              <a:t>hybrid </a:t>
+            </a:r>
+            <a:r>
+              <a:rPr sz="1800" b="0" dirty="0">
+                <a:solidFill>
+                  <a:srgbClr val="EEE8F5"/>
+                </a:solidFill>
+                <a:latin typeface="Calibri"/>
+              </a:rPr>
+              <a:t>multi-agent mock interview system that personalizes practice</a:t>
+            </a:r>
+          </a:p>
+          <a:p>
+            <a:pPr algn="l"/>
+            <a:r>
+              <a:rPr sz="1800" b="0" dirty="0">
                 <a:solidFill>
                   <a:srgbClr val="EEE8F5"/>
                 </a:solidFill>
@@ -3332,6 +3355,148 @@
               </a:rPr>
               <a:t>Agentic AI Engineering  ·  Live demo + architecture walkthrough</a:t>
             </a:r>
+          </a:p>
+        </p:txBody>
+      </p:sp>
+      <p:sp>
+        <p:nvSpPr>
+          <p:cNvPr id="9" name="TextBox 8">
+            <a:extLst>
+              <a:ext uri="{FF2B5EF4-FFF2-40B4-BE49-F238E27FC236}">
+                <a16:creationId xmlns:a16="http://schemas.microsoft.com/office/drawing/2014/main" id="{95585370-AC8F-C4E2-EC1D-21A3A76644F2}"/>
+              </a:ext>
+            </a:extLst>
+          </p:cNvPr>
+          <p:cNvSpPr txBox="1"/>
+          <p:nvPr/>
+        </p:nvSpPr>
+        <p:spPr>
+          <a:xfrm>
+            <a:off x="673608" y="4568952"/>
+            <a:ext cx="10515600" cy="1200329"/>
+          </a:xfrm>
+          <a:prstGeom prst="rect">
+            <a:avLst/>
+          </a:prstGeom>
+          <a:noFill/>
+        </p:spPr>
+        <p:txBody>
+          <a:bodyPr wrap="square">
+            <a:spAutoFit/>
+          </a:bodyPr>
+          <a:lstStyle/>
+          <a:p>
+            <a:pPr algn="l"/>
+            <a:r>
+              <a:rPr lang="en-US" dirty="0">
+                <a:solidFill>
+                  <a:srgbClr val="EEE8F5"/>
+                </a:solidFill>
+                <a:latin typeface="Calibri"/>
+              </a:rPr>
+              <a:t>Prepared by:</a:t>
+            </a:r>
+          </a:p>
+          <a:p>
+            <a:pPr algn="l"/>
+            <a:endParaRPr lang="en-US" sz="1800" b="0" dirty="0">
+              <a:solidFill>
+                <a:srgbClr val="EEE8F5"/>
+              </a:solidFill>
+              <a:latin typeface="Calibri"/>
+            </a:endParaRPr>
+          </a:p>
+          <a:p>
+            <a:pPr marL="342900" indent="-342900" algn="l">
+              <a:buFont typeface="+mj-lt"/>
+              <a:buAutoNum type="arabicPeriod"/>
+            </a:pPr>
+            <a:r>
+              <a:rPr lang="en-US" sz="1800" b="0" dirty="0">
+                <a:solidFill>
+                  <a:srgbClr val="EEE8F5"/>
+                </a:solidFill>
+                <a:latin typeface="Calibri"/>
+              </a:rPr>
+              <a:t>Devendra Yadav</a:t>
+            </a:r>
+          </a:p>
+          <a:p>
+            <a:pPr marL="342900" indent="-342900" algn="l">
+              <a:buFont typeface="+mj-lt"/>
+              <a:buAutoNum type="arabicPeriod"/>
+            </a:pPr>
+            <a:r>
+              <a:rPr lang="en-US" dirty="0">
+                <a:solidFill>
+                  <a:srgbClr val="EEE8F5"/>
+                </a:solidFill>
+                <a:latin typeface="Calibri"/>
+              </a:rPr>
+              <a:t>Ferdinand Dinga</a:t>
+            </a:r>
+            <a:endParaRPr sz="1800" b="0" dirty="0">
+              <a:solidFill>
+                <a:srgbClr val="EEE8F5"/>
+              </a:solidFill>
+              <a:latin typeface="Calibri"/>
+            </a:endParaRPr>
+          </a:p>
+        </p:txBody>
+      </p:sp>
+      <p:sp>
+        <p:nvSpPr>
+          <p:cNvPr id="11" name="TextBox 10">
+            <a:extLst>
+              <a:ext uri="{FF2B5EF4-FFF2-40B4-BE49-F238E27FC236}">
+                <a16:creationId xmlns:a16="http://schemas.microsoft.com/office/drawing/2014/main" id="{E60C8FC2-021D-D213-3E25-7CF624200D05}"/>
+              </a:ext>
+            </a:extLst>
+          </p:cNvPr>
+          <p:cNvSpPr txBox="1"/>
+          <p:nvPr/>
+        </p:nvSpPr>
+        <p:spPr>
+          <a:xfrm>
+            <a:off x="10509504" y="190821"/>
+            <a:ext cx="1658112" cy="369332"/>
+          </a:xfrm>
+          <a:prstGeom prst="rect">
+            <a:avLst/>
+          </a:prstGeom>
+          <a:noFill/>
+        </p:spPr>
+        <p:txBody>
+          <a:bodyPr wrap="square">
+            <a:spAutoFit/>
+          </a:bodyPr>
+          <a:lstStyle/>
+          <a:p>
+            <a:pPr algn="l"/>
+            <a:r>
+              <a:rPr lang="en-US" dirty="0">
+                <a:solidFill>
+                  <a:srgbClr val="EEE8F5"/>
+                </a:solidFill>
+                <a:latin typeface="Calibri"/>
+              </a:rPr>
+              <a:t>Oct</a:t>
+            </a:r>
+            <a:r>
+              <a:rPr lang="en-US" sz="1800" b="0" dirty="0">
+                <a:solidFill>
+                  <a:srgbClr val="EEE8F5"/>
+                </a:solidFill>
+                <a:latin typeface="Calibri"/>
+              </a:rPr>
+              <a:t>-10-2026</a:t>
+            </a:r>
+            <a:endParaRPr sz="1800" b="0" dirty="0">
+              <a:solidFill>
+                <a:srgbClr val="EEE8F5"/>
+              </a:solidFill>
+              <a:latin typeface="Calibri"/>
+            </a:endParaRPr>
           </a:p>
         </p:txBody>
       </p:sp>
@@ -3344,7 +3509,7 @@
 </file>
 
 <file path=ppt/slides/slide10.xml><?xml version="1.0" encoding="utf-8"?>
-<p:sld xmlns:a="http://schemas.openxmlformats.org/drawingml/2006/main" xmlns:p="http://schemas.openxmlformats.org/presentationml/2006/main" xmlns:r="http://schemas.openxmlformats.org/officeDocument/2006/relationships">
+<p:sld xmlns:a="http://schemas.openxmlformats.org/drawingml/2006/main" xmlns:r="http://schemas.openxmlformats.org/officeDocument/2006/relationships" xmlns:p="http://schemas.openxmlformats.org/presentationml/2006/main">
   <p:cSld>
     <p:spTree>
       <p:nvGrpSpPr>
@@ -3352,7 +3517,528 @@
         <p:cNvGrpSpPr/>
         <p:nvPr/>
       </p:nvGrpSpPr>
-      <p:grpSpPr/>
+      <p:grpSpPr>
+        <a:xfrm>
+          <a:off x="0" y="0"/>
+          <a:ext cx="0" cy="0"/>
+          <a:chOff x="0" y="0"/>
+          <a:chExt cx="0" cy="0"/>
+        </a:xfrm>
+      </p:grpSpPr>
+      <p:sp>
+        <p:nvSpPr>
+          <p:cNvPr id="2" name="Rectangle 1"/>
+          <p:cNvSpPr/>
+          <p:nvPr/>
+        </p:nvSpPr>
+        <p:spPr>
+          <a:xfrm>
+            <a:off x="0" y="0"/>
+            <a:ext cx="12191695" cy="6858000"/>
+          </a:xfrm>
+          <a:prstGeom prst="rect">
+            <a:avLst/>
+          </a:prstGeom>
+          <a:solidFill>
+            <a:srgbClr val="F3F6F4"/>
+          </a:solidFill>
+          <a:ln>
+            <a:noFill/>
+          </a:ln>
+        </p:spPr>
+        <p:style>
+          <a:lnRef idx="1">
+            <a:schemeClr val="accent1"/>
+          </a:lnRef>
+          <a:fillRef idx="3">
+            <a:schemeClr val="accent1"/>
+          </a:fillRef>
+          <a:effectRef idx="2">
+            <a:schemeClr val="accent1"/>
+          </a:effectRef>
+          <a:fontRef idx="minor">
+            <a:schemeClr val="lt1"/>
+          </a:fontRef>
+        </p:style>
+        <p:txBody>
+          <a:bodyPr rtlCol="0" anchor="ctr"/>
+          <a:lstStyle/>
+          <a:p>
+            <a:pPr algn="ctr"/>
+            <a:endParaRPr/>
+          </a:p>
+        </p:txBody>
+      </p:sp>
+      <p:sp>
+        <p:nvSpPr>
+          <p:cNvPr id="3" name="TextBox 2"/>
+          <p:cNvSpPr txBox="1"/>
+          <p:nvPr/>
+        </p:nvSpPr>
+        <p:spPr>
+          <a:xfrm>
+            <a:off x="640080" y="320040"/>
+            <a:ext cx="10972800" cy="320040"/>
+          </a:xfrm>
+          <a:prstGeom prst="rect">
+            <a:avLst/>
+          </a:prstGeom>
+          <a:noFill/>
+        </p:spPr>
+        <p:txBody>
+          <a:bodyPr wrap="square">
+            <a:spAutoFit/>
+          </a:bodyPr>
+          <a:lstStyle/>
+          <a:p>
+            <a:pPr algn="l"/>
+            <a:r>
+              <a:rPr sz="1200" b="1">
+                <a:solidFill>
+                  <a:srgbClr val="0F6B5C"/>
+                </a:solidFill>
+                <a:latin typeface="Calibri"/>
+              </a:rPr>
+              <a:t>AI INTERVIEW COACH</a:t>
+            </a:r>
+          </a:p>
+        </p:txBody>
+      </p:sp>
+      <p:sp>
+        <p:nvSpPr>
+          <p:cNvPr id="4" name="TextBox 3"/>
+          <p:cNvSpPr txBox="1"/>
+          <p:nvPr/>
+        </p:nvSpPr>
+        <p:spPr>
+          <a:xfrm>
+            <a:off x="640080" y="594360"/>
+            <a:ext cx="10972800" cy="640080"/>
+          </a:xfrm>
+          <a:prstGeom prst="rect">
+            <a:avLst/>
+          </a:prstGeom>
+          <a:noFill/>
+        </p:spPr>
+        <p:txBody>
+          <a:bodyPr wrap="square">
+            <a:spAutoFit/>
+          </a:bodyPr>
+          <a:lstStyle/>
+          <a:p>
+            <a:pPr algn="l"/>
+            <a:r>
+              <a:rPr sz="3200" b="1">
+                <a:solidFill>
+                  <a:srgbClr val="523873"/>
+                </a:solidFill>
+                <a:latin typeface="Calibri"/>
+              </a:rPr>
+              <a:t>Scope, Limits &amp; Next Steps</a:t>
+            </a:r>
+          </a:p>
+        </p:txBody>
+      </p:sp>
+      <p:sp>
+        <p:nvSpPr>
+          <p:cNvPr id="5" name="TextBox 4"/>
+          <p:cNvSpPr txBox="1"/>
+          <p:nvPr/>
+        </p:nvSpPr>
+        <p:spPr>
+          <a:xfrm>
+            <a:off x="640080" y="1234440"/>
+            <a:ext cx="10972800" cy="457200"/>
+          </a:xfrm>
+          <a:prstGeom prst="rect">
+            <a:avLst/>
+          </a:prstGeom>
+          <a:noFill/>
+        </p:spPr>
+        <p:txBody>
+          <a:bodyPr wrap="square">
+            <a:spAutoFit/>
+          </a:bodyPr>
+          <a:lstStyle/>
+          <a:p>
+            <a:pPr algn="l"/>
+            <a:r>
+              <a:rPr sz="1600" b="0">
+                <a:solidFill>
+                  <a:srgbClr val="5A6B66"/>
+                </a:solidFill>
+                <a:latin typeface="Calibri"/>
+              </a:rPr>
+              <a:t>Honest about today — clear about tomorrow</a:t>
+            </a:r>
+          </a:p>
+        </p:txBody>
+      </p:sp>
+      <p:sp>
+        <p:nvSpPr>
+          <p:cNvPr id="6" name="Rounded Rectangle 5"/>
+          <p:cNvSpPr/>
+          <p:nvPr/>
+        </p:nvSpPr>
+        <p:spPr>
+          <a:xfrm>
+            <a:off x="640080" y="1920240"/>
+            <a:ext cx="5212080" cy="4114800"/>
+          </a:xfrm>
+          <a:prstGeom prst="roundRect">
+            <a:avLst>
+              <a:gd name="adj" fmla="val 8000"/>
+            </a:avLst>
+          </a:prstGeom>
+          <a:solidFill>
+            <a:srgbClr val="FFFFFF"/>
+          </a:solidFill>
+          <a:ln w="12700">
+            <a:solidFill>
+              <a:srgbClr val="D9E3DF"/>
+            </a:solidFill>
+          </a:ln>
+        </p:spPr>
+        <p:style>
+          <a:lnRef idx="1">
+            <a:schemeClr val="accent1"/>
+          </a:lnRef>
+          <a:fillRef idx="3">
+            <a:schemeClr val="accent1"/>
+          </a:fillRef>
+          <a:effectRef idx="2">
+            <a:schemeClr val="accent1"/>
+          </a:effectRef>
+          <a:fontRef idx="minor">
+            <a:schemeClr val="lt1"/>
+          </a:fontRef>
+        </p:style>
+        <p:txBody>
+          <a:bodyPr rtlCol="0" anchor="ctr"/>
+          <a:lstStyle/>
+          <a:p>
+            <a:pPr algn="ctr"/>
+            <a:endParaRPr/>
+          </a:p>
+        </p:txBody>
+      </p:sp>
+      <p:sp>
+        <p:nvSpPr>
+          <p:cNvPr id="7" name="Rounded Rectangle 6"/>
+          <p:cNvSpPr/>
+          <p:nvPr/>
+        </p:nvSpPr>
+        <p:spPr>
+          <a:xfrm>
+            <a:off x="6309360" y="1920240"/>
+            <a:ext cx="5212080" cy="4114800"/>
+          </a:xfrm>
+          <a:prstGeom prst="roundRect">
+            <a:avLst>
+              <a:gd name="adj" fmla="val 8000"/>
+            </a:avLst>
+          </a:prstGeom>
+          <a:solidFill>
+            <a:srgbClr val="FFFFFF"/>
+          </a:solidFill>
+          <a:ln w="12700">
+            <a:solidFill>
+              <a:srgbClr val="D9E3DF"/>
+            </a:solidFill>
+          </a:ln>
+        </p:spPr>
+        <p:style>
+          <a:lnRef idx="1">
+            <a:schemeClr val="accent1"/>
+          </a:lnRef>
+          <a:fillRef idx="3">
+            <a:schemeClr val="accent1"/>
+          </a:fillRef>
+          <a:effectRef idx="2">
+            <a:schemeClr val="accent1"/>
+          </a:effectRef>
+          <a:fontRef idx="minor">
+            <a:schemeClr val="lt1"/>
+          </a:fontRef>
+        </p:style>
+        <p:txBody>
+          <a:bodyPr rtlCol="0" anchor="ctr"/>
+          <a:lstStyle/>
+          <a:p>
+            <a:pPr algn="ctr"/>
+            <a:endParaRPr/>
+          </a:p>
+        </p:txBody>
+      </p:sp>
+      <p:sp>
+        <p:nvSpPr>
+          <p:cNvPr id="8" name="TextBox 7"/>
+          <p:cNvSpPr txBox="1"/>
+          <p:nvPr/>
+        </p:nvSpPr>
+        <p:spPr>
+          <a:xfrm>
+            <a:off x="914400" y="2148840"/>
+            <a:ext cx="4754880" cy="365760"/>
+          </a:xfrm>
+          <a:prstGeom prst="rect">
+            <a:avLst/>
+          </a:prstGeom>
+          <a:noFill/>
+        </p:spPr>
+        <p:txBody>
+          <a:bodyPr wrap="square">
+            <a:spAutoFit/>
+          </a:bodyPr>
+          <a:lstStyle/>
+          <a:p>
+            <a:pPr algn="l"/>
+            <a:r>
+              <a:rPr sz="1800" b="1">
+                <a:solidFill>
+                  <a:srgbClr val="523873"/>
+                </a:solidFill>
+                <a:latin typeface="Calibri"/>
+              </a:rPr>
+              <a:t>Current scope</a:t>
+            </a:r>
+          </a:p>
+        </p:txBody>
+      </p:sp>
+      <p:sp>
+        <p:nvSpPr>
+          <p:cNvPr id="9" name="TextBox 8"/>
+          <p:cNvSpPr txBox="1"/>
+          <p:nvPr/>
+        </p:nvSpPr>
+        <p:spPr>
+          <a:xfrm>
+            <a:off x="914400" y="2697480"/>
+            <a:ext cx="4754880" cy="3017520"/>
+          </a:xfrm>
+          <a:prstGeom prst="rect">
+            <a:avLst/>
+          </a:prstGeom>
+          <a:noFill/>
+        </p:spPr>
+        <p:txBody>
+          <a:bodyPr wrap="square">
+            <a:spAutoFit/>
+          </a:bodyPr>
+          <a:lstStyle/>
+          <a:p>
+            <a:pPr>
+              <a:spcAft>
+                <a:spcPts val="800"/>
+              </a:spcAft>
+            </a:pPr>
+            <a:r>
+              <a:rPr sz="1600" b="0">
+                <a:solidFill>
+                  <a:srgbClr val="1C2B28"/>
+                </a:solidFill>
+                <a:latin typeface="Calibri"/>
+              </a:rPr>
+              <a:t>•  Opening/closing questions are fixed</a:t>
+            </a:r>
+          </a:p>
+          <a:p>
+            <a:pPr>
+              <a:spcAft>
+                <a:spcPts val="800"/>
+              </a:spcAft>
+            </a:pPr>
+            <a:r>
+              <a:rPr sz="1600" b="0">
+                <a:solidFill>
+                  <a:srgbClr val="1C2B28"/>
+                </a:solidFill>
+                <a:latin typeface="Calibri"/>
+              </a:rPr>
+              <a:t>•  Four middle questions are tailored</a:t>
+            </a:r>
+          </a:p>
+          <a:p>
+            <a:pPr>
+              <a:spcAft>
+                <a:spcPts val="800"/>
+              </a:spcAft>
+            </a:pPr>
+            <a:r>
+              <a:rPr sz="1600" b="0">
+                <a:solidFill>
+                  <a:srgbClr val="1C2B28"/>
+                </a:solidFill>
+                <a:latin typeface="Calibri"/>
+              </a:rPr>
+              <a:t>•  Evaluation after the full interview</a:t>
+            </a:r>
+          </a:p>
+          <a:p>
+            <a:pPr>
+              <a:spcAft>
+                <a:spcPts val="800"/>
+              </a:spcAft>
+            </a:pPr>
+            <a:r>
+              <a:rPr sz="1600" b="0">
+                <a:solidFill>
+                  <a:srgbClr val="1C2B28"/>
+                </a:solidFill>
+                <a:latin typeface="Calibri"/>
+              </a:rPr>
+              <a:t>•  Local auth + local file storage</a:t>
+            </a:r>
+          </a:p>
+        </p:txBody>
+      </p:sp>
+      <p:sp>
+        <p:nvSpPr>
+          <p:cNvPr id="10" name="TextBox 9"/>
+          <p:cNvSpPr txBox="1"/>
+          <p:nvPr/>
+        </p:nvSpPr>
+        <p:spPr>
+          <a:xfrm>
+            <a:off x="6583680" y="2148840"/>
+            <a:ext cx="4754880" cy="365760"/>
+          </a:xfrm>
+          <a:prstGeom prst="rect">
+            <a:avLst/>
+          </a:prstGeom>
+          <a:noFill/>
+        </p:spPr>
+        <p:txBody>
+          <a:bodyPr wrap="square">
+            <a:spAutoFit/>
+          </a:bodyPr>
+          <a:lstStyle/>
+          <a:p>
+            <a:pPr algn="l"/>
+            <a:r>
+              <a:rPr sz="1800" b="1">
+                <a:solidFill>
+                  <a:srgbClr val="0F6B5C"/>
+                </a:solidFill>
+                <a:latin typeface="Calibri"/>
+              </a:rPr>
+              <a:t>Next steps</a:t>
+            </a:r>
+          </a:p>
+        </p:txBody>
+      </p:sp>
+      <p:sp>
+        <p:nvSpPr>
+          <p:cNvPr id="11" name="TextBox 10"/>
+          <p:cNvSpPr txBox="1"/>
+          <p:nvPr/>
+        </p:nvSpPr>
+        <p:spPr>
+          <a:xfrm>
+            <a:off x="6583680" y="2697480"/>
+            <a:ext cx="4754880" cy="3017520"/>
+          </a:xfrm>
+          <a:prstGeom prst="rect">
+            <a:avLst/>
+          </a:prstGeom>
+          <a:noFill/>
+        </p:spPr>
+        <p:txBody>
+          <a:bodyPr wrap="square">
+            <a:spAutoFit/>
+          </a:bodyPr>
+          <a:lstStyle/>
+          <a:p>
+            <a:pPr>
+              <a:spcAft>
+                <a:spcPts val="800"/>
+              </a:spcAft>
+            </a:pPr>
+            <a:r>
+              <a:rPr sz="1600" b="0">
+                <a:solidFill>
+                  <a:srgbClr val="1C2B28"/>
+                </a:solidFill>
+                <a:latin typeface="Calibri"/>
+              </a:rPr>
+              <a:t>•  Adaptive follow-up questions</a:t>
+            </a:r>
+          </a:p>
+          <a:p>
+            <a:pPr>
+              <a:spcAft>
+                <a:spcPts val="800"/>
+              </a:spcAft>
+            </a:pPr>
+            <a:r>
+              <a:rPr sz="1600" b="0">
+                <a:solidFill>
+                  <a:srgbClr val="1C2B28"/>
+                </a:solidFill>
+                <a:latin typeface="Calibri"/>
+              </a:rPr>
+              <a:t>•  Richer scoring rubric per answer</a:t>
+            </a:r>
+          </a:p>
+          <a:p>
+            <a:pPr>
+              <a:spcAft>
+                <a:spcPts val="800"/>
+              </a:spcAft>
+            </a:pPr>
+            <a:r>
+              <a:rPr sz="1600" b="0">
+                <a:solidFill>
+                  <a:srgbClr val="1C2B28"/>
+                </a:solidFill>
+                <a:latin typeface="Calibri"/>
+              </a:rPr>
+              <a:t>•  Cloud storage / stronger production auth</a:t>
+            </a:r>
+          </a:p>
+          <a:p>
+            <a:pPr>
+              <a:spcAft>
+                <a:spcPts val="800"/>
+              </a:spcAft>
+            </a:pPr>
+            <a:r>
+              <a:rPr sz="1600" b="0">
+                <a:solidFill>
+                  <a:srgbClr val="1C2B28"/>
+                </a:solidFill>
+                <a:latin typeface="Calibri"/>
+              </a:rPr>
+              <a:t>•  Progress analytics across sessions</a:t>
+            </a:r>
+          </a:p>
+        </p:txBody>
+      </p:sp>
+    </p:spTree>
+  </p:cSld>
+  <p:clrMapOvr>
+    <a:masterClrMapping/>
+  </p:clrMapOvr>
+</p:sld>
+</file>
+
+<file path=ppt/slides/slide11.xml><?xml version="1.0" encoding="utf-8"?>
+<p:sld xmlns:a="http://schemas.openxmlformats.org/drawingml/2006/main" xmlns:r="http://schemas.openxmlformats.org/officeDocument/2006/relationships" xmlns:p="http://schemas.openxmlformats.org/presentationml/2006/main">
+  <p:cSld>
+    <p:spTree>
+      <p:nvGrpSpPr>
+        <p:cNvPr id="1" name=""/>
+        <p:cNvGrpSpPr/>
+        <p:nvPr/>
+      </p:nvGrpSpPr>
+      <p:grpSpPr>
+        <a:xfrm>
+          <a:off x="0" y="0"/>
+          <a:ext cx="0" cy="0"/>
+          <a:chOff x="0" y="0"/>
+          <a:chExt cx="0" cy="0"/>
+        </a:xfrm>
+      </p:grpSpPr>
       <p:sp>
         <p:nvSpPr>
           <p:cNvPr id="2" name="Rectangle 1"/>
@@ -3393,6 +4079,7 @@
           <a:lstStyle/>
           <a:p>
             <a:pPr algn="ctr"/>
+            <a:endParaRPr/>
           </a:p>
         </p:txBody>
       </p:sp>
@@ -3436,6 +4123,7 @@
           <a:lstStyle/>
           <a:p>
             <a:pPr algn="ctr"/>
+            <a:endParaRPr/>
           </a:p>
         </p:txBody>
       </p:sp>
@@ -3612,7 +4300,7 @@
 </file>
 
 <file path=ppt/slides/slide2.xml><?xml version="1.0" encoding="utf-8"?>
-<p:sld xmlns:a="http://schemas.openxmlformats.org/drawingml/2006/main" xmlns:p="http://schemas.openxmlformats.org/presentationml/2006/main" xmlns:r="http://schemas.openxmlformats.org/officeDocument/2006/relationships">
+<p:sld xmlns:a="http://schemas.openxmlformats.org/drawingml/2006/main" xmlns:r="http://schemas.openxmlformats.org/officeDocument/2006/relationships" xmlns:p="http://schemas.openxmlformats.org/presentationml/2006/main">
   <p:cSld>
     <p:spTree>
       <p:nvGrpSpPr>
@@ -3620,7 +4308,14 @@
         <p:cNvGrpSpPr/>
         <p:nvPr/>
       </p:nvGrpSpPr>
-      <p:grpSpPr/>
+      <p:grpSpPr>
+        <a:xfrm>
+          <a:off x="0" y="0"/>
+          <a:ext cx="0" cy="0"/>
+          <a:chOff x="0" y="0"/>
+          <a:chExt cx="0" cy="0"/>
+        </a:xfrm>
+      </p:grpSpPr>
       <p:sp>
         <p:nvSpPr>
           <p:cNvPr id="2" name="Rectangle 1"/>
@@ -3661,6 +4356,7 @@
           <a:lstStyle/>
           <a:p>
             <a:pPr algn="ctr"/>
+            <a:endParaRPr/>
           </a:p>
         </p:txBody>
       </p:sp>
@@ -3813,6 +4509,7 @@
           <a:lstStyle/>
           <a:p>
             <a:pPr algn="ctr"/>
+            <a:endParaRPr/>
           </a:p>
         </p:txBody>
       </p:sp>
@@ -3860,6 +4557,7 @@
           <a:lstStyle/>
           <a:p>
             <a:pPr algn="ctr"/>
+            <a:endParaRPr/>
           </a:p>
         </p:txBody>
       </p:sp>
@@ -4116,7 +4814,7 @@
 </file>
 
 <file path=ppt/slides/slide3.xml><?xml version="1.0" encoding="utf-8"?>
-<p:sld xmlns:a="http://schemas.openxmlformats.org/drawingml/2006/main" xmlns:p="http://schemas.openxmlformats.org/presentationml/2006/main" xmlns:r="http://schemas.openxmlformats.org/officeDocument/2006/relationships">
+<p:sld xmlns:a="http://schemas.openxmlformats.org/drawingml/2006/main" xmlns:r="http://schemas.openxmlformats.org/officeDocument/2006/relationships" xmlns:p="http://schemas.openxmlformats.org/presentationml/2006/main">
   <p:cSld>
     <p:spTree>
       <p:nvGrpSpPr>
@@ -4124,7 +4822,14 @@
         <p:cNvGrpSpPr/>
         <p:nvPr/>
       </p:nvGrpSpPr>
-      <p:grpSpPr/>
+      <p:grpSpPr>
+        <a:xfrm>
+          <a:off x="0" y="0"/>
+          <a:ext cx="0" cy="0"/>
+          <a:chOff x="0" y="0"/>
+          <a:chExt cx="0" cy="0"/>
+        </a:xfrm>
+      </p:grpSpPr>
       <p:sp>
         <p:nvSpPr>
           <p:cNvPr id="2" name="Rectangle 1"/>
@@ -4165,6 +4870,7 @@
           <a:lstStyle/>
           <a:p>
             <a:pPr algn="ctr"/>
+            <a:endParaRPr/>
           </a:p>
         </p:txBody>
       </p:sp>
@@ -4317,6 +5023,7 @@
           <a:lstStyle/>
           <a:p>
             <a:pPr algn="ctr"/>
+            <a:endParaRPr/>
           </a:p>
         </p:txBody>
       </p:sp>
@@ -4411,6 +5118,7 @@
           <a:lstStyle/>
           <a:p>
             <a:pPr algn="ctr"/>
+            <a:endParaRPr/>
           </a:p>
         </p:txBody>
       </p:sp>
@@ -4575,6 +5283,7 @@
           <a:lstStyle/>
           <a:p>
             <a:pPr algn="ctr"/>
+            <a:endParaRPr/>
           </a:p>
         </p:txBody>
       </p:sp>
@@ -4739,6 +5448,7 @@
           <a:lstStyle/>
           <a:p>
             <a:pPr algn="ctr"/>
+            <a:endParaRPr/>
           </a:p>
         </p:txBody>
       </p:sp>
@@ -4903,6 +5613,7 @@
           <a:lstStyle/>
           <a:p>
             <a:pPr algn="ctr"/>
+            <a:endParaRPr/>
           </a:p>
         </p:txBody>
       </p:sp>
@@ -5032,7 +5743,7 @@
 </file>
 
 <file path=ppt/slides/slide4.xml><?xml version="1.0" encoding="utf-8"?>
-<p:sld xmlns:a="http://schemas.openxmlformats.org/drawingml/2006/main" xmlns:p="http://schemas.openxmlformats.org/presentationml/2006/main" xmlns:r="http://schemas.openxmlformats.org/officeDocument/2006/relationships">
+<p:sld xmlns:a="http://schemas.openxmlformats.org/drawingml/2006/main" xmlns:r="http://schemas.openxmlformats.org/officeDocument/2006/relationships" xmlns:p="http://schemas.openxmlformats.org/presentationml/2006/main">
   <p:cSld>
     <p:spTree>
       <p:nvGrpSpPr>
@@ -5040,7 +5751,74 @@
         <p:cNvGrpSpPr/>
         <p:nvPr/>
       </p:nvGrpSpPr>
-      <p:grpSpPr/>
+      <p:grpSpPr>
+        <a:xfrm>
+          <a:off x="0" y="0"/>
+          <a:ext cx="0" cy="0"/>
+          <a:chOff x="0" y="0"/>
+          <a:chExt cx="0" cy="0"/>
+        </a:xfrm>
+      </p:grpSpPr>
+      <p:pic>
+        <p:nvPicPr>
+          <p:cNvPr id="3" name="Picture 2">
+            <a:extLst>
+              <a:ext uri="{FF2B5EF4-FFF2-40B4-BE49-F238E27FC236}">
+                <a16:creationId xmlns:a16="http://schemas.microsoft.com/office/drawing/2014/main" id="{1F34BAD7-C8D9-D7A1-2A41-63E5320C1A14}"/>
+              </a:ext>
+            </a:extLst>
+          </p:cNvPr>
+          <p:cNvPicPr>
+            <a:picLocks noChangeAspect="1"/>
+          </p:cNvPicPr>
+          <p:nvPr/>
+        </p:nvPicPr>
+        <p:blipFill>
+          <a:blip r:embed="rId2"/>
+          <a:stretch>
+            <a:fillRect/>
+          </a:stretch>
+        </p:blipFill>
+        <p:spPr>
+          <a:xfrm>
+            <a:off x="533400" y="143933"/>
+            <a:ext cx="11252200" cy="6595534"/>
+          </a:xfrm>
+          <a:prstGeom prst="rect">
+            <a:avLst/>
+          </a:prstGeom>
+        </p:spPr>
+      </p:pic>
+    </p:spTree>
+    <p:extLst>
+      <p:ext uri="{BB962C8B-B14F-4D97-AF65-F5344CB8AC3E}">
+        <p14:creationId xmlns:p14="http://schemas.microsoft.com/office/powerpoint/2010/main" val="2875449823"/>
+      </p:ext>
+    </p:extLst>
+  </p:cSld>
+  <p:clrMapOvr>
+    <a:masterClrMapping/>
+  </p:clrMapOvr>
+</p:sld>
+</file>
+
+<file path=ppt/slides/slide5.xml><?xml version="1.0" encoding="utf-8"?>
+<p:sld xmlns:a="http://schemas.openxmlformats.org/drawingml/2006/main" xmlns:r="http://schemas.openxmlformats.org/officeDocument/2006/relationships" xmlns:p="http://schemas.openxmlformats.org/presentationml/2006/main">
+  <p:cSld>
+    <p:spTree>
+      <p:nvGrpSpPr>
+        <p:cNvPr id="1" name=""/>
+        <p:cNvGrpSpPr/>
+        <p:nvPr/>
+      </p:nvGrpSpPr>
+      <p:grpSpPr>
+        <a:xfrm>
+          <a:off x="0" y="0"/>
+          <a:ext cx="0" cy="0"/>
+          <a:chOff x="0" y="0"/>
+          <a:chExt cx="0" cy="0"/>
+        </a:xfrm>
+      </p:grpSpPr>
       <p:sp>
         <p:nvSpPr>
           <p:cNvPr id="2" name="Rectangle 1"/>
@@ -5081,6 +5859,7 @@
           <a:lstStyle/>
           <a:p>
             <a:pPr algn="ctr"/>
+            <a:endParaRPr/>
           </a:p>
         </p:txBody>
       </p:sp>
@@ -5233,6 +6012,7 @@
           <a:lstStyle/>
           <a:p>
             <a:pPr algn="ctr"/>
+            <a:endParaRPr/>
           </a:p>
         </p:txBody>
       </p:sp>
@@ -5276,6 +6056,7 @@
           <a:lstStyle/>
           <a:p>
             <a:pPr algn="ctr"/>
+            <a:endParaRPr/>
           </a:p>
         </p:txBody>
       </p:sp>
@@ -5405,6 +6186,7 @@
           <a:lstStyle/>
           <a:p>
             <a:pPr algn="ctr"/>
+            <a:endParaRPr/>
           </a:p>
         </p:txBody>
       </p:sp>
@@ -5448,6 +6230,7 @@
           <a:lstStyle/>
           <a:p>
             <a:pPr algn="ctr"/>
+            <a:endParaRPr/>
           </a:p>
         </p:txBody>
       </p:sp>
@@ -5577,6 +6360,7 @@
           <a:lstStyle/>
           <a:p>
             <a:pPr algn="ctr"/>
+            <a:endParaRPr/>
           </a:p>
         </p:txBody>
       </p:sp>
@@ -5620,6 +6404,7 @@
           <a:lstStyle/>
           <a:p>
             <a:pPr algn="ctr"/>
+            <a:endParaRPr/>
           </a:p>
         </p:txBody>
       </p:sp>
@@ -5749,6 +6534,7 @@
           <a:lstStyle/>
           <a:p>
             <a:pPr algn="ctr"/>
+            <a:endParaRPr/>
           </a:p>
         </p:txBody>
       </p:sp>
@@ -5792,6 +6578,7 @@
           <a:lstStyle/>
           <a:p>
             <a:pPr algn="ctr"/>
+            <a:endParaRPr/>
           </a:p>
         </p:txBody>
       </p:sp>
@@ -5873,874 +6660,6 @@
                 <a:latin typeface="Calibri"/>
               </a:rPr>
               <a:t>Produces final coaching feedback</a:t>
-            </a:r>
-          </a:p>
-        </p:txBody>
-      </p:sp>
-    </p:spTree>
-  </p:cSld>
-  <p:clrMapOvr>
-    <a:masterClrMapping/>
-  </p:clrMapOvr>
-</p:sld>
-</file>
-
-<file path=ppt/slides/slide5.xml><?xml version="1.0" encoding="utf-8"?>
-<p:sld xmlns:a="http://schemas.openxmlformats.org/drawingml/2006/main" xmlns:p="http://schemas.openxmlformats.org/presentationml/2006/main" xmlns:r="http://schemas.openxmlformats.org/officeDocument/2006/relationships">
-  <p:cSld>
-    <p:spTree>
-      <p:nvGrpSpPr>
-        <p:cNvPr id="1" name=""/>
-        <p:cNvGrpSpPr/>
-        <p:nvPr/>
-      </p:nvGrpSpPr>
-      <p:grpSpPr/>
-      <p:sp>
-        <p:nvSpPr>
-          <p:cNvPr id="2" name="Rectangle 1"/>
-          <p:cNvSpPr/>
-          <p:nvPr/>
-        </p:nvSpPr>
-        <p:spPr>
-          <a:xfrm>
-            <a:off x="0" y="0"/>
-            <a:ext cx="12191695" cy="6858000"/>
-          </a:xfrm>
-          <a:prstGeom prst="rect">
-            <a:avLst/>
-          </a:prstGeom>
-          <a:solidFill>
-            <a:srgbClr val="F3F6F4"/>
-          </a:solidFill>
-          <a:ln>
-            <a:noFill/>
-          </a:ln>
-        </p:spPr>
-        <p:style>
-          <a:lnRef idx="1">
-            <a:schemeClr val="accent1"/>
-          </a:lnRef>
-          <a:fillRef idx="3">
-            <a:schemeClr val="accent1"/>
-          </a:fillRef>
-          <a:effectRef idx="2">
-            <a:schemeClr val="accent1"/>
-          </a:effectRef>
-          <a:fontRef idx="minor">
-            <a:schemeClr val="lt1"/>
-          </a:fontRef>
-        </p:style>
-        <p:txBody>
-          <a:bodyPr rtlCol="0" anchor="ctr"/>
-          <a:lstStyle/>
-          <a:p>
-            <a:pPr algn="ctr"/>
-          </a:p>
-        </p:txBody>
-      </p:sp>
-      <p:sp>
-        <p:nvSpPr>
-          <p:cNvPr id="3" name="TextBox 2"/>
-          <p:cNvSpPr txBox="1"/>
-          <p:nvPr/>
-        </p:nvSpPr>
-        <p:spPr>
-          <a:xfrm>
-            <a:off x="640080" y="320040"/>
-            <a:ext cx="10972800" cy="320040"/>
-          </a:xfrm>
-          <a:prstGeom prst="rect">
-            <a:avLst/>
-          </a:prstGeom>
-          <a:noFill/>
-        </p:spPr>
-        <p:txBody>
-          <a:bodyPr wrap="square">
-            <a:spAutoFit/>
-          </a:bodyPr>
-          <a:lstStyle/>
-          <a:p>
-            <a:pPr algn="l"/>
-            <a:r>
-              <a:rPr sz="1200" b="1">
-                <a:solidFill>
-                  <a:srgbClr val="0F6B5C"/>
-                </a:solidFill>
-                <a:latin typeface="Calibri"/>
-              </a:rPr>
-              <a:t>AI INTERVIEW COACH</a:t>
-            </a:r>
-          </a:p>
-        </p:txBody>
-      </p:sp>
-      <p:sp>
-        <p:nvSpPr>
-          <p:cNvPr id="4" name="TextBox 3"/>
-          <p:cNvSpPr txBox="1"/>
-          <p:nvPr/>
-        </p:nvSpPr>
-        <p:spPr>
-          <a:xfrm>
-            <a:off x="640080" y="594360"/>
-            <a:ext cx="10972800" cy="640080"/>
-          </a:xfrm>
-          <a:prstGeom prst="rect">
-            <a:avLst/>
-          </a:prstGeom>
-          <a:noFill/>
-        </p:spPr>
-        <p:txBody>
-          <a:bodyPr wrap="square">
-            <a:spAutoFit/>
-          </a:bodyPr>
-          <a:lstStyle/>
-          <a:p>
-            <a:pPr algn="l"/>
-            <a:r>
-              <a:rPr sz="3200" b="1">
-                <a:solidFill>
-                  <a:srgbClr val="523873"/>
-                </a:solidFill>
-                <a:latin typeface="Calibri"/>
-              </a:rPr>
-              <a:t>Product Layer Around the Agents</a:t>
-            </a:r>
-          </a:p>
-        </p:txBody>
-      </p:sp>
-      <p:sp>
-        <p:nvSpPr>
-          <p:cNvPr id="5" name="TextBox 4"/>
-          <p:cNvSpPr txBox="1"/>
-          <p:nvPr/>
-        </p:nvSpPr>
-        <p:spPr>
-          <a:xfrm>
-            <a:off x="640080" y="1234440"/>
-            <a:ext cx="10972800" cy="457200"/>
-          </a:xfrm>
-          <a:prstGeom prst="rect">
-            <a:avLst/>
-          </a:prstGeom>
-          <a:noFill/>
-        </p:spPr>
-        <p:txBody>
-          <a:bodyPr wrap="square">
-            <a:spAutoFit/>
-          </a:bodyPr>
-          <a:lstStyle/>
-          <a:p>
-            <a:pPr algn="l"/>
-            <a:r>
-              <a:rPr sz="1600" b="0">
-                <a:solidFill>
-                  <a:srgbClr val="5A6B66"/>
-                </a:solidFill>
-                <a:latin typeface="Calibri"/>
-              </a:rPr>
-              <a:t>From model calls to a usable practice product</a:t>
-            </a:r>
-          </a:p>
-        </p:txBody>
-      </p:sp>
-      <p:sp>
-        <p:nvSpPr>
-          <p:cNvPr id="6" name="Rounded Rectangle 5"/>
-          <p:cNvSpPr/>
-          <p:nvPr/>
-        </p:nvSpPr>
-        <p:spPr>
-          <a:xfrm>
-            <a:off x="640080" y="1965960"/>
-            <a:ext cx="3566160" cy="1920240"/>
-          </a:xfrm>
-          <a:prstGeom prst="roundRect">
-            <a:avLst>
-              <a:gd name="adj" fmla="val 8000"/>
-            </a:avLst>
-          </a:prstGeom>
-          <a:solidFill>
-            <a:srgbClr val="FFFFFF"/>
-          </a:solidFill>
-          <a:ln w="12700">
-            <a:solidFill>
-              <a:srgbClr val="D9E3DF"/>
-            </a:solidFill>
-          </a:ln>
-        </p:spPr>
-        <p:style>
-          <a:lnRef idx="1">
-            <a:schemeClr val="accent1"/>
-          </a:lnRef>
-          <a:fillRef idx="3">
-            <a:schemeClr val="accent1"/>
-          </a:fillRef>
-          <a:effectRef idx="2">
-            <a:schemeClr val="accent1"/>
-          </a:effectRef>
-          <a:fontRef idx="minor">
-            <a:schemeClr val="lt1"/>
-          </a:fontRef>
-        </p:style>
-        <p:txBody>
-          <a:bodyPr rtlCol="0" anchor="ctr"/>
-          <a:lstStyle/>
-          <a:p>
-            <a:pPr algn="ctr"/>
-          </a:p>
-        </p:txBody>
-      </p:sp>
-      <p:sp>
-        <p:nvSpPr>
-          <p:cNvPr id="7" name="TextBox 6"/>
-          <p:cNvSpPr txBox="1"/>
-          <p:nvPr/>
-        </p:nvSpPr>
-        <p:spPr>
-          <a:xfrm>
-            <a:off x="914400" y="2377440"/>
-            <a:ext cx="3017520" cy="365760"/>
-          </a:xfrm>
-          <a:prstGeom prst="rect">
-            <a:avLst/>
-          </a:prstGeom>
-          <a:noFill/>
-        </p:spPr>
-        <p:txBody>
-          <a:bodyPr wrap="square">
-            <a:spAutoFit/>
-          </a:bodyPr>
-          <a:lstStyle/>
-          <a:p>
-            <a:pPr algn="l"/>
-            <a:r>
-              <a:rPr sz="1800" b="1">
-                <a:solidFill>
-                  <a:srgbClr val="0F6B5C"/>
-                </a:solidFill>
-                <a:latin typeface="Calibri"/>
-              </a:rPr>
-              <a:t>Auth</a:t>
-            </a:r>
-          </a:p>
-        </p:txBody>
-      </p:sp>
-      <p:sp>
-        <p:nvSpPr>
-          <p:cNvPr id="8" name="TextBox 7"/>
-          <p:cNvSpPr txBox="1"/>
-          <p:nvPr/>
-        </p:nvSpPr>
-        <p:spPr>
-          <a:xfrm>
-            <a:off x="914400" y="2926080"/>
-            <a:ext cx="3017520" cy="731520"/>
-          </a:xfrm>
-          <a:prstGeom prst="rect">
-            <a:avLst/>
-          </a:prstGeom>
-          <a:noFill/>
-        </p:spPr>
-        <p:txBody>
-          <a:bodyPr wrap="square">
-            <a:spAutoFit/>
-          </a:bodyPr>
-          <a:lstStyle/>
-          <a:p>
-            <a:pPr algn="l"/>
-            <a:r>
-              <a:rPr sz="1500" b="0">
-                <a:solidFill>
-                  <a:srgbClr val="1C2B28"/>
-                </a:solidFill>
-                <a:latin typeface="Calibri"/>
-              </a:rPr>
-              <a:t>Email/password accounts with hashed credentials</a:t>
-            </a:r>
-          </a:p>
-        </p:txBody>
-      </p:sp>
-      <p:sp>
-        <p:nvSpPr>
-          <p:cNvPr id="9" name="Rounded Rectangle 8"/>
-          <p:cNvSpPr/>
-          <p:nvPr/>
-        </p:nvSpPr>
-        <p:spPr>
-          <a:xfrm>
-            <a:off x="4389120" y="1965960"/>
-            <a:ext cx="3566160" cy="1920240"/>
-          </a:xfrm>
-          <a:prstGeom prst="roundRect">
-            <a:avLst>
-              <a:gd name="adj" fmla="val 8000"/>
-            </a:avLst>
-          </a:prstGeom>
-          <a:solidFill>
-            <a:srgbClr val="FFFFFF"/>
-          </a:solidFill>
-          <a:ln w="12700">
-            <a:solidFill>
-              <a:srgbClr val="D9E3DF"/>
-            </a:solidFill>
-          </a:ln>
-        </p:spPr>
-        <p:style>
-          <a:lnRef idx="1">
-            <a:schemeClr val="accent1"/>
-          </a:lnRef>
-          <a:fillRef idx="3">
-            <a:schemeClr val="accent1"/>
-          </a:fillRef>
-          <a:effectRef idx="2">
-            <a:schemeClr val="accent1"/>
-          </a:effectRef>
-          <a:fontRef idx="minor">
-            <a:schemeClr val="lt1"/>
-          </a:fontRef>
-        </p:style>
-        <p:txBody>
-          <a:bodyPr rtlCol="0" anchor="ctr"/>
-          <a:lstStyle/>
-          <a:p>
-            <a:pPr algn="ctr"/>
-          </a:p>
-        </p:txBody>
-      </p:sp>
-      <p:sp>
-        <p:nvSpPr>
-          <p:cNvPr id="10" name="TextBox 9"/>
-          <p:cNvSpPr txBox="1"/>
-          <p:nvPr/>
-        </p:nvSpPr>
-        <p:spPr>
-          <a:xfrm>
-            <a:off x="4663440" y="2377440"/>
-            <a:ext cx="3017520" cy="365760"/>
-          </a:xfrm>
-          <a:prstGeom prst="rect">
-            <a:avLst/>
-          </a:prstGeom>
-          <a:noFill/>
-        </p:spPr>
-        <p:txBody>
-          <a:bodyPr wrap="square">
-            <a:spAutoFit/>
-          </a:bodyPr>
-          <a:lstStyle/>
-          <a:p>
-            <a:pPr algn="l"/>
-            <a:r>
-              <a:rPr sz="1800" b="1">
-                <a:solidFill>
-                  <a:srgbClr val="0F6B5C"/>
-                </a:solidFill>
-                <a:latin typeface="Calibri"/>
-              </a:rPr>
-              <a:t>Document library</a:t>
-            </a:r>
-          </a:p>
-        </p:txBody>
-      </p:sp>
-      <p:sp>
-        <p:nvSpPr>
-          <p:cNvPr id="11" name="TextBox 10"/>
-          <p:cNvSpPr txBox="1"/>
-          <p:nvPr/>
-        </p:nvSpPr>
-        <p:spPr>
-          <a:xfrm>
-            <a:off x="4663440" y="2926080"/>
-            <a:ext cx="3017520" cy="731520"/>
-          </a:xfrm>
-          <a:prstGeom prst="rect">
-            <a:avLst/>
-          </a:prstGeom>
-          <a:noFill/>
-        </p:spPr>
-        <p:txBody>
-          <a:bodyPr wrap="square">
-            <a:spAutoFit/>
-          </a:bodyPr>
-          <a:lstStyle/>
-          <a:p>
-            <a:pPr algn="l"/>
-            <a:r>
-              <a:rPr sz="1500" b="0">
-                <a:solidFill>
-                  <a:srgbClr val="1C2B28"/>
-                </a:solidFill>
-                <a:latin typeface="Calibri"/>
-              </a:rPr>
-              <a:t>Save and reuse resumes &amp; job descriptions</a:t>
-            </a:r>
-          </a:p>
-        </p:txBody>
-      </p:sp>
-      <p:sp>
-        <p:nvSpPr>
-          <p:cNvPr id="12" name="Rounded Rectangle 11"/>
-          <p:cNvSpPr/>
-          <p:nvPr/>
-        </p:nvSpPr>
-        <p:spPr>
-          <a:xfrm>
-            <a:off x="8138159" y="1965960"/>
-            <a:ext cx="3566160" cy="1920240"/>
-          </a:xfrm>
-          <a:prstGeom prst="roundRect">
-            <a:avLst>
-              <a:gd name="adj" fmla="val 8000"/>
-            </a:avLst>
-          </a:prstGeom>
-          <a:solidFill>
-            <a:srgbClr val="FFFFFF"/>
-          </a:solidFill>
-          <a:ln w="12700">
-            <a:solidFill>
-              <a:srgbClr val="D9E3DF"/>
-            </a:solidFill>
-          </a:ln>
-        </p:spPr>
-        <p:style>
-          <a:lnRef idx="1">
-            <a:schemeClr val="accent1"/>
-          </a:lnRef>
-          <a:fillRef idx="3">
-            <a:schemeClr val="accent1"/>
-          </a:fillRef>
-          <a:effectRef idx="2">
-            <a:schemeClr val="accent1"/>
-          </a:effectRef>
-          <a:fontRef idx="minor">
-            <a:schemeClr val="lt1"/>
-          </a:fontRef>
-        </p:style>
-        <p:txBody>
-          <a:bodyPr rtlCol="0" anchor="ctr"/>
-          <a:lstStyle/>
-          <a:p>
-            <a:pPr algn="ctr"/>
-          </a:p>
-        </p:txBody>
-      </p:sp>
-      <p:sp>
-        <p:nvSpPr>
-          <p:cNvPr id="13" name="TextBox 12"/>
-          <p:cNvSpPr txBox="1"/>
-          <p:nvPr/>
-        </p:nvSpPr>
-        <p:spPr>
-          <a:xfrm>
-            <a:off x="8412479" y="2377440"/>
-            <a:ext cx="3017520" cy="365760"/>
-          </a:xfrm>
-          <a:prstGeom prst="rect">
-            <a:avLst/>
-          </a:prstGeom>
-          <a:noFill/>
-        </p:spPr>
-        <p:txBody>
-          <a:bodyPr wrap="square">
-            <a:spAutoFit/>
-          </a:bodyPr>
-          <a:lstStyle/>
-          <a:p>
-            <a:pPr algn="l"/>
-            <a:r>
-              <a:rPr sz="1800" b="1">
-                <a:solidFill>
-                  <a:srgbClr val="0F6B5C"/>
-                </a:solidFill>
-                <a:latin typeface="Calibri"/>
-              </a:rPr>
-              <a:t>Conversation history</a:t>
-            </a:r>
-          </a:p>
-        </p:txBody>
-      </p:sp>
-      <p:sp>
-        <p:nvSpPr>
-          <p:cNvPr id="14" name="TextBox 13"/>
-          <p:cNvSpPr txBox="1"/>
-          <p:nvPr/>
-        </p:nvSpPr>
-        <p:spPr>
-          <a:xfrm>
-            <a:off x="8412479" y="2926080"/>
-            <a:ext cx="3017520" cy="731520"/>
-          </a:xfrm>
-          <a:prstGeom prst="rect">
-            <a:avLst/>
-          </a:prstGeom>
-          <a:noFill/>
-        </p:spPr>
-        <p:txBody>
-          <a:bodyPr wrap="square">
-            <a:spAutoFit/>
-          </a:bodyPr>
-          <a:lstStyle/>
-          <a:p>
-            <a:pPr algn="l"/>
-            <a:r>
-              <a:rPr sz="1500" b="0">
-                <a:solidFill>
-                  <a:srgbClr val="1C2B28"/>
-                </a:solidFill>
-                <a:latin typeface="Calibri"/>
-              </a:rPr>
-              <a:t>Reopen past interviews; replay audio clips</a:t>
-            </a:r>
-          </a:p>
-        </p:txBody>
-      </p:sp>
-      <p:sp>
-        <p:nvSpPr>
-          <p:cNvPr id="15" name="Rounded Rectangle 14"/>
-          <p:cNvSpPr/>
-          <p:nvPr/>
-        </p:nvSpPr>
-        <p:spPr>
-          <a:xfrm>
-            <a:off x="640080" y="4114800"/>
-            <a:ext cx="3566160" cy="1920240"/>
-          </a:xfrm>
-          <a:prstGeom prst="roundRect">
-            <a:avLst>
-              <a:gd name="adj" fmla="val 8000"/>
-            </a:avLst>
-          </a:prstGeom>
-          <a:solidFill>
-            <a:srgbClr val="FFFFFF"/>
-          </a:solidFill>
-          <a:ln w="12700">
-            <a:solidFill>
-              <a:srgbClr val="D9E3DF"/>
-            </a:solidFill>
-          </a:ln>
-        </p:spPr>
-        <p:style>
-          <a:lnRef idx="1">
-            <a:schemeClr val="accent1"/>
-          </a:lnRef>
-          <a:fillRef idx="3">
-            <a:schemeClr val="accent1"/>
-          </a:fillRef>
-          <a:effectRef idx="2">
-            <a:schemeClr val="accent1"/>
-          </a:effectRef>
-          <a:fontRef idx="minor">
-            <a:schemeClr val="lt1"/>
-          </a:fontRef>
-        </p:style>
-        <p:txBody>
-          <a:bodyPr rtlCol="0" anchor="ctr"/>
-          <a:lstStyle/>
-          <a:p>
-            <a:pPr algn="ctr"/>
-          </a:p>
-        </p:txBody>
-      </p:sp>
-      <p:sp>
-        <p:nvSpPr>
-          <p:cNvPr id="16" name="TextBox 15"/>
-          <p:cNvSpPr txBox="1"/>
-          <p:nvPr/>
-        </p:nvSpPr>
-        <p:spPr>
-          <a:xfrm>
-            <a:off x="914400" y="4526280"/>
-            <a:ext cx="3017520" cy="365760"/>
-          </a:xfrm>
-          <a:prstGeom prst="rect">
-            <a:avLst/>
-          </a:prstGeom>
-          <a:noFill/>
-        </p:spPr>
-        <p:txBody>
-          <a:bodyPr wrap="square">
-            <a:spAutoFit/>
-          </a:bodyPr>
-          <a:lstStyle/>
-          <a:p>
-            <a:pPr algn="l"/>
-            <a:r>
-              <a:rPr sz="1800" b="1">
-                <a:solidFill>
-                  <a:srgbClr val="0F6B5C"/>
-                </a:solidFill>
-                <a:latin typeface="Calibri"/>
-              </a:rPr>
-              <a:t>Downloads</a:t>
-            </a:r>
-          </a:p>
-        </p:txBody>
-      </p:sp>
-      <p:sp>
-        <p:nvSpPr>
-          <p:cNvPr id="17" name="TextBox 16"/>
-          <p:cNvSpPr txBox="1"/>
-          <p:nvPr/>
-        </p:nvSpPr>
-        <p:spPr>
-          <a:xfrm>
-            <a:off x="914400" y="5074920"/>
-            <a:ext cx="3017520" cy="731520"/>
-          </a:xfrm>
-          <a:prstGeom prst="rect">
-            <a:avLst/>
-          </a:prstGeom>
-          <a:noFill/>
-        </p:spPr>
-        <p:txBody>
-          <a:bodyPr wrap="square">
-            <a:spAutoFit/>
-          </a:bodyPr>
-          <a:lstStyle/>
-          <a:p>
-            <a:pPr algn="l"/>
-            <a:r>
-              <a:rPr sz="1500" b="0">
-                <a:solidFill>
-                  <a:srgbClr val="1C2B28"/>
-                </a:solidFill>
-                <a:latin typeface="Calibri"/>
-              </a:rPr>
-              <a:t>Feedback report + study pack (PDF / DOCX)</a:t>
-            </a:r>
-          </a:p>
-        </p:txBody>
-      </p:sp>
-      <p:sp>
-        <p:nvSpPr>
-          <p:cNvPr id="18" name="Rounded Rectangle 17"/>
-          <p:cNvSpPr/>
-          <p:nvPr/>
-        </p:nvSpPr>
-        <p:spPr>
-          <a:xfrm>
-            <a:off x="4389120" y="4114800"/>
-            <a:ext cx="3566160" cy="1920240"/>
-          </a:xfrm>
-          <a:prstGeom prst="roundRect">
-            <a:avLst>
-              <a:gd name="adj" fmla="val 8000"/>
-            </a:avLst>
-          </a:prstGeom>
-          <a:solidFill>
-            <a:srgbClr val="FFFFFF"/>
-          </a:solidFill>
-          <a:ln w="12700">
-            <a:solidFill>
-              <a:srgbClr val="D9E3DF"/>
-            </a:solidFill>
-          </a:ln>
-        </p:spPr>
-        <p:style>
-          <a:lnRef idx="1">
-            <a:schemeClr val="accent1"/>
-          </a:lnRef>
-          <a:fillRef idx="3">
-            <a:schemeClr val="accent1"/>
-          </a:fillRef>
-          <a:effectRef idx="2">
-            <a:schemeClr val="accent1"/>
-          </a:effectRef>
-          <a:fontRef idx="minor">
-            <a:schemeClr val="lt1"/>
-          </a:fontRef>
-        </p:style>
-        <p:txBody>
-          <a:bodyPr rtlCol="0" anchor="ctr"/>
-          <a:lstStyle/>
-          <a:p>
-            <a:pPr algn="ctr"/>
-          </a:p>
-        </p:txBody>
-      </p:sp>
-      <p:sp>
-        <p:nvSpPr>
-          <p:cNvPr id="19" name="TextBox 18"/>
-          <p:cNvSpPr txBox="1"/>
-          <p:nvPr/>
-        </p:nvSpPr>
-        <p:spPr>
-          <a:xfrm>
-            <a:off x="4663440" y="4526280"/>
-            <a:ext cx="3017520" cy="365760"/>
-          </a:xfrm>
-          <a:prstGeom prst="rect">
-            <a:avLst/>
-          </a:prstGeom>
-          <a:noFill/>
-        </p:spPr>
-        <p:txBody>
-          <a:bodyPr wrap="square">
-            <a:spAutoFit/>
-          </a:bodyPr>
-          <a:lstStyle/>
-          <a:p>
-            <a:pPr algn="l"/>
-            <a:r>
-              <a:rPr sz="1800" b="1">
-                <a:solidFill>
-                  <a:srgbClr val="0F6B5C"/>
-                </a:solidFill>
-                <a:latin typeface="Calibri"/>
-              </a:rPr>
-              <a:t>Voice loop</a:t>
-            </a:r>
-          </a:p>
-        </p:txBody>
-      </p:sp>
-      <p:sp>
-        <p:nvSpPr>
-          <p:cNvPr id="20" name="TextBox 19"/>
-          <p:cNvSpPr txBox="1"/>
-          <p:nvPr/>
-        </p:nvSpPr>
-        <p:spPr>
-          <a:xfrm>
-            <a:off x="4663440" y="5074920"/>
-            <a:ext cx="3017520" cy="731520"/>
-          </a:xfrm>
-          <a:prstGeom prst="rect">
-            <a:avLst/>
-          </a:prstGeom>
-          <a:noFill/>
-        </p:spPr>
-        <p:txBody>
-          <a:bodyPr wrap="square">
-            <a:spAutoFit/>
-          </a:bodyPr>
-          <a:lstStyle/>
-          <a:p>
-            <a:pPr algn="l"/>
-            <a:r>
-              <a:rPr sz="1500" b="0">
-                <a:solidFill>
-                  <a:srgbClr val="1C2B28"/>
-                </a:solidFill>
-                <a:latin typeface="Calibri"/>
-              </a:rPr>
-              <a:t>Speech-to-text answers and text-to-speech questions</a:t>
-            </a:r>
-          </a:p>
-        </p:txBody>
-      </p:sp>
-      <p:sp>
-        <p:nvSpPr>
-          <p:cNvPr id="21" name="Rounded Rectangle 20"/>
-          <p:cNvSpPr/>
-          <p:nvPr/>
-        </p:nvSpPr>
-        <p:spPr>
-          <a:xfrm>
-            <a:off x="8138159" y="4114800"/>
-            <a:ext cx="3566160" cy="1920240"/>
-          </a:xfrm>
-          <a:prstGeom prst="roundRect">
-            <a:avLst>
-              <a:gd name="adj" fmla="val 8000"/>
-            </a:avLst>
-          </a:prstGeom>
-          <a:solidFill>
-            <a:srgbClr val="FFFFFF"/>
-          </a:solidFill>
-          <a:ln w="12700">
-            <a:solidFill>
-              <a:srgbClr val="D9E3DF"/>
-            </a:solidFill>
-          </a:ln>
-        </p:spPr>
-        <p:style>
-          <a:lnRef idx="1">
-            <a:schemeClr val="accent1"/>
-          </a:lnRef>
-          <a:fillRef idx="3">
-            <a:schemeClr val="accent1"/>
-          </a:fillRef>
-          <a:effectRef idx="2">
-            <a:schemeClr val="accent1"/>
-          </a:effectRef>
-          <a:fontRef idx="minor">
-            <a:schemeClr val="lt1"/>
-          </a:fontRef>
-        </p:style>
-        <p:txBody>
-          <a:bodyPr rtlCol="0" anchor="ctr"/>
-          <a:lstStyle/>
-          <a:p>
-            <a:pPr algn="ctr"/>
-          </a:p>
-        </p:txBody>
-      </p:sp>
-      <p:sp>
-        <p:nvSpPr>
-          <p:cNvPr id="22" name="TextBox 21"/>
-          <p:cNvSpPr txBox="1"/>
-          <p:nvPr/>
-        </p:nvSpPr>
-        <p:spPr>
-          <a:xfrm>
-            <a:off x="8412479" y="4526280"/>
-            <a:ext cx="3017520" cy="365760"/>
-          </a:xfrm>
-          <a:prstGeom prst="rect">
-            <a:avLst/>
-          </a:prstGeom>
-          <a:noFill/>
-        </p:spPr>
-        <p:txBody>
-          <a:bodyPr wrap="square">
-            <a:spAutoFit/>
-          </a:bodyPr>
-          <a:lstStyle/>
-          <a:p>
-            <a:pPr algn="l"/>
-            <a:r>
-              <a:rPr sz="1800" b="1">
-                <a:solidFill>
-                  <a:srgbClr val="0F6B5C"/>
-                </a:solidFill>
-                <a:latin typeface="Calibri"/>
-              </a:rPr>
-              <a:t>Modular codebase</a:t>
-            </a:r>
-          </a:p>
-        </p:txBody>
-      </p:sp>
-      <p:sp>
-        <p:nvSpPr>
-          <p:cNvPr id="23" name="TextBox 22"/>
-          <p:cNvSpPr txBox="1"/>
-          <p:nvPr/>
-        </p:nvSpPr>
-        <p:spPr>
-          <a:xfrm>
-            <a:off x="8412479" y="5074920"/>
-            <a:ext cx="3017520" cy="731520"/>
-          </a:xfrm>
-          <a:prstGeom prst="rect">
-            <a:avLst/>
-          </a:prstGeom>
-          <a:noFill/>
-        </p:spPr>
-        <p:txBody>
-          <a:bodyPr wrap="square">
-            <a:spAutoFit/>
-          </a:bodyPr>
-          <a:lstStyle/>
-          <a:p>
-            <a:pPr algn="l"/>
-            <a:r>
-              <a:rPr sz="1500" b="0">
-                <a:solidFill>
-                  <a:srgbClr val="1C2B28"/>
-                </a:solidFill>
-                <a:latin typeface="Calibri"/>
-              </a:rPr>
-              <a:t>agents / auth / library / reports / ui</a:t>
             </a:r>
           </a:p>
         </p:txBody>
@@ -6754,7 +6673,7 @@
 </file>
 
 <file path=ppt/slides/slide6.xml><?xml version="1.0" encoding="utf-8"?>
-<p:sld xmlns:a="http://schemas.openxmlformats.org/drawingml/2006/main" xmlns:p="http://schemas.openxmlformats.org/presentationml/2006/main" xmlns:r="http://schemas.openxmlformats.org/officeDocument/2006/relationships">
+<p:sld xmlns:a="http://schemas.openxmlformats.org/drawingml/2006/main" xmlns:r="http://schemas.openxmlformats.org/officeDocument/2006/relationships" xmlns:p="http://schemas.openxmlformats.org/presentationml/2006/main">
   <p:cSld>
     <p:spTree>
       <p:nvGrpSpPr>
@@ -6762,7 +6681,14 @@
         <p:cNvGrpSpPr/>
         <p:nvPr/>
       </p:nvGrpSpPr>
-      <p:grpSpPr/>
+      <p:grpSpPr>
+        <a:xfrm>
+          <a:off x="0" y="0"/>
+          <a:ext cx="0" cy="0"/>
+          <a:chOff x="0" y="0"/>
+          <a:chExt cx="0" cy="0"/>
+        </a:xfrm>
+      </p:grpSpPr>
       <p:sp>
         <p:nvSpPr>
           <p:cNvPr id="2" name="Rectangle 1"/>
@@ -6803,6 +6729,7 @@
           <a:lstStyle/>
           <a:p>
             <a:pPr algn="ctr"/>
+            <a:endParaRPr/>
           </a:p>
         </p:txBody>
       </p:sp>
@@ -6871,7 +6798,7 @@
                 </a:solidFill>
                 <a:latin typeface="Calibri"/>
               </a:rPr>
-              <a:t>Live Demo Flow</a:t>
+              <a:t>Product Layer Around the Agents</a:t>
             </a:r>
           </a:p>
         </p:txBody>
@@ -6906,30 +6833,34 @@
                 </a:solidFill>
                 <a:latin typeface="Calibri"/>
               </a:rPr>
-              <a:t>What you will see next</a:t>
-            </a:r>
-          </a:p>
-        </p:txBody>
-      </p:sp>
-      <p:sp>
-        <p:nvSpPr>
-          <p:cNvPr id="6" name="Oval 5"/>
+              <a:t>From model calls to a usable practice product</a:t>
+            </a:r>
+          </a:p>
+        </p:txBody>
+      </p:sp>
+      <p:sp>
+        <p:nvSpPr>
+          <p:cNvPr id="6" name="Rounded Rectangle 5"/>
           <p:cNvSpPr/>
           <p:nvPr/>
         </p:nvSpPr>
         <p:spPr>
           <a:xfrm>
-            <a:off x="777240" y="1874519"/>
-            <a:ext cx="411480" cy="411480"/>
-          </a:xfrm>
-          <a:prstGeom prst="ellipse">
-            <a:avLst/>
+            <a:off x="640080" y="1965960"/>
+            <a:ext cx="3566160" cy="1920240"/>
+          </a:xfrm>
+          <a:prstGeom prst="roundRect">
+            <a:avLst>
+              <a:gd name="adj" fmla="val 8000"/>
+            </a:avLst>
           </a:prstGeom>
           <a:solidFill>
-            <a:srgbClr val="0F6B5C"/>
+            <a:srgbClr val="FFFFFF"/>
           </a:solidFill>
-          <a:ln>
-            <a:noFill/>
+          <a:ln w="12700">
+            <a:solidFill>
+              <a:srgbClr val="D9E3DF"/>
+            </a:solidFill>
           </a:ln>
         </p:spPr>
         <p:style>
@@ -6951,15 +6882,7 @@
           <a:lstStyle/>
           <a:p>
             <a:pPr algn="ctr"/>
-            <a:r>
-              <a:rPr sz="1400" b="1">
-                <a:solidFill>
-                  <a:srgbClr val="FFFFFF"/>
-                </a:solidFill>
-                <a:latin typeface="Calibri"/>
-              </a:rPr>
-              <a:t>1</a:t>
-            </a:r>
+            <a:endParaRPr/>
           </a:p>
         </p:txBody>
       </p:sp>
@@ -6971,8 +6894,8 @@
         </p:nvSpPr>
         <p:spPr>
           <a:xfrm>
-            <a:off x="1417320" y="1920239"/>
-            <a:ext cx="9601200" cy="365760"/>
+            <a:off x="914400" y="2377440"/>
+            <a:ext cx="3017520" cy="365760"/>
           </a:xfrm>
           <a:prstGeom prst="rect">
             <a:avLst/>
@@ -6987,36 +6910,75 @@
           <a:p>
             <a:pPr algn="l"/>
             <a:r>
-              <a:rPr sz="1800" b="0">
+              <a:rPr sz="1800" b="1">
+                <a:solidFill>
+                  <a:srgbClr val="0F6B5C"/>
+                </a:solidFill>
+                <a:latin typeface="Calibri"/>
+              </a:rPr>
+              <a:t>Auth</a:t>
+            </a:r>
+          </a:p>
+        </p:txBody>
+      </p:sp>
+      <p:sp>
+        <p:nvSpPr>
+          <p:cNvPr id="8" name="TextBox 7"/>
+          <p:cNvSpPr txBox="1"/>
+          <p:nvPr/>
+        </p:nvSpPr>
+        <p:spPr>
+          <a:xfrm>
+            <a:off x="914400" y="2926080"/>
+            <a:ext cx="3017520" cy="731520"/>
+          </a:xfrm>
+          <a:prstGeom prst="rect">
+            <a:avLst/>
+          </a:prstGeom>
+          <a:noFill/>
+        </p:spPr>
+        <p:txBody>
+          <a:bodyPr wrap="square">
+            <a:spAutoFit/>
+          </a:bodyPr>
+          <a:lstStyle/>
+          <a:p>
+            <a:pPr algn="l"/>
+            <a:r>
+              <a:rPr sz="1500" b="0">
                 <a:solidFill>
                   <a:srgbClr val="1C2B28"/>
                 </a:solidFill>
                 <a:latin typeface="Calibri"/>
               </a:rPr>
-              <a:t>Login or register</a:t>
-            </a:r>
-          </a:p>
-        </p:txBody>
-      </p:sp>
-      <p:sp>
-        <p:nvSpPr>
-          <p:cNvPr id="8" name="Oval 7"/>
+              <a:t>Email/password accounts with hashed credentials</a:t>
+            </a:r>
+          </a:p>
+        </p:txBody>
+      </p:sp>
+      <p:sp>
+        <p:nvSpPr>
+          <p:cNvPr id="9" name="Rounded Rectangle 8"/>
           <p:cNvSpPr/>
           <p:nvPr/>
         </p:nvSpPr>
         <p:spPr>
           <a:xfrm>
-            <a:off x="777240" y="2514600"/>
-            <a:ext cx="411480" cy="411480"/>
-          </a:xfrm>
-          <a:prstGeom prst="ellipse">
-            <a:avLst/>
+            <a:off x="4389120" y="1965960"/>
+            <a:ext cx="3566160" cy="1920240"/>
+          </a:xfrm>
+          <a:prstGeom prst="roundRect">
+            <a:avLst>
+              <a:gd name="adj" fmla="val 8000"/>
+            </a:avLst>
           </a:prstGeom>
           <a:solidFill>
-            <a:srgbClr val="0F6B5C"/>
+            <a:srgbClr val="FFFFFF"/>
           </a:solidFill>
-          <a:ln>
-            <a:noFill/>
+          <a:ln w="12700">
+            <a:solidFill>
+              <a:srgbClr val="D9E3DF"/>
+            </a:solidFill>
           </a:ln>
         </p:spPr>
         <p:style>
@@ -7038,28 +7000,20 @@
           <a:lstStyle/>
           <a:p>
             <a:pPr algn="ctr"/>
-            <a:r>
-              <a:rPr sz="1400" b="1">
-                <a:solidFill>
-                  <a:srgbClr val="FFFFFF"/>
-                </a:solidFill>
-                <a:latin typeface="Calibri"/>
-              </a:rPr>
-              <a:t>2</a:t>
-            </a:r>
-          </a:p>
-        </p:txBody>
-      </p:sp>
-      <p:sp>
-        <p:nvSpPr>
-          <p:cNvPr id="9" name="TextBox 8"/>
+            <a:endParaRPr/>
+          </a:p>
+        </p:txBody>
+      </p:sp>
+      <p:sp>
+        <p:nvSpPr>
+          <p:cNvPr id="10" name="TextBox 9"/>
           <p:cNvSpPr txBox="1"/>
           <p:nvPr/>
         </p:nvSpPr>
         <p:spPr>
           <a:xfrm>
-            <a:off x="1417320" y="2560320"/>
-            <a:ext cx="9601200" cy="365760"/>
+            <a:off x="4663440" y="2377440"/>
+            <a:ext cx="3017520" cy="365760"/>
           </a:xfrm>
           <a:prstGeom prst="rect">
             <a:avLst/>
@@ -7074,36 +7028,75 @@
           <a:p>
             <a:pPr algn="l"/>
             <a:r>
-              <a:rPr sz="1800" b="0">
+              <a:rPr sz="1800" b="1">
+                <a:solidFill>
+                  <a:srgbClr val="0F6B5C"/>
+                </a:solidFill>
+                <a:latin typeface="Calibri"/>
+              </a:rPr>
+              <a:t>Document library</a:t>
+            </a:r>
+          </a:p>
+        </p:txBody>
+      </p:sp>
+      <p:sp>
+        <p:nvSpPr>
+          <p:cNvPr id="11" name="TextBox 10"/>
+          <p:cNvSpPr txBox="1"/>
+          <p:nvPr/>
+        </p:nvSpPr>
+        <p:spPr>
+          <a:xfrm>
+            <a:off x="4663440" y="2926080"/>
+            <a:ext cx="3017520" cy="731520"/>
+          </a:xfrm>
+          <a:prstGeom prst="rect">
+            <a:avLst/>
+          </a:prstGeom>
+          <a:noFill/>
+        </p:spPr>
+        <p:txBody>
+          <a:bodyPr wrap="square">
+            <a:spAutoFit/>
+          </a:bodyPr>
+          <a:lstStyle/>
+          <a:p>
+            <a:pPr algn="l"/>
+            <a:r>
+              <a:rPr sz="1500" b="0">
                 <a:solidFill>
                   <a:srgbClr val="1C2B28"/>
                 </a:solidFill>
                 <a:latin typeface="Calibri"/>
               </a:rPr>
-              <a:t>Upload / select resume + JD from library</a:t>
-            </a:r>
-          </a:p>
-        </p:txBody>
-      </p:sp>
-      <p:sp>
-        <p:nvSpPr>
-          <p:cNvPr id="10" name="Oval 9"/>
+              <a:t>Save and reuse resumes &amp; job descriptions</a:t>
+            </a:r>
+          </a:p>
+        </p:txBody>
+      </p:sp>
+      <p:sp>
+        <p:nvSpPr>
+          <p:cNvPr id="12" name="Rounded Rectangle 11"/>
           <p:cNvSpPr/>
           <p:nvPr/>
         </p:nvSpPr>
         <p:spPr>
           <a:xfrm>
-            <a:off x="777240" y="3154679"/>
-            <a:ext cx="411480" cy="411480"/>
-          </a:xfrm>
-          <a:prstGeom prst="ellipse">
-            <a:avLst/>
+            <a:off x="8138159" y="1965960"/>
+            <a:ext cx="3566160" cy="1920240"/>
+          </a:xfrm>
+          <a:prstGeom prst="roundRect">
+            <a:avLst>
+              <a:gd name="adj" fmla="val 8000"/>
+            </a:avLst>
           </a:prstGeom>
           <a:solidFill>
-            <a:srgbClr val="0F6B5C"/>
+            <a:srgbClr val="FFFFFF"/>
           </a:solidFill>
-          <a:ln>
-            <a:noFill/>
+          <a:ln w="12700">
+            <a:solidFill>
+              <a:srgbClr val="D9E3DF"/>
+            </a:solidFill>
           </a:ln>
         </p:spPr>
         <p:style>
@@ -7125,28 +7118,20 @@
           <a:lstStyle/>
           <a:p>
             <a:pPr algn="ctr"/>
-            <a:r>
-              <a:rPr sz="1400" b="1">
-                <a:solidFill>
-                  <a:srgbClr val="FFFFFF"/>
-                </a:solidFill>
-                <a:latin typeface="Calibri"/>
-              </a:rPr>
-              <a:t>3</a:t>
-            </a:r>
-          </a:p>
-        </p:txBody>
-      </p:sp>
-      <p:sp>
-        <p:nvSpPr>
-          <p:cNvPr id="11" name="TextBox 10"/>
+            <a:endParaRPr/>
+          </a:p>
+        </p:txBody>
+      </p:sp>
+      <p:sp>
+        <p:nvSpPr>
+          <p:cNvPr id="13" name="TextBox 12"/>
           <p:cNvSpPr txBox="1"/>
           <p:nvPr/>
         </p:nvSpPr>
         <p:spPr>
           <a:xfrm>
-            <a:off x="1417320" y="3200399"/>
-            <a:ext cx="9601200" cy="365760"/>
+            <a:off x="8412479" y="2377440"/>
+            <a:ext cx="3017520" cy="365760"/>
           </a:xfrm>
           <a:prstGeom prst="rect">
             <a:avLst/>
@@ -7161,36 +7146,75 @@
           <a:p>
             <a:pPr algn="l"/>
             <a:r>
-              <a:rPr sz="1800" b="0">
+              <a:rPr sz="1800" b="1">
+                <a:solidFill>
+                  <a:srgbClr val="0F6B5C"/>
+                </a:solidFill>
+                <a:latin typeface="Calibri"/>
+              </a:rPr>
+              <a:t>Conversation history</a:t>
+            </a:r>
+          </a:p>
+        </p:txBody>
+      </p:sp>
+      <p:sp>
+        <p:nvSpPr>
+          <p:cNvPr id="14" name="TextBox 13"/>
+          <p:cNvSpPr txBox="1"/>
+          <p:nvPr/>
+        </p:nvSpPr>
+        <p:spPr>
+          <a:xfrm>
+            <a:off x="8412479" y="2926080"/>
+            <a:ext cx="3017520" cy="731520"/>
+          </a:xfrm>
+          <a:prstGeom prst="rect">
+            <a:avLst/>
+          </a:prstGeom>
+          <a:noFill/>
+        </p:spPr>
+        <p:txBody>
+          <a:bodyPr wrap="square">
+            <a:spAutoFit/>
+          </a:bodyPr>
+          <a:lstStyle/>
+          <a:p>
+            <a:pPr algn="l"/>
+            <a:r>
+              <a:rPr sz="1500" b="0">
                 <a:solidFill>
                   <a:srgbClr val="1C2B28"/>
                 </a:solidFill>
                 <a:latin typeface="Calibri"/>
               </a:rPr>
-              <a:t>Start interview — hear question audio</a:t>
-            </a:r>
-          </a:p>
-        </p:txBody>
-      </p:sp>
-      <p:sp>
-        <p:nvSpPr>
-          <p:cNvPr id="12" name="Oval 11"/>
+              <a:t>Reopen past interviews; replay audio clips</a:t>
+            </a:r>
+          </a:p>
+        </p:txBody>
+      </p:sp>
+      <p:sp>
+        <p:nvSpPr>
+          <p:cNvPr id="15" name="Rounded Rectangle 14"/>
           <p:cNvSpPr/>
           <p:nvPr/>
         </p:nvSpPr>
         <p:spPr>
           <a:xfrm>
-            <a:off x="777240" y="3794759"/>
-            <a:ext cx="411480" cy="411480"/>
-          </a:xfrm>
-          <a:prstGeom prst="ellipse">
-            <a:avLst/>
+            <a:off x="640080" y="4114800"/>
+            <a:ext cx="3566160" cy="1920240"/>
+          </a:xfrm>
+          <a:prstGeom prst="roundRect">
+            <a:avLst>
+              <a:gd name="adj" fmla="val 8000"/>
+            </a:avLst>
           </a:prstGeom>
           <a:solidFill>
-            <a:srgbClr val="0F6B5C"/>
+            <a:srgbClr val="FFFFFF"/>
           </a:solidFill>
-          <a:ln>
-            <a:noFill/>
+          <a:ln w="12700">
+            <a:solidFill>
+              <a:srgbClr val="D9E3DF"/>
+            </a:solidFill>
           </a:ln>
         </p:spPr>
         <p:style>
@@ -7212,28 +7236,20 @@
           <a:lstStyle/>
           <a:p>
             <a:pPr algn="ctr"/>
-            <a:r>
-              <a:rPr sz="1400" b="1">
-                <a:solidFill>
-                  <a:srgbClr val="FFFFFF"/>
-                </a:solidFill>
-                <a:latin typeface="Calibri"/>
-              </a:rPr>
-              <a:t>4</a:t>
-            </a:r>
-          </a:p>
-        </p:txBody>
-      </p:sp>
-      <p:sp>
-        <p:nvSpPr>
-          <p:cNvPr id="13" name="TextBox 12"/>
+            <a:endParaRPr/>
+          </a:p>
+        </p:txBody>
+      </p:sp>
+      <p:sp>
+        <p:nvSpPr>
+          <p:cNvPr id="16" name="TextBox 15"/>
           <p:cNvSpPr txBox="1"/>
           <p:nvPr/>
         </p:nvSpPr>
         <p:spPr>
           <a:xfrm>
-            <a:off x="1417320" y="3840479"/>
-            <a:ext cx="9601200" cy="365760"/>
+            <a:off x="914400" y="4526280"/>
+            <a:ext cx="3017520" cy="365760"/>
           </a:xfrm>
           <a:prstGeom prst="rect">
             <a:avLst/>
@@ -7248,36 +7264,75 @@
           <a:p>
             <a:pPr algn="l"/>
             <a:r>
-              <a:rPr sz="1800" b="0">
+              <a:rPr sz="1800" b="1">
+                <a:solidFill>
+                  <a:srgbClr val="0F6B5C"/>
+                </a:solidFill>
+                <a:latin typeface="Calibri"/>
+              </a:rPr>
+              <a:t>Downloads</a:t>
+            </a:r>
+          </a:p>
+        </p:txBody>
+      </p:sp>
+      <p:sp>
+        <p:nvSpPr>
+          <p:cNvPr id="17" name="TextBox 16"/>
+          <p:cNvSpPr txBox="1"/>
+          <p:nvPr/>
+        </p:nvSpPr>
+        <p:spPr>
+          <a:xfrm>
+            <a:off x="914400" y="5074920"/>
+            <a:ext cx="3017520" cy="731520"/>
+          </a:xfrm>
+          <a:prstGeom prst="rect">
+            <a:avLst/>
+          </a:prstGeom>
+          <a:noFill/>
+        </p:spPr>
+        <p:txBody>
+          <a:bodyPr wrap="square">
+            <a:spAutoFit/>
+          </a:bodyPr>
+          <a:lstStyle/>
+          <a:p>
+            <a:pPr algn="l"/>
+            <a:r>
+              <a:rPr sz="1500" b="0">
                 <a:solidFill>
                   <a:srgbClr val="1C2B28"/>
                 </a:solidFill>
                 <a:latin typeface="Calibri"/>
               </a:rPr>
-              <a:t>Record → Transcribe → Save &amp; continue</a:t>
-            </a:r>
-          </a:p>
-        </p:txBody>
-      </p:sp>
-      <p:sp>
-        <p:nvSpPr>
-          <p:cNvPr id="14" name="Oval 13"/>
+              <a:t>Feedback report + study pack (PDF / DOCX)</a:t>
+            </a:r>
+          </a:p>
+        </p:txBody>
+      </p:sp>
+      <p:sp>
+        <p:nvSpPr>
+          <p:cNvPr id="18" name="Rounded Rectangle 17"/>
           <p:cNvSpPr/>
           <p:nvPr/>
         </p:nvSpPr>
         <p:spPr>
           <a:xfrm>
-            <a:off x="777240" y="4434840"/>
-            <a:ext cx="411480" cy="411480"/>
-          </a:xfrm>
-          <a:prstGeom prst="ellipse">
-            <a:avLst/>
+            <a:off x="4389120" y="4114800"/>
+            <a:ext cx="3566160" cy="1920240"/>
+          </a:xfrm>
+          <a:prstGeom prst="roundRect">
+            <a:avLst>
+              <a:gd name="adj" fmla="val 8000"/>
+            </a:avLst>
           </a:prstGeom>
           <a:solidFill>
-            <a:srgbClr val="523873"/>
+            <a:srgbClr val="FFFFFF"/>
           </a:solidFill>
-          <a:ln>
-            <a:noFill/>
+          <a:ln w="12700">
+            <a:solidFill>
+              <a:srgbClr val="D9E3DF"/>
+            </a:solidFill>
           </a:ln>
         </p:spPr>
         <p:style>
@@ -7299,28 +7354,20 @@
           <a:lstStyle/>
           <a:p>
             <a:pPr algn="ctr"/>
-            <a:r>
-              <a:rPr sz="1400" b="1">
-                <a:solidFill>
-                  <a:srgbClr val="FFFFFF"/>
-                </a:solidFill>
-                <a:latin typeface="Calibri"/>
-              </a:rPr>
-              <a:t>5</a:t>
-            </a:r>
-          </a:p>
-        </p:txBody>
-      </p:sp>
-      <p:sp>
-        <p:nvSpPr>
-          <p:cNvPr id="15" name="TextBox 14"/>
+            <a:endParaRPr/>
+          </a:p>
+        </p:txBody>
+      </p:sp>
+      <p:sp>
+        <p:nvSpPr>
+          <p:cNvPr id="19" name="TextBox 18"/>
           <p:cNvSpPr txBox="1"/>
           <p:nvPr/>
         </p:nvSpPr>
         <p:spPr>
           <a:xfrm>
-            <a:off x="1417320" y="4480560"/>
-            <a:ext cx="9601200" cy="365760"/>
+            <a:off x="4663440" y="4526280"/>
+            <a:ext cx="3017520" cy="365760"/>
           </a:xfrm>
           <a:prstGeom prst="rect">
             <a:avLst/>
@@ -7335,36 +7382,75 @@
           <a:p>
             <a:pPr algn="l"/>
             <a:r>
-              <a:rPr sz="1800" b="0">
+              <a:rPr sz="1800" b="1">
+                <a:solidFill>
+                  <a:srgbClr val="0F6B5C"/>
+                </a:solidFill>
+                <a:latin typeface="Calibri"/>
+              </a:rPr>
+              <a:t>Voice loop</a:t>
+            </a:r>
+          </a:p>
+        </p:txBody>
+      </p:sp>
+      <p:sp>
+        <p:nvSpPr>
+          <p:cNvPr id="20" name="TextBox 19"/>
+          <p:cNvSpPr txBox="1"/>
+          <p:nvPr/>
+        </p:nvSpPr>
+        <p:spPr>
+          <a:xfrm>
+            <a:off x="4663440" y="5074920"/>
+            <a:ext cx="3017520" cy="731520"/>
+          </a:xfrm>
+          <a:prstGeom prst="rect">
+            <a:avLst/>
+          </a:prstGeom>
+          <a:noFill/>
+        </p:spPr>
+        <p:txBody>
+          <a:bodyPr wrap="square">
+            <a:spAutoFit/>
+          </a:bodyPr>
+          <a:lstStyle/>
+          <a:p>
+            <a:pPr algn="l"/>
+            <a:r>
+              <a:rPr sz="1500" b="0">
                 <a:solidFill>
                   <a:srgbClr val="1C2B28"/>
                 </a:solidFill>
                 <a:latin typeface="Calibri"/>
               </a:rPr>
-              <a:t>Review final feedback</a:t>
-            </a:r>
-          </a:p>
-        </p:txBody>
-      </p:sp>
-      <p:sp>
-        <p:nvSpPr>
-          <p:cNvPr id="16" name="Oval 15"/>
+              <a:t>Speech-to-text answers and text-to-speech questions</a:t>
+            </a:r>
+          </a:p>
+        </p:txBody>
+      </p:sp>
+      <p:sp>
+        <p:nvSpPr>
+          <p:cNvPr id="21" name="Rounded Rectangle 20"/>
           <p:cNvSpPr/>
           <p:nvPr/>
         </p:nvSpPr>
         <p:spPr>
           <a:xfrm>
-            <a:off x="777240" y="5074920"/>
-            <a:ext cx="411480" cy="411480"/>
-          </a:xfrm>
-          <a:prstGeom prst="ellipse">
-            <a:avLst/>
+            <a:off x="8138159" y="4114800"/>
+            <a:ext cx="3566160" cy="1920240"/>
+          </a:xfrm>
+          <a:prstGeom prst="roundRect">
+            <a:avLst>
+              <a:gd name="adj" fmla="val 8000"/>
+            </a:avLst>
           </a:prstGeom>
           <a:solidFill>
-            <a:srgbClr val="523873"/>
+            <a:srgbClr val="FFFFFF"/>
           </a:solidFill>
-          <a:ln>
-            <a:noFill/>
+          <a:ln w="12700">
+            <a:solidFill>
+              <a:srgbClr val="D9E3DF"/>
+            </a:solidFill>
           </a:ln>
         </p:spPr>
         <p:style>
@@ -7386,28 +7472,20 @@
           <a:lstStyle/>
           <a:p>
             <a:pPr algn="ctr"/>
-            <a:r>
-              <a:rPr sz="1400" b="1">
-                <a:solidFill>
-                  <a:srgbClr val="FFFFFF"/>
-                </a:solidFill>
-                <a:latin typeface="Calibri"/>
-              </a:rPr>
-              <a:t>6</a:t>
-            </a:r>
-          </a:p>
-        </p:txBody>
-      </p:sp>
-      <p:sp>
-        <p:nvSpPr>
-          <p:cNvPr id="17" name="TextBox 16"/>
+            <a:endParaRPr/>
+          </a:p>
+        </p:txBody>
+      </p:sp>
+      <p:sp>
+        <p:nvSpPr>
+          <p:cNvPr id="22" name="TextBox 21"/>
           <p:cNvSpPr txBox="1"/>
           <p:nvPr/>
         </p:nvSpPr>
         <p:spPr>
           <a:xfrm>
-            <a:off x="1417320" y="5120640"/>
-            <a:ext cx="9601200" cy="365760"/>
+            <a:off x="8412479" y="4526280"/>
+            <a:ext cx="3017520" cy="365760"/>
           </a:xfrm>
           <a:prstGeom prst="rect">
             <a:avLst/>
@@ -7422,79 +7500,27 @@
           <a:p>
             <a:pPr algn="l"/>
             <a:r>
-              <a:rPr sz="1800" b="0">
-                <a:solidFill>
-                  <a:srgbClr val="1C2B28"/>
-                </a:solidFill>
-                <a:latin typeface="Calibri"/>
-              </a:rPr>
-              <a:t>Download feedback + study pack</a:t>
-            </a:r>
-          </a:p>
-        </p:txBody>
-      </p:sp>
-      <p:sp>
-        <p:nvSpPr>
-          <p:cNvPr id="18" name="Oval 17"/>
-          <p:cNvSpPr/>
-          <p:nvPr/>
-        </p:nvSpPr>
-        <p:spPr>
-          <a:xfrm>
-            <a:off x="777240" y="5714999"/>
-            <a:ext cx="411480" cy="411480"/>
-          </a:xfrm>
-          <a:prstGeom prst="ellipse">
-            <a:avLst/>
-          </a:prstGeom>
-          <a:solidFill>
-            <a:srgbClr val="523873"/>
-          </a:solidFill>
-          <a:ln>
-            <a:noFill/>
-          </a:ln>
-        </p:spPr>
-        <p:style>
-          <a:lnRef idx="1">
-            <a:schemeClr val="accent1"/>
-          </a:lnRef>
-          <a:fillRef idx="3">
-            <a:schemeClr val="accent1"/>
-          </a:fillRef>
-          <a:effectRef idx="2">
-            <a:schemeClr val="accent1"/>
-          </a:effectRef>
-          <a:fontRef idx="minor">
-            <a:schemeClr val="lt1"/>
-          </a:fontRef>
-        </p:style>
-        <p:txBody>
-          <a:bodyPr rtlCol="0" anchor="ctr"/>
-          <a:lstStyle/>
-          <a:p>
-            <a:pPr algn="ctr"/>
-            <a:r>
-              <a:rPr sz="1400" b="1">
-                <a:solidFill>
-                  <a:srgbClr val="FFFFFF"/>
-                </a:solidFill>
-                <a:latin typeface="Calibri"/>
-              </a:rPr>
-              <a:t>7</a:t>
-            </a:r>
-          </a:p>
-        </p:txBody>
-      </p:sp>
-      <p:sp>
-        <p:nvSpPr>
-          <p:cNvPr id="19" name="TextBox 18"/>
+              <a:rPr sz="1800" b="1">
+                <a:solidFill>
+                  <a:srgbClr val="0F6B5C"/>
+                </a:solidFill>
+                <a:latin typeface="Calibri"/>
+              </a:rPr>
+              <a:t>Modular codebase</a:t>
+            </a:r>
+          </a:p>
+        </p:txBody>
+      </p:sp>
+      <p:sp>
+        <p:nvSpPr>
+          <p:cNvPr id="23" name="TextBox 22"/>
           <p:cNvSpPr txBox="1"/>
           <p:nvPr/>
         </p:nvSpPr>
         <p:spPr>
           <a:xfrm>
-            <a:off x="1417320" y="5760719"/>
-            <a:ext cx="9601200" cy="365760"/>
+            <a:off x="8412479" y="5074920"/>
+            <a:ext cx="3017520" cy="731520"/>
           </a:xfrm>
           <a:prstGeom prst="rect">
             <a:avLst/>
@@ -7509,13 +7535,13 @@
           <a:p>
             <a:pPr algn="l"/>
             <a:r>
-              <a:rPr sz="1800" b="0">
+              <a:rPr sz="1500" b="0">
                 <a:solidFill>
                   <a:srgbClr val="1C2B28"/>
                 </a:solidFill>
                 <a:latin typeface="Calibri"/>
               </a:rPr>
-              <a:t>Open a past interview and replay audio</a:t>
+              <a:t>agents / auth / library / reports / ui</a:t>
             </a:r>
           </a:p>
         </p:txBody>
@@ -7529,7 +7555,7 @@
 </file>
 
 <file path=ppt/slides/slide7.xml><?xml version="1.0" encoding="utf-8"?>
-<p:sld xmlns:a="http://schemas.openxmlformats.org/drawingml/2006/main" xmlns:p="http://schemas.openxmlformats.org/presentationml/2006/main" xmlns:r="http://schemas.openxmlformats.org/officeDocument/2006/relationships">
+<p:sld xmlns:a="http://schemas.openxmlformats.org/drawingml/2006/main" xmlns:r="http://schemas.openxmlformats.org/officeDocument/2006/relationships" xmlns:p="http://schemas.openxmlformats.org/presentationml/2006/main">
   <p:cSld>
     <p:spTree>
       <p:nvGrpSpPr>
@@ -7537,7 +7563,14 @@
         <p:cNvGrpSpPr/>
         <p:nvPr/>
       </p:nvGrpSpPr>
-      <p:grpSpPr/>
+      <p:grpSpPr>
+        <a:xfrm>
+          <a:off x="0" y="0"/>
+          <a:ext cx="0" cy="0"/>
+          <a:chOff x="0" y="0"/>
+          <a:chExt cx="0" cy="0"/>
+        </a:xfrm>
+      </p:grpSpPr>
       <p:sp>
         <p:nvSpPr>
           <p:cNvPr id="2" name="Rectangle 1"/>
@@ -7578,6 +7611,7 @@
           <a:lstStyle/>
           <a:p>
             <a:pPr algn="ctr"/>
+            <a:endParaRPr/>
           </a:p>
         </p:txBody>
       </p:sp>
@@ -7646,7 +7680,7 @@
                 </a:solidFill>
                 <a:latin typeface="Calibri"/>
               </a:rPr>
-              <a:t>Tech Stack</a:t>
+              <a:t>Live Demo Flow</a:t>
             </a:r>
           </a:p>
         </p:txBody>
@@ -7681,34 +7715,30 @@
                 </a:solidFill>
                 <a:latin typeface="Calibri"/>
               </a:rPr>
-              <a:t>Practical tools for an agentic product demo</a:t>
-            </a:r>
-          </a:p>
-        </p:txBody>
-      </p:sp>
-      <p:sp>
-        <p:nvSpPr>
-          <p:cNvPr id="6" name="Rounded Rectangle 5"/>
+              <a:t>What you will see next</a:t>
+            </a:r>
+          </a:p>
+        </p:txBody>
+      </p:sp>
+      <p:sp>
+        <p:nvSpPr>
+          <p:cNvPr id="6" name="Oval 5"/>
           <p:cNvSpPr/>
           <p:nvPr/>
         </p:nvSpPr>
         <p:spPr>
           <a:xfrm>
-            <a:off x="640080" y="2011680"/>
-            <a:ext cx="3566160" cy="1874519"/>
-          </a:xfrm>
-          <a:prstGeom prst="roundRect">
-            <a:avLst>
-              <a:gd name="adj" fmla="val 8000"/>
-            </a:avLst>
+            <a:off x="777240" y="1874519"/>
+            <a:ext cx="411480" cy="411480"/>
+          </a:xfrm>
+          <a:prstGeom prst="ellipse">
+            <a:avLst/>
           </a:prstGeom>
           <a:solidFill>
-            <a:srgbClr val="FFFFFF"/>
+            <a:srgbClr val="0F6B5C"/>
           </a:solidFill>
-          <a:ln w="12700">
-            <a:solidFill>
-              <a:srgbClr val="D9E3DF"/>
-            </a:solidFill>
+          <a:ln>
+            <a:noFill/>
           </a:ln>
         </p:spPr>
         <p:style>
@@ -7730,6 +7760,15 @@
           <a:lstStyle/>
           <a:p>
             <a:pPr algn="ctr"/>
+            <a:r>
+              <a:rPr sz="1400" b="1">
+                <a:solidFill>
+                  <a:srgbClr val="FFFFFF"/>
+                </a:solidFill>
+                <a:latin typeface="Calibri"/>
+              </a:rPr>
+              <a:t>1</a:t>
+            </a:r>
           </a:p>
         </p:txBody>
       </p:sp>
@@ -7741,8 +7780,8 @@
         </p:nvSpPr>
         <p:spPr>
           <a:xfrm>
-            <a:off x="914400" y="2468880"/>
-            <a:ext cx="3017520" cy="411480"/>
+            <a:off x="1417320" y="1920239"/>
+            <a:ext cx="9601200" cy="365760"/>
           </a:xfrm>
           <a:prstGeom prst="rect">
             <a:avLst/>
@@ -7757,75 +7796,36 @@
           <a:p>
             <a:pPr algn="l"/>
             <a:r>
-              <a:rPr sz="1700" b="1">
-                <a:solidFill>
-                  <a:srgbClr val="523873"/>
-                </a:solidFill>
-                <a:latin typeface="Calibri"/>
-              </a:rPr>
-              <a:t>Python</a:t>
-            </a:r>
-          </a:p>
-        </p:txBody>
-      </p:sp>
-      <p:sp>
-        <p:nvSpPr>
-          <p:cNvPr id="8" name="TextBox 7"/>
-          <p:cNvSpPr txBox="1"/>
-          <p:nvPr/>
-        </p:nvSpPr>
-        <p:spPr>
-          <a:xfrm>
-            <a:off x="914400" y="3017520"/>
-            <a:ext cx="3017520" cy="640080"/>
-          </a:xfrm>
-          <a:prstGeom prst="rect">
-            <a:avLst/>
-          </a:prstGeom>
-          <a:noFill/>
-        </p:spPr>
-        <p:txBody>
-          <a:bodyPr wrap="square">
-            <a:spAutoFit/>
-          </a:bodyPr>
-          <a:lstStyle/>
-          <a:p>
-            <a:pPr algn="l"/>
-            <a:r>
-              <a:rPr sz="1500" b="0">
-                <a:solidFill>
-                  <a:srgbClr val="5A6B66"/>
-                </a:solidFill>
-                <a:latin typeface="Calibri"/>
-              </a:rPr>
-              <a:t>Application logic &amp; orchestration</a:t>
-            </a:r>
-          </a:p>
-        </p:txBody>
-      </p:sp>
-      <p:sp>
-        <p:nvSpPr>
-          <p:cNvPr id="9" name="Rounded Rectangle 8"/>
+              <a:rPr sz="1800" b="0">
+                <a:solidFill>
+                  <a:srgbClr val="1C2B28"/>
+                </a:solidFill>
+                <a:latin typeface="Calibri"/>
+              </a:rPr>
+              <a:t>Login or register</a:t>
+            </a:r>
+          </a:p>
+        </p:txBody>
+      </p:sp>
+      <p:sp>
+        <p:nvSpPr>
+          <p:cNvPr id="8" name="Oval 7"/>
           <p:cNvSpPr/>
           <p:nvPr/>
         </p:nvSpPr>
         <p:spPr>
           <a:xfrm>
-            <a:off x="4389120" y="2011680"/>
-            <a:ext cx="3566160" cy="1874519"/>
-          </a:xfrm>
-          <a:prstGeom prst="roundRect">
-            <a:avLst>
-              <a:gd name="adj" fmla="val 8000"/>
-            </a:avLst>
+            <a:off x="777240" y="2514600"/>
+            <a:ext cx="411480" cy="411480"/>
+          </a:xfrm>
+          <a:prstGeom prst="ellipse">
+            <a:avLst/>
           </a:prstGeom>
           <a:solidFill>
-            <a:srgbClr val="FFFFFF"/>
+            <a:srgbClr val="0F6B5C"/>
           </a:solidFill>
-          <a:ln w="12700">
-            <a:solidFill>
-              <a:srgbClr val="D9E3DF"/>
-            </a:solidFill>
+          <a:ln>
+            <a:noFill/>
           </a:ln>
         </p:spPr>
         <p:style>
@@ -7847,19 +7847,28 @@
           <a:lstStyle/>
           <a:p>
             <a:pPr algn="ctr"/>
-          </a:p>
-        </p:txBody>
-      </p:sp>
-      <p:sp>
-        <p:nvSpPr>
-          <p:cNvPr id="10" name="TextBox 9"/>
+            <a:r>
+              <a:rPr sz="1400" b="1">
+                <a:solidFill>
+                  <a:srgbClr val="FFFFFF"/>
+                </a:solidFill>
+                <a:latin typeface="Calibri"/>
+              </a:rPr>
+              <a:t>2</a:t>
+            </a:r>
+          </a:p>
+        </p:txBody>
+      </p:sp>
+      <p:sp>
+        <p:nvSpPr>
+          <p:cNvPr id="9" name="TextBox 8"/>
           <p:cNvSpPr txBox="1"/>
           <p:nvPr/>
         </p:nvSpPr>
         <p:spPr>
           <a:xfrm>
-            <a:off x="4663440" y="2468880"/>
-            <a:ext cx="3017520" cy="411480"/>
+            <a:off x="1417320" y="2560320"/>
+            <a:ext cx="9601200" cy="365760"/>
           </a:xfrm>
           <a:prstGeom prst="rect">
             <a:avLst/>
@@ -7874,75 +7883,36 @@
           <a:p>
             <a:pPr algn="l"/>
             <a:r>
-              <a:rPr sz="1700" b="1">
-                <a:solidFill>
-                  <a:srgbClr val="523873"/>
-                </a:solidFill>
-                <a:latin typeface="Calibri"/>
-              </a:rPr>
-              <a:t>Gradio</a:t>
-            </a:r>
-          </a:p>
-        </p:txBody>
-      </p:sp>
-      <p:sp>
-        <p:nvSpPr>
-          <p:cNvPr id="11" name="TextBox 10"/>
-          <p:cNvSpPr txBox="1"/>
-          <p:nvPr/>
-        </p:nvSpPr>
-        <p:spPr>
-          <a:xfrm>
-            <a:off x="4663440" y="3017520"/>
-            <a:ext cx="3017520" cy="640080"/>
-          </a:xfrm>
-          <a:prstGeom prst="rect">
-            <a:avLst/>
-          </a:prstGeom>
-          <a:noFill/>
-        </p:spPr>
-        <p:txBody>
-          <a:bodyPr wrap="square">
-            <a:spAutoFit/>
-          </a:bodyPr>
-          <a:lstStyle/>
-          <a:p>
-            <a:pPr algn="l"/>
-            <a:r>
-              <a:rPr sz="1500" b="0">
-                <a:solidFill>
-                  <a:srgbClr val="5A6B66"/>
-                </a:solidFill>
-                <a:latin typeface="Calibri"/>
-              </a:rPr>
-              <a:t>Interactive interview UI</a:t>
-            </a:r>
-          </a:p>
-        </p:txBody>
-      </p:sp>
-      <p:sp>
-        <p:nvSpPr>
-          <p:cNvPr id="12" name="Rounded Rectangle 11"/>
+              <a:rPr sz="1800" b="0">
+                <a:solidFill>
+                  <a:srgbClr val="1C2B28"/>
+                </a:solidFill>
+                <a:latin typeface="Calibri"/>
+              </a:rPr>
+              <a:t>Upload / select resume + JD from library</a:t>
+            </a:r>
+          </a:p>
+        </p:txBody>
+      </p:sp>
+      <p:sp>
+        <p:nvSpPr>
+          <p:cNvPr id="10" name="Oval 9"/>
           <p:cNvSpPr/>
           <p:nvPr/>
         </p:nvSpPr>
         <p:spPr>
           <a:xfrm>
-            <a:off x="8138159" y="2011680"/>
-            <a:ext cx="3566160" cy="1874519"/>
-          </a:xfrm>
-          <a:prstGeom prst="roundRect">
-            <a:avLst>
-              <a:gd name="adj" fmla="val 8000"/>
-            </a:avLst>
+            <a:off x="777240" y="3154679"/>
+            <a:ext cx="411480" cy="411480"/>
+          </a:xfrm>
+          <a:prstGeom prst="ellipse">
+            <a:avLst/>
           </a:prstGeom>
           <a:solidFill>
-            <a:srgbClr val="FFFFFF"/>
+            <a:srgbClr val="0F6B5C"/>
           </a:solidFill>
-          <a:ln w="12700">
-            <a:solidFill>
-              <a:srgbClr val="D9E3DF"/>
-            </a:solidFill>
+          <a:ln>
+            <a:noFill/>
           </a:ln>
         </p:spPr>
         <p:style>
@@ -7964,19 +7934,28 @@
           <a:lstStyle/>
           <a:p>
             <a:pPr algn="ctr"/>
-          </a:p>
-        </p:txBody>
-      </p:sp>
-      <p:sp>
-        <p:nvSpPr>
-          <p:cNvPr id="13" name="TextBox 12"/>
+            <a:r>
+              <a:rPr sz="1400" b="1">
+                <a:solidFill>
+                  <a:srgbClr val="FFFFFF"/>
+                </a:solidFill>
+                <a:latin typeface="Calibri"/>
+              </a:rPr>
+              <a:t>3</a:t>
+            </a:r>
+          </a:p>
+        </p:txBody>
+      </p:sp>
+      <p:sp>
+        <p:nvSpPr>
+          <p:cNvPr id="11" name="TextBox 10"/>
           <p:cNvSpPr txBox="1"/>
           <p:nvPr/>
         </p:nvSpPr>
         <p:spPr>
           <a:xfrm>
-            <a:off x="8412479" y="2468880"/>
-            <a:ext cx="3017520" cy="411480"/>
+            <a:off x="1417320" y="3200399"/>
+            <a:ext cx="9601200" cy="365760"/>
           </a:xfrm>
           <a:prstGeom prst="rect">
             <a:avLst/>
@@ -7991,75 +7970,36 @@
           <a:p>
             <a:pPr algn="l"/>
             <a:r>
-              <a:rPr sz="1700" b="1">
-                <a:solidFill>
-                  <a:srgbClr val="523873"/>
-                </a:solidFill>
-                <a:latin typeface="Calibri"/>
-              </a:rPr>
-              <a:t>OpenAI API</a:t>
-            </a:r>
-          </a:p>
-        </p:txBody>
-      </p:sp>
-      <p:sp>
-        <p:nvSpPr>
-          <p:cNvPr id="14" name="TextBox 13"/>
-          <p:cNvSpPr txBox="1"/>
-          <p:nvPr/>
-        </p:nvSpPr>
-        <p:spPr>
-          <a:xfrm>
-            <a:off x="8412479" y="3017520"/>
-            <a:ext cx="3017520" cy="640080"/>
-          </a:xfrm>
-          <a:prstGeom prst="rect">
-            <a:avLst/>
-          </a:prstGeom>
-          <a:noFill/>
-        </p:spPr>
-        <p:txBody>
-          <a:bodyPr wrap="square">
-            <a:spAutoFit/>
-          </a:bodyPr>
-          <a:lstStyle/>
-          <a:p>
-            <a:pPr algn="l"/>
-            <a:r>
-              <a:rPr sz="1500" b="0">
-                <a:solidFill>
-                  <a:srgbClr val="5A6B66"/>
-                </a:solidFill>
-                <a:latin typeface="Calibri"/>
-              </a:rPr>
-              <a:t>Analysis, interview, STT, TTS, evaluation</a:t>
-            </a:r>
-          </a:p>
-        </p:txBody>
-      </p:sp>
-      <p:sp>
-        <p:nvSpPr>
-          <p:cNvPr id="15" name="Rounded Rectangle 14"/>
+              <a:rPr sz="1800" b="0">
+                <a:solidFill>
+                  <a:srgbClr val="1C2B28"/>
+                </a:solidFill>
+                <a:latin typeface="Calibri"/>
+              </a:rPr>
+              <a:t>Start interview — hear question audio</a:t>
+            </a:r>
+          </a:p>
+        </p:txBody>
+      </p:sp>
+      <p:sp>
+        <p:nvSpPr>
+          <p:cNvPr id="12" name="Oval 11"/>
           <p:cNvSpPr/>
           <p:nvPr/>
         </p:nvSpPr>
         <p:spPr>
           <a:xfrm>
-            <a:off x="640080" y="4114800"/>
-            <a:ext cx="3566160" cy="1874519"/>
-          </a:xfrm>
-          <a:prstGeom prst="roundRect">
-            <a:avLst>
-              <a:gd name="adj" fmla="val 8000"/>
-            </a:avLst>
+            <a:off x="777240" y="3794759"/>
+            <a:ext cx="411480" cy="411480"/>
+          </a:xfrm>
+          <a:prstGeom prst="ellipse">
+            <a:avLst/>
           </a:prstGeom>
           <a:solidFill>
-            <a:srgbClr val="FFFFFF"/>
+            <a:srgbClr val="0F6B5C"/>
           </a:solidFill>
-          <a:ln w="12700">
-            <a:solidFill>
-              <a:srgbClr val="D9E3DF"/>
-            </a:solidFill>
+          <a:ln>
+            <a:noFill/>
           </a:ln>
         </p:spPr>
         <p:style>
@@ -8081,19 +8021,28 @@
           <a:lstStyle/>
           <a:p>
             <a:pPr algn="ctr"/>
-          </a:p>
-        </p:txBody>
-      </p:sp>
-      <p:sp>
-        <p:nvSpPr>
-          <p:cNvPr id="16" name="TextBox 15"/>
+            <a:r>
+              <a:rPr sz="1400" b="1">
+                <a:solidFill>
+                  <a:srgbClr val="FFFFFF"/>
+                </a:solidFill>
+                <a:latin typeface="Calibri"/>
+              </a:rPr>
+              <a:t>4</a:t>
+            </a:r>
+          </a:p>
+        </p:txBody>
+      </p:sp>
+      <p:sp>
+        <p:nvSpPr>
+          <p:cNvPr id="13" name="TextBox 12"/>
           <p:cNvSpPr txBox="1"/>
           <p:nvPr/>
         </p:nvSpPr>
         <p:spPr>
           <a:xfrm>
-            <a:off x="914400" y="4572000"/>
-            <a:ext cx="3017520" cy="411480"/>
+            <a:off x="1417320" y="3840479"/>
+            <a:ext cx="9601200" cy="365760"/>
           </a:xfrm>
           <a:prstGeom prst="rect">
             <a:avLst/>
@@ -8108,75 +8057,36 @@
           <a:p>
             <a:pPr algn="l"/>
             <a:r>
-              <a:rPr sz="1700" b="1">
-                <a:solidFill>
-                  <a:srgbClr val="523873"/>
-                </a:solidFill>
-                <a:latin typeface="Calibri"/>
-              </a:rPr>
-              <a:t>Multi-agent design</a:t>
-            </a:r>
-          </a:p>
-        </p:txBody>
-      </p:sp>
-      <p:sp>
-        <p:nvSpPr>
-          <p:cNvPr id="17" name="TextBox 16"/>
-          <p:cNvSpPr txBox="1"/>
-          <p:nvPr/>
-        </p:nvSpPr>
-        <p:spPr>
-          <a:xfrm>
-            <a:off x="914400" y="5120640"/>
-            <a:ext cx="3017520" cy="640080"/>
-          </a:xfrm>
-          <a:prstGeom prst="rect">
-            <a:avLst/>
-          </a:prstGeom>
-          <a:noFill/>
-        </p:spPr>
-        <p:txBody>
-          <a:bodyPr wrap="square">
-            <a:spAutoFit/>
-          </a:bodyPr>
-          <a:lstStyle/>
-          <a:p>
-            <a:pPr algn="l"/>
-            <a:r>
-              <a:rPr sz="1500" b="0">
-                <a:solidFill>
-                  <a:srgbClr val="5A6B66"/>
-                </a:solidFill>
-                <a:latin typeface="Calibri"/>
-              </a:rPr>
-              <a:t>Specialized roles + manager workflow</a:t>
-            </a:r>
-          </a:p>
-        </p:txBody>
-      </p:sp>
-      <p:sp>
-        <p:nvSpPr>
-          <p:cNvPr id="18" name="Rounded Rectangle 17"/>
+              <a:rPr sz="1800" b="0">
+                <a:solidFill>
+                  <a:srgbClr val="1C2B28"/>
+                </a:solidFill>
+                <a:latin typeface="Calibri"/>
+              </a:rPr>
+              <a:t>Record → Transcribe → Save &amp; continue</a:t>
+            </a:r>
+          </a:p>
+        </p:txBody>
+      </p:sp>
+      <p:sp>
+        <p:nvSpPr>
+          <p:cNvPr id="14" name="Oval 13"/>
           <p:cNvSpPr/>
           <p:nvPr/>
         </p:nvSpPr>
         <p:spPr>
           <a:xfrm>
-            <a:off x="4389120" y="4114800"/>
-            <a:ext cx="3566160" cy="1874519"/>
-          </a:xfrm>
-          <a:prstGeom prst="roundRect">
-            <a:avLst>
-              <a:gd name="adj" fmla="val 8000"/>
-            </a:avLst>
+            <a:off x="777240" y="4434840"/>
+            <a:ext cx="411480" cy="411480"/>
+          </a:xfrm>
+          <a:prstGeom prst="ellipse">
+            <a:avLst/>
           </a:prstGeom>
           <a:solidFill>
-            <a:srgbClr val="FFFFFF"/>
+            <a:srgbClr val="523873"/>
           </a:solidFill>
-          <a:ln w="12700">
-            <a:solidFill>
-              <a:srgbClr val="D9E3DF"/>
-            </a:solidFill>
+          <a:ln>
+            <a:noFill/>
           </a:ln>
         </p:spPr>
         <p:style>
@@ -8198,19 +8108,28 @@
           <a:lstStyle/>
           <a:p>
             <a:pPr algn="ctr"/>
-          </a:p>
-        </p:txBody>
-      </p:sp>
-      <p:sp>
-        <p:nvSpPr>
-          <p:cNvPr id="19" name="TextBox 18"/>
+            <a:r>
+              <a:rPr sz="1400" b="1">
+                <a:solidFill>
+                  <a:srgbClr val="FFFFFF"/>
+                </a:solidFill>
+                <a:latin typeface="Calibri"/>
+              </a:rPr>
+              <a:t>5</a:t>
+            </a:r>
+          </a:p>
+        </p:txBody>
+      </p:sp>
+      <p:sp>
+        <p:nvSpPr>
+          <p:cNvPr id="15" name="TextBox 14"/>
           <p:cNvSpPr txBox="1"/>
           <p:nvPr/>
         </p:nvSpPr>
         <p:spPr>
           <a:xfrm>
-            <a:off x="4663440" y="4572000"/>
-            <a:ext cx="3017520" cy="411480"/>
+            <a:off x="1417320" y="4480560"/>
+            <a:ext cx="9601200" cy="365760"/>
           </a:xfrm>
           <a:prstGeom prst="rect">
             <a:avLst/>
@@ -8225,75 +8144,36 @@
           <a:p>
             <a:pPr algn="l"/>
             <a:r>
-              <a:rPr sz="1700" b="1">
-                <a:solidFill>
-                  <a:srgbClr val="523873"/>
-                </a:solidFill>
-                <a:latin typeface="Calibri"/>
-              </a:rPr>
-              <a:t>python-docx / fpdf2 / pypdf</a:t>
-            </a:r>
-          </a:p>
-        </p:txBody>
-      </p:sp>
-      <p:sp>
-        <p:nvSpPr>
-          <p:cNvPr id="20" name="TextBox 19"/>
-          <p:cNvSpPr txBox="1"/>
-          <p:nvPr/>
-        </p:nvSpPr>
-        <p:spPr>
-          <a:xfrm>
-            <a:off x="4663440" y="5120640"/>
-            <a:ext cx="3017520" cy="640080"/>
-          </a:xfrm>
-          <a:prstGeom prst="rect">
-            <a:avLst/>
-          </a:prstGeom>
-          <a:noFill/>
-        </p:spPr>
-        <p:txBody>
-          <a:bodyPr wrap="square">
-            <a:spAutoFit/>
-          </a:bodyPr>
-          <a:lstStyle/>
-          <a:p>
-            <a:pPr algn="l"/>
-            <a:r>
-              <a:rPr sz="1500" b="0">
-                <a:solidFill>
-                  <a:srgbClr val="5A6B66"/>
-                </a:solidFill>
-                <a:latin typeface="Calibri"/>
-              </a:rPr>
-              <a:t>Document read &amp; report export</a:t>
-            </a:r>
-          </a:p>
-        </p:txBody>
-      </p:sp>
-      <p:sp>
-        <p:nvSpPr>
-          <p:cNvPr id="21" name="Rounded Rectangle 20"/>
+              <a:rPr sz="1800" b="0">
+                <a:solidFill>
+                  <a:srgbClr val="1C2B28"/>
+                </a:solidFill>
+                <a:latin typeface="Calibri"/>
+              </a:rPr>
+              <a:t>Review final feedback</a:t>
+            </a:r>
+          </a:p>
+        </p:txBody>
+      </p:sp>
+      <p:sp>
+        <p:nvSpPr>
+          <p:cNvPr id="16" name="Oval 15"/>
           <p:cNvSpPr/>
           <p:nvPr/>
         </p:nvSpPr>
         <p:spPr>
           <a:xfrm>
-            <a:off x="8138159" y="4114800"/>
-            <a:ext cx="3566160" cy="1874519"/>
-          </a:xfrm>
-          <a:prstGeom prst="roundRect">
-            <a:avLst>
-              <a:gd name="adj" fmla="val 8000"/>
-            </a:avLst>
+            <a:off x="777240" y="5074920"/>
+            <a:ext cx="411480" cy="411480"/>
+          </a:xfrm>
+          <a:prstGeom prst="ellipse">
+            <a:avLst/>
           </a:prstGeom>
           <a:solidFill>
-            <a:srgbClr val="FFFFFF"/>
+            <a:srgbClr val="523873"/>
           </a:solidFill>
-          <a:ln w="12700">
-            <a:solidFill>
-              <a:srgbClr val="D9E3DF"/>
-            </a:solidFill>
+          <a:ln>
+            <a:noFill/>
           </a:ln>
         </p:spPr>
         <p:style>
@@ -8315,19 +8195,28 @@
           <a:lstStyle/>
           <a:p>
             <a:pPr algn="ctr"/>
-          </a:p>
-        </p:txBody>
-      </p:sp>
-      <p:sp>
-        <p:nvSpPr>
-          <p:cNvPr id="22" name="TextBox 21"/>
+            <a:r>
+              <a:rPr sz="1400" b="1">
+                <a:solidFill>
+                  <a:srgbClr val="FFFFFF"/>
+                </a:solidFill>
+                <a:latin typeface="Calibri"/>
+              </a:rPr>
+              <a:t>6</a:t>
+            </a:r>
+          </a:p>
+        </p:txBody>
+      </p:sp>
+      <p:sp>
+        <p:nvSpPr>
+          <p:cNvPr id="17" name="TextBox 16"/>
           <p:cNvSpPr txBox="1"/>
           <p:nvPr/>
         </p:nvSpPr>
         <p:spPr>
           <a:xfrm>
-            <a:off x="8412479" y="4572000"/>
-            <a:ext cx="3017520" cy="411480"/>
+            <a:off x="1417320" y="5120640"/>
+            <a:ext cx="9601200" cy="365760"/>
           </a:xfrm>
           <a:prstGeom prst="rect">
             <a:avLst/>
@@ -8342,27 +8231,79 @@
           <a:p>
             <a:pPr algn="l"/>
             <a:r>
-              <a:rPr sz="1700" b="1">
-                <a:solidFill>
-                  <a:srgbClr val="523873"/>
-                </a:solidFill>
-                <a:latin typeface="Calibri"/>
-              </a:rPr>
-              <a:t>Local user_data store</a:t>
-            </a:r>
-          </a:p>
-        </p:txBody>
-      </p:sp>
-      <p:sp>
-        <p:nvSpPr>
-          <p:cNvPr id="23" name="TextBox 22"/>
+              <a:rPr sz="1800" b="0">
+                <a:solidFill>
+                  <a:srgbClr val="1C2B28"/>
+                </a:solidFill>
+                <a:latin typeface="Calibri"/>
+              </a:rPr>
+              <a:t>Download feedback + study pack</a:t>
+            </a:r>
+          </a:p>
+        </p:txBody>
+      </p:sp>
+      <p:sp>
+        <p:nvSpPr>
+          <p:cNvPr id="18" name="Oval 17"/>
+          <p:cNvSpPr/>
+          <p:nvPr/>
+        </p:nvSpPr>
+        <p:spPr>
+          <a:xfrm>
+            <a:off x="777240" y="5714999"/>
+            <a:ext cx="411480" cy="411480"/>
+          </a:xfrm>
+          <a:prstGeom prst="ellipse">
+            <a:avLst/>
+          </a:prstGeom>
+          <a:solidFill>
+            <a:srgbClr val="523873"/>
+          </a:solidFill>
+          <a:ln>
+            <a:noFill/>
+          </a:ln>
+        </p:spPr>
+        <p:style>
+          <a:lnRef idx="1">
+            <a:schemeClr val="accent1"/>
+          </a:lnRef>
+          <a:fillRef idx="3">
+            <a:schemeClr val="accent1"/>
+          </a:fillRef>
+          <a:effectRef idx="2">
+            <a:schemeClr val="accent1"/>
+          </a:effectRef>
+          <a:fontRef idx="minor">
+            <a:schemeClr val="lt1"/>
+          </a:fontRef>
+        </p:style>
+        <p:txBody>
+          <a:bodyPr rtlCol="0" anchor="ctr"/>
+          <a:lstStyle/>
+          <a:p>
+            <a:pPr algn="ctr"/>
+            <a:r>
+              <a:rPr sz="1400" b="1">
+                <a:solidFill>
+                  <a:srgbClr val="FFFFFF"/>
+                </a:solidFill>
+                <a:latin typeface="Calibri"/>
+              </a:rPr>
+              <a:t>7</a:t>
+            </a:r>
+          </a:p>
+        </p:txBody>
+      </p:sp>
+      <p:sp>
+        <p:nvSpPr>
+          <p:cNvPr id="19" name="TextBox 18"/>
           <p:cNvSpPr txBox="1"/>
           <p:nvPr/>
         </p:nvSpPr>
         <p:spPr>
           <a:xfrm>
-            <a:off x="8412479" y="5120640"/>
-            <a:ext cx="3017520" cy="640080"/>
+            <a:off x="1417320" y="5760719"/>
+            <a:ext cx="9601200" cy="365760"/>
           </a:xfrm>
           <a:prstGeom prst="rect">
             <a:avLst/>
@@ -8377,13 +8318,13 @@
           <a:p>
             <a:pPr algn="l"/>
             <a:r>
-              <a:rPr sz="1500" b="0">
-                <a:solidFill>
-                  <a:srgbClr val="5A6B66"/>
-                </a:solidFill>
-                <a:latin typeface="Calibri"/>
-              </a:rPr>
-              <a:t>Resumes, JDs, conversations, audio</a:t>
+              <a:rPr sz="1800" b="0">
+                <a:solidFill>
+                  <a:srgbClr val="1C2B28"/>
+                </a:solidFill>
+                <a:latin typeface="Calibri"/>
+              </a:rPr>
+              <a:t>Open a past interview and replay audio</a:t>
             </a:r>
           </a:p>
         </p:txBody>
@@ -8397,7 +8338,7 @@
 </file>
 
 <file path=ppt/slides/slide8.xml><?xml version="1.0" encoding="utf-8"?>
-<p:sld xmlns:a="http://schemas.openxmlformats.org/drawingml/2006/main" xmlns:p="http://schemas.openxmlformats.org/presentationml/2006/main" xmlns:r="http://schemas.openxmlformats.org/officeDocument/2006/relationships">
+<p:sld xmlns:a="http://schemas.openxmlformats.org/drawingml/2006/main" xmlns:r="http://schemas.openxmlformats.org/officeDocument/2006/relationships" xmlns:p="http://schemas.openxmlformats.org/presentationml/2006/main">
   <p:cSld>
     <p:spTree>
       <p:nvGrpSpPr>
@@ -8405,7 +8346,14 @@
         <p:cNvGrpSpPr/>
         <p:nvPr/>
       </p:nvGrpSpPr>
-      <p:grpSpPr/>
+      <p:grpSpPr>
+        <a:xfrm>
+          <a:off x="0" y="0"/>
+          <a:ext cx="0" cy="0"/>
+          <a:chOff x="0" y="0"/>
+          <a:chExt cx="0" cy="0"/>
+        </a:xfrm>
+      </p:grpSpPr>
       <p:sp>
         <p:nvSpPr>
           <p:cNvPr id="2" name="Rectangle 1"/>
@@ -8446,6 +8394,7 @@
           <a:lstStyle/>
           <a:p>
             <a:pPr algn="ctr"/>
+            <a:endParaRPr/>
           </a:p>
         </p:txBody>
       </p:sp>
@@ -8514,7 +8463,7 @@
                 </a:solidFill>
                 <a:latin typeface="Calibri"/>
               </a:rPr>
-              <a:t>Engineering Highlights</a:t>
+              <a:t>Tech Stack</a:t>
             </a:r>
           </a:p>
         </p:txBody>
@@ -8549,21 +8498,69 @@
                 </a:solidFill>
                 <a:latin typeface="Calibri"/>
               </a:rPr>
-              <a:t>What makes this more than a chatbot wrapper</a:t>
-            </a:r>
-          </a:p>
-        </p:txBody>
-      </p:sp>
-      <p:sp>
-        <p:nvSpPr>
-          <p:cNvPr id="6" name="TextBox 5"/>
+              <a:t>Practical tools for an agentic product demo</a:t>
+            </a:r>
+          </a:p>
+        </p:txBody>
+      </p:sp>
+      <p:sp>
+        <p:nvSpPr>
+          <p:cNvPr id="6" name="Rounded Rectangle 5"/>
+          <p:cNvSpPr/>
+          <p:nvPr/>
+        </p:nvSpPr>
+        <p:spPr>
+          <a:xfrm>
+            <a:off x="640080" y="2011680"/>
+            <a:ext cx="3566160" cy="1874519"/>
+          </a:xfrm>
+          <a:prstGeom prst="roundRect">
+            <a:avLst>
+              <a:gd name="adj" fmla="val 8000"/>
+            </a:avLst>
+          </a:prstGeom>
+          <a:solidFill>
+            <a:srgbClr val="FFFFFF"/>
+          </a:solidFill>
+          <a:ln w="12700">
+            <a:solidFill>
+              <a:srgbClr val="D9E3DF"/>
+            </a:solidFill>
+          </a:ln>
+        </p:spPr>
+        <p:style>
+          <a:lnRef idx="1">
+            <a:schemeClr val="accent1"/>
+          </a:lnRef>
+          <a:fillRef idx="3">
+            <a:schemeClr val="accent1"/>
+          </a:fillRef>
+          <a:effectRef idx="2">
+            <a:schemeClr val="accent1"/>
+          </a:effectRef>
+          <a:fontRef idx="minor">
+            <a:schemeClr val="lt1"/>
+          </a:fontRef>
+        </p:style>
+        <p:txBody>
+          <a:bodyPr rtlCol="0" anchor="ctr"/>
+          <a:lstStyle/>
+          <a:p>
+            <a:pPr algn="ctr"/>
+            <a:endParaRPr/>
+          </a:p>
+        </p:txBody>
+      </p:sp>
+      <p:sp>
+        <p:nvSpPr>
+          <p:cNvPr id="7" name="TextBox 6"/>
           <p:cNvSpPr txBox="1"/>
           <p:nvPr/>
         </p:nvSpPr>
         <p:spPr>
           <a:xfrm>
-            <a:off x="822960" y="2011680"/>
-            <a:ext cx="10515600" cy="4114800"/>
+            <a:off x="914400" y="2468880"/>
+            <a:ext cx="3017520" cy="411480"/>
           </a:xfrm>
           <a:prstGeom prst="rect">
             <a:avLst/>
@@ -8576,99 +8573,640 @@
           </a:bodyPr>
           <a:lstStyle/>
           <a:p>
-            <a:pPr>
-              <a:spcAft>
-                <a:spcPts val="800"/>
-              </a:spcAft>
-            </a:pPr>
-            <a:r>
-              <a:rPr sz="1800" b="0">
-                <a:solidFill>
-                  <a:srgbClr val="1C2B28"/>
-                </a:solidFill>
-                <a:latin typeface="Calibri"/>
-              </a:rPr>
-              <a:t>•  Separation of concerns: analysis, interviewing, evaluation, and orchestration are distinct agents</a:t>
-            </a:r>
-          </a:p>
-          <a:p>
-            <a:pPr>
-              <a:spcAft>
-                <a:spcPts val="800"/>
-              </a:spcAft>
-            </a:pPr>
-            <a:r>
-              <a:rPr sz="1800" b="0">
-                <a:solidFill>
-                  <a:srgbClr val="1C2B28"/>
-                </a:solidFill>
-                <a:latin typeface="Calibri"/>
-              </a:rPr>
-              <a:t>•  Deterministic interview pipeline in code for a reliable 6-question flow</a:t>
-            </a:r>
-          </a:p>
-          <a:p>
-            <a:pPr>
-              <a:spcAft>
-                <a:spcPts val="800"/>
-              </a:spcAft>
-            </a:pPr>
-            <a:r>
-              <a:rPr sz="1800" b="0">
-                <a:solidFill>
-                  <a:srgbClr val="1C2B28"/>
-                </a:solidFill>
-                <a:latin typeface="Calibri"/>
-              </a:rPr>
-              <a:t>•  Session state tracks questions, answers, and audio for history + reporting</a:t>
-            </a:r>
-          </a:p>
-          <a:p>
-            <a:pPr>
-              <a:spcAft>
-                <a:spcPts val="800"/>
-              </a:spcAft>
-            </a:pPr>
-            <a:r>
-              <a:rPr sz="1800" b="0">
-                <a:solidFill>
-                  <a:srgbClr val="1C2B28"/>
-                </a:solidFill>
-                <a:latin typeface="Calibri"/>
-              </a:rPr>
-              <a:t>•  Per-user persistence: document library and past conversations under user_data/</a:t>
-            </a:r>
-          </a:p>
-          <a:p>
-            <a:pPr>
-              <a:spcAft>
-                <a:spcPts val="800"/>
-              </a:spcAft>
-            </a:pPr>
-            <a:r>
-              <a:rPr sz="1800" b="0">
-                <a:solidFill>
-                  <a:srgbClr val="1C2B28"/>
-                </a:solidFill>
-                <a:latin typeface="Calibri"/>
-              </a:rPr>
-              <a:t>•  Downloadable coaching artifacts: feedback report and study pack with model answers + concepts</a:t>
-            </a:r>
-          </a:p>
-          <a:p>
-            <a:pPr>
-              <a:spcAft>
-                <a:spcPts val="800"/>
-              </a:spcAft>
-            </a:pPr>
-            <a:r>
-              <a:rPr sz="1800" b="0">
-                <a:solidFill>
-                  <a:srgbClr val="1C2B28"/>
-                </a:solidFill>
-                <a:latin typeface="Calibri"/>
-              </a:rPr>
-              <a:t>•  Modular project layout: agents/, auth/, library/, reports/, ui/</a:t>
+            <a:pPr algn="l"/>
+            <a:r>
+              <a:rPr sz="1700" b="1">
+                <a:solidFill>
+                  <a:srgbClr val="523873"/>
+                </a:solidFill>
+                <a:latin typeface="Calibri"/>
+              </a:rPr>
+              <a:t>Python</a:t>
+            </a:r>
+          </a:p>
+        </p:txBody>
+      </p:sp>
+      <p:sp>
+        <p:nvSpPr>
+          <p:cNvPr id="8" name="TextBox 7"/>
+          <p:cNvSpPr txBox="1"/>
+          <p:nvPr/>
+        </p:nvSpPr>
+        <p:spPr>
+          <a:xfrm>
+            <a:off x="914400" y="3017520"/>
+            <a:ext cx="3017520" cy="640080"/>
+          </a:xfrm>
+          <a:prstGeom prst="rect">
+            <a:avLst/>
+          </a:prstGeom>
+          <a:noFill/>
+        </p:spPr>
+        <p:txBody>
+          <a:bodyPr wrap="square">
+            <a:spAutoFit/>
+          </a:bodyPr>
+          <a:lstStyle/>
+          <a:p>
+            <a:pPr algn="l"/>
+            <a:r>
+              <a:rPr sz="1500" b="0">
+                <a:solidFill>
+                  <a:srgbClr val="5A6B66"/>
+                </a:solidFill>
+                <a:latin typeface="Calibri"/>
+              </a:rPr>
+              <a:t>Application logic &amp; orchestration</a:t>
+            </a:r>
+          </a:p>
+        </p:txBody>
+      </p:sp>
+      <p:sp>
+        <p:nvSpPr>
+          <p:cNvPr id="9" name="Rounded Rectangle 8"/>
+          <p:cNvSpPr/>
+          <p:nvPr/>
+        </p:nvSpPr>
+        <p:spPr>
+          <a:xfrm>
+            <a:off x="4389120" y="2011680"/>
+            <a:ext cx="3566160" cy="1874519"/>
+          </a:xfrm>
+          <a:prstGeom prst="roundRect">
+            <a:avLst>
+              <a:gd name="adj" fmla="val 8000"/>
+            </a:avLst>
+          </a:prstGeom>
+          <a:solidFill>
+            <a:srgbClr val="FFFFFF"/>
+          </a:solidFill>
+          <a:ln w="12700">
+            <a:solidFill>
+              <a:srgbClr val="D9E3DF"/>
+            </a:solidFill>
+          </a:ln>
+        </p:spPr>
+        <p:style>
+          <a:lnRef idx="1">
+            <a:schemeClr val="accent1"/>
+          </a:lnRef>
+          <a:fillRef idx="3">
+            <a:schemeClr val="accent1"/>
+          </a:fillRef>
+          <a:effectRef idx="2">
+            <a:schemeClr val="accent1"/>
+          </a:effectRef>
+          <a:fontRef idx="minor">
+            <a:schemeClr val="lt1"/>
+          </a:fontRef>
+        </p:style>
+        <p:txBody>
+          <a:bodyPr rtlCol="0" anchor="ctr"/>
+          <a:lstStyle/>
+          <a:p>
+            <a:pPr algn="ctr"/>
+            <a:endParaRPr/>
+          </a:p>
+        </p:txBody>
+      </p:sp>
+      <p:sp>
+        <p:nvSpPr>
+          <p:cNvPr id="10" name="TextBox 9"/>
+          <p:cNvSpPr txBox="1"/>
+          <p:nvPr/>
+        </p:nvSpPr>
+        <p:spPr>
+          <a:xfrm>
+            <a:off x="4663440" y="2468880"/>
+            <a:ext cx="3017520" cy="411480"/>
+          </a:xfrm>
+          <a:prstGeom prst="rect">
+            <a:avLst/>
+          </a:prstGeom>
+          <a:noFill/>
+        </p:spPr>
+        <p:txBody>
+          <a:bodyPr wrap="square">
+            <a:spAutoFit/>
+          </a:bodyPr>
+          <a:lstStyle/>
+          <a:p>
+            <a:pPr algn="l"/>
+            <a:r>
+              <a:rPr sz="1700" b="1">
+                <a:solidFill>
+                  <a:srgbClr val="523873"/>
+                </a:solidFill>
+                <a:latin typeface="Calibri"/>
+              </a:rPr>
+              <a:t>Gradio</a:t>
+            </a:r>
+          </a:p>
+        </p:txBody>
+      </p:sp>
+      <p:sp>
+        <p:nvSpPr>
+          <p:cNvPr id="11" name="TextBox 10"/>
+          <p:cNvSpPr txBox="1"/>
+          <p:nvPr/>
+        </p:nvSpPr>
+        <p:spPr>
+          <a:xfrm>
+            <a:off x="4663440" y="3017520"/>
+            <a:ext cx="3017520" cy="640080"/>
+          </a:xfrm>
+          <a:prstGeom prst="rect">
+            <a:avLst/>
+          </a:prstGeom>
+          <a:noFill/>
+        </p:spPr>
+        <p:txBody>
+          <a:bodyPr wrap="square">
+            <a:spAutoFit/>
+          </a:bodyPr>
+          <a:lstStyle/>
+          <a:p>
+            <a:pPr algn="l"/>
+            <a:r>
+              <a:rPr sz="1500" b="0">
+                <a:solidFill>
+                  <a:srgbClr val="5A6B66"/>
+                </a:solidFill>
+                <a:latin typeface="Calibri"/>
+              </a:rPr>
+              <a:t>Interactive interview UI</a:t>
+            </a:r>
+          </a:p>
+        </p:txBody>
+      </p:sp>
+      <p:sp>
+        <p:nvSpPr>
+          <p:cNvPr id="12" name="Rounded Rectangle 11"/>
+          <p:cNvSpPr/>
+          <p:nvPr/>
+        </p:nvSpPr>
+        <p:spPr>
+          <a:xfrm>
+            <a:off x="8138159" y="2011680"/>
+            <a:ext cx="3566160" cy="1874519"/>
+          </a:xfrm>
+          <a:prstGeom prst="roundRect">
+            <a:avLst>
+              <a:gd name="adj" fmla="val 8000"/>
+            </a:avLst>
+          </a:prstGeom>
+          <a:solidFill>
+            <a:srgbClr val="FFFFFF"/>
+          </a:solidFill>
+          <a:ln w="12700">
+            <a:solidFill>
+              <a:srgbClr val="D9E3DF"/>
+            </a:solidFill>
+          </a:ln>
+        </p:spPr>
+        <p:style>
+          <a:lnRef idx="1">
+            <a:schemeClr val="accent1"/>
+          </a:lnRef>
+          <a:fillRef idx="3">
+            <a:schemeClr val="accent1"/>
+          </a:fillRef>
+          <a:effectRef idx="2">
+            <a:schemeClr val="accent1"/>
+          </a:effectRef>
+          <a:fontRef idx="minor">
+            <a:schemeClr val="lt1"/>
+          </a:fontRef>
+        </p:style>
+        <p:txBody>
+          <a:bodyPr rtlCol="0" anchor="ctr"/>
+          <a:lstStyle/>
+          <a:p>
+            <a:pPr algn="ctr"/>
+            <a:endParaRPr/>
+          </a:p>
+        </p:txBody>
+      </p:sp>
+      <p:sp>
+        <p:nvSpPr>
+          <p:cNvPr id="13" name="TextBox 12"/>
+          <p:cNvSpPr txBox="1"/>
+          <p:nvPr/>
+        </p:nvSpPr>
+        <p:spPr>
+          <a:xfrm>
+            <a:off x="8412479" y="2468880"/>
+            <a:ext cx="3017520" cy="411480"/>
+          </a:xfrm>
+          <a:prstGeom prst="rect">
+            <a:avLst/>
+          </a:prstGeom>
+          <a:noFill/>
+        </p:spPr>
+        <p:txBody>
+          <a:bodyPr wrap="square">
+            <a:spAutoFit/>
+          </a:bodyPr>
+          <a:lstStyle/>
+          <a:p>
+            <a:pPr algn="l"/>
+            <a:r>
+              <a:rPr sz="1700" b="1">
+                <a:solidFill>
+                  <a:srgbClr val="523873"/>
+                </a:solidFill>
+                <a:latin typeface="Calibri"/>
+              </a:rPr>
+              <a:t>OpenAI API</a:t>
+            </a:r>
+          </a:p>
+        </p:txBody>
+      </p:sp>
+      <p:sp>
+        <p:nvSpPr>
+          <p:cNvPr id="14" name="TextBox 13"/>
+          <p:cNvSpPr txBox="1"/>
+          <p:nvPr/>
+        </p:nvSpPr>
+        <p:spPr>
+          <a:xfrm>
+            <a:off x="8412479" y="3017520"/>
+            <a:ext cx="3017520" cy="640080"/>
+          </a:xfrm>
+          <a:prstGeom prst="rect">
+            <a:avLst/>
+          </a:prstGeom>
+          <a:noFill/>
+        </p:spPr>
+        <p:txBody>
+          <a:bodyPr wrap="square">
+            <a:spAutoFit/>
+          </a:bodyPr>
+          <a:lstStyle/>
+          <a:p>
+            <a:pPr algn="l"/>
+            <a:r>
+              <a:rPr sz="1500" b="0">
+                <a:solidFill>
+                  <a:srgbClr val="5A6B66"/>
+                </a:solidFill>
+                <a:latin typeface="Calibri"/>
+              </a:rPr>
+              <a:t>Analysis, interview, STT, TTS, evaluation</a:t>
+            </a:r>
+          </a:p>
+        </p:txBody>
+      </p:sp>
+      <p:sp>
+        <p:nvSpPr>
+          <p:cNvPr id="15" name="Rounded Rectangle 14"/>
+          <p:cNvSpPr/>
+          <p:nvPr/>
+        </p:nvSpPr>
+        <p:spPr>
+          <a:xfrm>
+            <a:off x="640080" y="4114800"/>
+            <a:ext cx="3566160" cy="1874519"/>
+          </a:xfrm>
+          <a:prstGeom prst="roundRect">
+            <a:avLst>
+              <a:gd name="adj" fmla="val 8000"/>
+            </a:avLst>
+          </a:prstGeom>
+          <a:solidFill>
+            <a:srgbClr val="FFFFFF"/>
+          </a:solidFill>
+          <a:ln w="12700">
+            <a:solidFill>
+              <a:srgbClr val="D9E3DF"/>
+            </a:solidFill>
+          </a:ln>
+        </p:spPr>
+        <p:style>
+          <a:lnRef idx="1">
+            <a:schemeClr val="accent1"/>
+          </a:lnRef>
+          <a:fillRef idx="3">
+            <a:schemeClr val="accent1"/>
+          </a:fillRef>
+          <a:effectRef idx="2">
+            <a:schemeClr val="accent1"/>
+          </a:effectRef>
+          <a:fontRef idx="minor">
+            <a:schemeClr val="lt1"/>
+          </a:fontRef>
+        </p:style>
+        <p:txBody>
+          <a:bodyPr rtlCol="0" anchor="ctr"/>
+          <a:lstStyle/>
+          <a:p>
+            <a:pPr algn="ctr"/>
+            <a:endParaRPr/>
+          </a:p>
+        </p:txBody>
+      </p:sp>
+      <p:sp>
+        <p:nvSpPr>
+          <p:cNvPr id="16" name="TextBox 15"/>
+          <p:cNvSpPr txBox="1"/>
+          <p:nvPr/>
+        </p:nvSpPr>
+        <p:spPr>
+          <a:xfrm>
+            <a:off x="914400" y="4572000"/>
+            <a:ext cx="3017520" cy="411480"/>
+          </a:xfrm>
+          <a:prstGeom prst="rect">
+            <a:avLst/>
+          </a:prstGeom>
+          <a:noFill/>
+        </p:spPr>
+        <p:txBody>
+          <a:bodyPr wrap="square">
+            <a:spAutoFit/>
+          </a:bodyPr>
+          <a:lstStyle/>
+          <a:p>
+            <a:pPr algn="l"/>
+            <a:r>
+              <a:rPr sz="1700" b="1">
+                <a:solidFill>
+                  <a:srgbClr val="523873"/>
+                </a:solidFill>
+                <a:latin typeface="Calibri"/>
+              </a:rPr>
+              <a:t>Multi-agent design</a:t>
+            </a:r>
+          </a:p>
+        </p:txBody>
+      </p:sp>
+      <p:sp>
+        <p:nvSpPr>
+          <p:cNvPr id="17" name="TextBox 16"/>
+          <p:cNvSpPr txBox="1"/>
+          <p:nvPr/>
+        </p:nvSpPr>
+        <p:spPr>
+          <a:xfrm>
+            <a:off x="914400" y="5120640"/>
+            <a:ext cx="3017520" cy="640080"/>
+          </a:xfrm>
+          <a:prstGeom prst="rect">
+            <a:avLst/>
+          </a:prstGeom>
+          <a:noFill/>
+        </p:spPr>
+        <p:txBody>
+          <a:bodyPr wrap="square">
+            <a:spAutoFit/>
+          </a:bodyPr>
+          <a:lstStyle/>
+          <a:p>
+            <a:pPr algn="l"/>
+            <a:r>
+              <a:rPr sz="1500" b="0">
+                <a:solidFill>
+                  <a:srgbClr val="5A6B66"/>
+                </a:solidFill>
+                <a:latin typeface="Calibri"/>
+              </a:rPr>
+              <a:t>Specialized roles + manager workflow</a:t>
+            </a:r>
+          </a:p>
+        </p:txBody>
+      </p:sp>
+      <p:sp>
+        <p:nvSpPr>
+          <p:cNvPr id="18" name="Rounded Rectangle 17"/>
+          <p:cNvSpPr/>
+          <p:nvPr/>
+        </p:nvSpPr>
+        <p:spPr>
+          <a:xfrm>
+            <a:off x="4389120" y="4114800"/>
+            <a:ext cx="3566160" cy="1874519"/>
+          </a:xfrm>
+          <a:prstGeom prst="roundRect">
+            <a:avLst>
+              <a:gd name="adj" fmla="val 8000"/>
+            </a:avLst>
+          </a:prstGeom>
+          <a:solidFill>
+            <a:srgbClr val="FFFFFF"/>
+          </a:solidFill>
+          <a:ln w="12700">
+            <a:solidFill>
+              <a:srgbClr val="D9E3DF"/>
+            </a:solidFill>
+          </a:ln>
+        </p:spPr>
+        <p:style>
+          <a:lnRef idx="1">
+            <a:schemeClr val="accent1"/>
+          </a:lnRef>
+          <a:fillRef idx="3">
+            <a:schemeClr val="accent1"/>
+          </a:fillRef>
+          <a:effectRef idx="2">
+            <a:schemeClr val="accent1"/>
+          </a:effectRef>
+          <a:fontRef idx="minor">
+            <a:schemeClr val="lt1"/>
+          </a:fontRef>
+        </p:style>
+        <p:txBody>
+          <a:bodyPr rtlCol="0" anchor="ctr"/>
+          <a:lstStyle/>
+          <a:p>
+            <a:pPr algn="ctr"/>
+            <a:endParaRPr/>
+          </a:p>
+        </p:txBody>
+      </p:sp>
+      <p:sp>
+        <p:nvSpPr>
+          <p:cNvPr id="19" name="TextBox 18"/>
+          <p:cNvSpPr txBox="1"/>
+          <p:nvPr/>
+        </p:nvSpPr>
+        <p:spPr>
+          <a:xfrm>
+            <a:off x="4663440" y="4572000"/>
+            <a:ext cx="3017520" cy="411480"/>
+          </a:xfrm>
+          <a:prstGeom prst="rect">
+            <a:avLst/>
+          </a:prstGeom>
+          <a:noFill/>
+        </p:spPr>
+        <p:txBody>
+          <a:bodyPr wrap="square">
+            <a:spAutoFit/>
+          </a:bodyPr>
+          <a:lstStyle/>
+          <a:p>
+            <a:pPr algn="l"/>
+            <a:r>
+              <a:rPr sz="1700" b="1">
+                <a:solidFill>
+                  <a:srgbClr val="523873"/>
+                </a:solidFill>
+                <a:latin typeface="Calibri"/>
+              </a:rPr>
+              <a:t>python-docx / fpdf2 / pypdf</a:t>
+            </a:r>
+          </a:p>
+        </p:txBody>
+      </p:sp>
+      <p:sp>
+        <p:nvSpPr>
+          <p:cNvPr id="20" name="TextBox 19"/>
+          <p:cNvSpPr txBox="1"/>
+          <p:nvPr/>
+        </p:nvSpPr>
+        <p:spPr>
+          <a:xfrm>
+            <a:off x="4663440" y="5120640"/>
+            <a:ext cx="3017520" cy="640080"/>
+          </a:xfrm>
+          <a:prstGeom prst="rect">
+            <a:avLst/>
+          </a:prstGeom>
+          <a:noFill/>
+        </p:spPr>
+        <p:txBody>
+          <a:bodyPr wrap="square">
+            <a:spAutoFit/>
+          </a:bodyPr>
+          <a:lstStyle/>
+          <a:p>
+            <a:pPr algn="l"/>
+            <a:r>
+              <a:rPr sz="1500" b="0">
+                <a:solidFill>
+                  <a:srgbClr val="5A6B66"/>
+                </a:solidFill>
+                <a:latin typeface="Calibri"/>
+              </a:rPr>
+              <a:t>Document read &amp; report export</a:t>
+            </a:r>
+          </a:p>
+        </p:txBody>
+      </p:sp>
+      <p:sp>
+        <p:nvSpPr>
+          <p:cNvPr id="21" name="Rounded Rectangle 20"/>
+          <p:cNvSpPr/>
+          <p:nvPr/>
+        </p:nvSpPr>
+        <p:spPr>
+          <a:xfrm>
+            <a:off x="8138159" y="4114800"/>
+            <a:ext cx="3566160" cy="1874519"/>
+          </a:xfrm>
+          <a:prstGeom prst="roundRect">
+            <a:avLst>
+              <a:gd name="adj" fmla="val 8000"/>
+            </a:avLst>
+          </a:prstGeom>
+          <a:solidFill>
+            <a:srgbClr val="FFFFFF"/>
+          </a:solidFill>
+          <a:ln w="12700">
+            <a:solidFill>
+              <a:srgbClr val="D9E3DF"/>
+            </a:solidFill>
+          </a:ln>
+        </p:spPr>
+        <p:style>
+          <a:lnRef idx="1">
+            <a:schemeClr val="accent1"/>
+          </a:lnRef>
+          <a:fillRef idx="3">
+            <a:schemeClr val="accent1"/>
+          </a:fillRef>
+          <a:effectRef idx="2">
+            <a:schemeClr val="accent1"/>
+          </a:effectRef>
+          <a:fontRef idx="minor">
+            <a:schemeClr val="lt1"/>
+          </a:fontRef>
+        </p:style>
+        <p:txBody>
+          <a:bodyPr rtlCol="0" anchor="ctr"/>
+          <a:lstStyle/>
+          <a:p>
+            <a:pPr algn="ctr"/>
+            <a:endParaRPr/>
+          </a:p>
+        </p:txBody>
+      </p:sp>
+      <p:sp>
+        <p:nvSpPr>
+          <p:cNvPr id="22" name="TextBox 21"/>
+          <p:cNvSpPr txBox="1"/>
+          <p:nvPr/>
+        </p:nvSpPr>
+        <p:spPr>
+          <a:xfrm>
+            <a:off x="8412479" y="4572000"/>
+            <a:ext cx="3017520" cy="411480"/>
+          </a:xfrm>
+          <a:prstGeom prst="rect">
+            <a:avLst/>
+          </a:prstGeom>
+          <a:noFill/>
+        </p:spPr>
+        <p:txBody>
+          <a:bodyPr wrap="square">
+            <a:spAutoFit/>
+          </a:bodyPr>
+          <a:lstStyle/>
+          <a:p>
+            <a:pPr algn="l"/>
+            <a:r>
+              <a:rPr sz="1700" b="1">
+                <a:solidFill>
+                  <a:srgbClr val="523873"/>
+                </a:solidFill>
+                <a:latin typeface="Calibri"/>
+              </a:rPr>
+              <a:t>Local user_data store</a:t>
+            </a:r>
+          </a:p>
+        </p:txBody>
+      </p:sp>
+      <p:sp>
+        <p:nvSpPr>
+          <p:cNvPr id="23" name="TextBox 22"/>
+          <p:cNvSpPr txBox="1"/>
+          <p:nvPr/>
+        </p:nvSpPr>
+        <p:spPr>
+          <a:xfrm>
+            <a:off x="8412479" y="5120640"/>
+            <a:ext cx="3017520" cy="640080"/>
+          </a:xfrm>
+          <a:prstGeom prst="rect">
+            <a:avLst/>
+          </a:prstGeom>
+          <a:noFill/>
+        </p:spPr>
+        <p:txBody>
+          <a:bodyPr wrap="square">
+            <a:spAutoFit/>
+          </a:bodyPr>
+          <a:lstStyle/>
+          <a:p>
+            <a:pPr algn="l"/>
+            <a:r>
+              <a:rPr sz="1500" b="0">
+                <a:solidFill>
+                  <a:srgbClr val="5A6B66"/>
+                </a:solidFill>
+                <a:latin typeface="Calibri"/>
+              </a:rPr>
+              <a:t>Resumes, JDs, conversations, audio</a:t>
             </a:r>
           </a:p>
         </p:txBody>
@@ -8682,7 +9220,7 @@
 </file>
 
 <file path=ppt/slides/slide9.xml><?xml version="1.0" encoding="utf-8"?>
-<p:sld xmlns:a="http://schemas.openxmlformats.org/drawingml/2006/main" xmlns:p="http://schemas.openxmlformats.org/presentationml/2006/main" xmlns:r="http://schemas.openxmlformats.org/officeDocument/2006/relationships">
+<p:sld xmlns:a="http://schemas.openxmlformats.org/drawingml/2006/main" xmlns:r="http://schemas.openxmlformats.org/officeDocument/2006/relationships" xmlns:p="http://schemas.openxmlformats.org/presentationml/2006/main">
   <p:cSld>
     <p:spTree>
       <p:nvGrpSpPr>
@@ -8690,7 +9228,14 @@
         <p:cNvGrpSpPr/>
         <p:nvPr/>
       </p:nvGrpSpPr>
-      <p:grpSpPr/>
+      <p:grpSpPr>
+        <a:xfrm>
+          <a:off x="0" y="0"/>
+          <a:ext cx="0" cy="0"/>
+          <a:chOff x="0" y="0"/>
+          <a:chExt cx="0" cy="0"/>
+        </a:xfrm>
+      </p:grpSpPr>
       <p:sp>
         <p:nvSpPr>
           <p:cNvPr id="2" name="Rectangle 1"/>
@@ -8731,6 +9276,7 @@
           <a:lstStyle/>
           <a:p>
             <a:pPr algn="ctr"/>
+            <a:endParaRPr/>
           </a:p>
         </p:txBody>
       </p:sp>
@@ -8799,7 +9345,7 @@
                 </a:solidFill>
                 <a:latin typeface="Calibri"/>
               </a:rPr>
-              <a:t>Scope, Limits &amp; Next Steps</a:t>
+              <a:t>Engineering Highlights</a:t>
             </a:r>
           </a:p>
         </p:txBody>
@@ -8834,150 +9380,21 @@
                 </a:solidFill>
                 <a:latin typeface="Calibri"/>
               </a:rPr>
-              <a:t>Honest about today — clear about tomorrow</a:t>
-            </a:r>
-          </a:p>
-        </p:txBody>
-      </p:sp>
-      <p:sp>
-        <p:nvSpPr>
-          <p:cNvPr id="6" name="Rounded Rectangle 5"/>
-          <p:cNvSpPr/>
-          <p:nvPr/>
-        </p:nvSpPr>
-        <p:spPr>
-          <a:xfrm>
-            <a:off x="640080" y="1920240"/>
-            <a:ext cx="5212080" cy="4114800"/>
-          </a:xfrm>
-          <a:prstGeom prst="roundRect">
-            <a:avLst>
-              <a:gd name="adj" fmla="val 8000"/>
-            </a:avLst>
-          </a:prstGeom>
-          <a:solidFill>
-            <a:srgbClr val="FFFFFF"/>
-          </a:solidFill>
-          <a:ln w="12700">
-            <a:solidFill>
-              <a:srgbClr val="D9E3DF"/>
-            </a:solidFill>
-          </a:ln>
-        </p:spPr>
-        <p:style>
-          <a:lnRef idx="1">
-            <a:schemeClr val="accent1"/>
-          </a:lnRef>
-          <a:fillRef idx="3">
-            <a:schemeClr val="accent1"/>
-          </a:fillRef>
-          <a:effectRef idx="2">
-            <a:schemeClr val="accent1"/>
-          </a:effectRef>
-          <a:fontRef idx="minor">
-            <a:schemeClr val="lt1"/>
-          </a:fontRef>
-        </p:style>
-        <p:txBody>
-          <a:bodyPr rtlCol="0" anchor="ctr"/>
-          <a:lstStyle/>
-          <a:p>
-            <a:pPr algn="ctr"/>
-          </a:p>
-        </p:txBody>
-      </p:sp>
-      <p:sp>
-        <p:nvSpPr>
-          <p:cNvPr id="7" name="Rounded Rectangle 6"/>
-          <p:cNvSpPr/>
-          <p:nvPr/>
-        </p:nvSpPr>
-        <p:spPr>
-          <a:xfrm>
-            <a:off x="6309360" y="1920240"/>
-            <a:ext cx="5212080" cy="4114800"/>
-          </a:xfrm>
-          <a:prstGeom prst="roundRect">
-            <a:avLst>
-              <a:gd name="adj" fmla="val 8000"/>
-            </a:avLst>
-          </a:prstGeom>
-          <a:solidFill>
-            <a:srgbClr val="FFFFFF"/>
-          </a:solidFill>
-          <a:ln w="12700">
-            <a:solidFill>
-              <a:srgbClr val="D9E3DF"/>
-            </a:solidFill>
-          </a:ln>
-        </p:spPr>
-        <p:style>
-          <a:lnRef idx="1">
-            <a:schemeClr val="accent1"/>
-          </a:lnRef>
-          <a:fillRef idx="3">
-            <a:schemeClr val="accent1"/>
-          </a:fillRef>
-          <a:effectRef idx="2">
-            <a:schemeClr val="accent1"/>
-          </a:effectRef>
-          <a:fontRef idx="minor">
-            <a:schemeClr val="lt1"/>
-          </a:fontRef>
-        </p:style>
-        <p:txBody>
-          <a:bodyPr rtlCol="0" anchor="ctr"/>
-          <a:lstStyle/>
-          <a:p>
-            <a:pPr algn="ctr"/>
-          </a:p>
-        </p:txBody>
-      </p:sp>
-      <p:sp>
-        <p:nvSpPr>
-          <p:cNvPr id="8" name="TextBox 7"/>
+              <a:t>What makes this more than a chatbot wrapper</a:t>
+            </a:r>
+          </a:p>
+        </p:txBody>
+      </p:sp>
+      <p:sp>
+        <p:nvSpPr>
+          <p:cNvPr id="6" name="TextBox 5"/>
           <p:cNvSpPr txBox="1"/>
           <p:nvPr/>
         </p:nvSpPr>
         <p:spPr>
           <a:xfrm>
-            <a:off x="914400" y="2148840"/>
-            <a:ext cx="4754880" cy="365760"/>
-          </a:xfrm>
-          <a:prstGeom prst="rect">
-            <a:avLst/>
-          </a:prstGeom>
-          <a:noFill/>
-        </p:spPr>
-        <p:txBody>
-          <a:bodyPr wrap="square">
-            <a:spAutoFit/>
-          </a:bodyPr>
-          <a:lstStyle/>
-          <a:p>
-            <a:pPr algn="l"/>
-            <a:r>
-              <a:rPr sz="1800" b="1">
-                <a:solidFill>
-                  <a:srgbClr val="523873"/>
-                </a:solidFill>
-                <a:latin typeface="Calibri"/>
-              </a:rPr>
-              <a:t>Current scope</a:t>
-            </a:r>
-          </a:p>
-        </p:txBody>
-      </p:sp>
-      <p:sp>
-        <p:nvSpPr>
-          <p:cNvPr id="9" name="TextBox 8"/>
-          <p:cNvSpPr txBox="1"/>
-          <p:nvPr/>
-        </p:nvSpPr>
-        <p:spPr>
-          <a:xfrm>
-            <a:off x="914400" y="2697480"/>
-            <a:ext cx="4754880" cy="3017520"/>
+            <a:off x="822960" y="2011680"/>
+            <a:ext cx="10515600" cy="4114800"/>
           </a:xfrm>
           <a:prstGeom prst="rect">
             <a:avLst/>
@@ -8996,13 +9413,13 @@
               </a:spcAft>
             </a:pPr>
             <a:r>
-              <a:rPr sz="1600" b="0">
+              <a:rPr sz="1800" b="0">
                 <a:solidFill>
                   <a:srgbClr val="1C2B28"/>
                 </a:solidFill>
                 <a:latin typeface="Calibri"/>
               </a:rPr>
-              <a:t>•  Opening/closing questions are fixed</a:t>
+              <a:t>•  Separation of concerns: analysis, interviewing, evaluation, and orchestration are distinct agents</a:t>
             </a:r>
           </a:p>
           <a:p>
@@ -9012,13 +9429,13 @@
               </a:spcAft>
             </a:pPr>
             <a:r>
-              <a:rPr sz="1600" b="0">
+              <a:rPr sz="1800" b="0">
                 <a:solidFill>
                   <a:srgbClr val="1C2B28"/>
                 </a:solidFill>
                 <a:latin typeface="Calibri"/>
               </a:rPr>
-              <a:t>•  Four middle questions are tailored</a:t>
+              <a:t>•  Deterministic interview pipeline in code for a reliable 6-question flow</a:t>
             </a:r>
           </a:p>
           <a:p>
@@ -9028,13 +9445,13 @@
               </a:spcAft>
             </a:pPr>
             <a:r>
-              <a:rPr sz="1600" b="0">
+              <a:rPr sz="1800" b="0">
                 <a:solidFill>
                   <a:srgbClr val="1C2B28"/>
                 </a:solidFill>
                 <a:latin typeface="Calibri"/>
               </a:rPr>
-              <a:t>•  Evaluation after the full interview</a:t>
+              <a:t>•  Session state tracks questions, answers, and audio for history + reporting</a:t>
             </a:r>
           </a:p>
           <a:p>
@@ -9044,73 +9461,15 @@
               </a:spcAft>
             </a:pPr>
             <a:r>
-              <a:rPr sz="1600" b="0">
+              <a:rPr sz="1800" b="0">
                 <a:solidFill>
                   <a:srgbClr val="1C2B28"/>
                 </a:solidFill>
                 <a:latin typeface="Calibri"/>
               </a:rPr>
-              <a:t>•  Local auth + local file storage</a:t>
-            </a:r>
-          </a:p>
-        </p:txBody>
-      </p:sp>
-      <p:sp>
-        <p:nvSpPr>
-          <p:cNvPr id="10" name="TextBox 9"/>
-          <p:cNvSpPr txBox="1"/>
-          <p:nvPr/>
-        </p:nvSpPr>
-        <p:spPr>
-          <a:xfrm>
-            <a:off x="6583680" y="2148840"/>
-            <a:ext cx="4754880" cy="365760"/>
-          </a:xfrm>
-          <a:prstGeom prst="rect">
-            <a:avLst/>
-          </a:prstGeom>
-          <a:noFill/>
-        </p:spPr>
-        <p:txBody>
-          <a:bodyPr wrap="square">
-            <a:spAutoFit/>
-          </a:bodyPr>
-          <a:lstStyle/>
-          <a:p>
-            <a:pPr algn="l"/>
-            <a:r>
-              <a:rPr sz="1800" b="1">
-                <a:solidFill>
-                  <a:srgbClr val="0F6B5C"/>
-                </a:solidFill>
-                <a:latin typeface="Calibri"/>
-              </a:rPr>
-              <a:t>Next steps</a:t>
-            </a:r>
-          </a:p>
-        </p:txBody>
-      </p:sp>
-      <p:sp>
-        <p:nvSpPr>
-          <p:cNvPr id="11" name="TextBox 10"/>
-          <p:cNvSpPr txBox="1"/>
-          <p:nvPr/>
-        </p:nvSpPr>
-        <p:spPr>
-          <a:xfrm>
-            <a:off x="6583680" y="2697480"/>
-            <a:ext cx="4754880" cy="3017520"/>
-          </a:xfrm>
-          <a:prstGeom prst="rect">
-            <a:avLst/>
-          </a:prstGeom>
-          <a:noFill/>
-        </p:spPr>
-        <p:txBody>
-          <a:bodyPr wrap="square">
-            <a:spAutoFit/>
-          </a:bodyPr>
-          <a:lstStyle/>
+              <a:t>•  Per-user persistence: document library and past conversations under user_data/</a:t>
+            </a:r>
+          </a:p>
           <a:p>
             <a:pPr>
               <a:spcAft>
@@ -9118,13 +9477,13 @@
               </a:spcAft>
             </a:pPr>
             <a:r>
-              <a:rPr sz="1600" b="0">
+              <a:rPr sz="1800" b="0">
                 <a:solidFill>
                   <a:srgbClr val="1C2B28"/>
                 </a:solidFill>
                 <a:latin typeface="Calibri"/>
               </a:rPr>
-              <a:t>•  Adaptive follow-up questions</a:t>
+              <a:t>•  Downloadable coaching artifacts: feedback report and study pack with model answers + concepts</a:t>
             </a:r>
           </a:p>
           <a:p>
@@ -9134,45 +9493,13 @@
               </a:spcAft>
             </a:pPr>
             <a:r>
-              <a:rPr sz="1600" b="0">
+              <a:rPr sz="1800" b="0">
                 <a:solidFill>
                   <a:srgbClr val="1C2B28"/>
                 </a:solidFill>
                 <a:latin typeface="Calibri"/>
               </a:rPr>
-              <a:t>•  Richer scoring rubric per answer</a:t>
-            </a:r>
-          </a:p>
-          <a:p>
-            <a:pPr>
-              <a:spcAft>
-                <a:spcPts val="800"/>
-              </a:spcAft>
-            </a:pPr>
-            <a:r>
-              <a:rPr sz="1600" b="0">
-                <a:solidFill>
-                  <a:srgbClr val="1C2B28"/>
-                </a:solidFill>
-                <a:latin typeface="Calibri"/>
-              </a:rPr>
-              <a:t>•  Cloud storage / stronger production auth</a:t>
-            </a:r>
-          </a:p>
-          <a:p>
-            <a:pPr>
-              <a:spcAft>
-                <a:spcPts val="800"/>
-              </a:spcAft>
-            </a:pPr>
-            <a:r>
-              <a:rPr sz="1600" b="0">
-                <a:solidFill>
-                  <a:srgbClr val="1C2B28"/>
-                </a:solidFill>
-                <a:latin typeface="Calibri"/>
-              </a:rPr>
-              <a:t>•  Progress analytics across sessions</a:t>
+              <a:t>•  Modular project layout: agents/, auth/, library/, reports/, ui/</a:t>
             </a:r>
           </a:p>
         </p:txBody>

--- a/AI_Interview_Coach_Presentation.pptx
+++ b/AI_Interview_Coach_Presentation.pptx
@@ -9,13 +9,14 @@
     <p:sldId id="257" r:id="rId3"/>
     <p:sldId id="258" r:id="rId4"/>
     <p:sldId id="266" r:id="rId5"/>
-    <p:sldId id="259" r:id="rId6"/>
-    <p:sldId id="260" r:id="rId7"/>
+    <p:sldId id="260" r:id="rId6"/>
+    <p:sldId id="263" r:id="rId7"/>
     <p:sldId id="261" r:id="rId8"/>
-    <p:sldId id="262" r:id="rId9"/>
-    <p:sldId id="263" r:id="rId10"/>
-    <p:sldId id="264" r:id="rId11"/>
-    <p:sldId id="265" r:id="rId12"/>
+    <p:sldId id="265" r:id="rId9"/>
+    <p:sldId id="267" r:id="rId10"/>
+    <p:sldId id="259" r:id="rId11"/>
+    <p:sldId id="262" r:id="rId12"/>
+    <p:sldId id="264" r:id="rId13"/>
   </p:sldIdLst>
   <p:sldSz cx="12192000" cy="6858000"/>
   <p:notesSz cx="6858000" cy="9144000"/>
@@ -312,7 +313,7 @@
           <a:p>
             <a:fld id="{5BCAD085-E8A6-8845-BD4E-CB4CCA059FC4}" type="datetimeFigureOut">
               <a:rPr lang="en-US" smtClean="0"/>
-              <a:t>10/9/2026</a:t>
+              <a:t>10/10/26</a:t>
             </a:fld>
             <a:endParaRPr lang="en-US"/>
           </a:p>
@@ -480,7 +481,7 @@
           <a:p>
             <a:fld id="{5BCAD085-E8A6-8845-BD4E-CB4CCA059FC4}" type="datetimeFigureOut">
               <a:rPr lang="en-US" smtClean="0"/>
-              <a:t>10/9/2026</a:t>
+              <a:t>10/10/26</a:t>
             </a:fld>
             <a:endParaRPr lang="en-US"/>
           </a:p>
@@ -658,7 +659,7 @@
           <a:p>
             <a:fld id="{5BCAD085-E8A6-8845-BD4E-CB4CCA059FC4}" type="datetimeFigureOut">
               <a:rPr lang="en-US" smtClean="0"/>
-              <a:t>10/9/2026</a:t>
+              <a:t>10/10/26</a:t>
             </a:fld>
             <a:endParaRPr lang="en-US"/>
           </a:p>
@@ -826,7 +827,7 @@
           <a:p>
             <a:fld id="{5BCAD085-E8A6-8845-BD4E-CB4CCA059FC4}" type="datetimeFigureOut">
               <a:rPr lang="en-US" smtClean="0"/>
-              <a:t>10/9/2026</a:t>
+              <a:t>10/10/26</a:t>
             </a:fld>
             <a:endParaRPr lang="en-US"/>
           </a:p>
@@ -1071,7 +1072,7 @@
           <a:p>
             <a:fld id="{5BCAD085-E8A6-8845-BD4E-CB4CCA059FC4}" type="datetimeFigureOut">
               <a:rPr lang="en-US" smtClean="0"/>
-              <a:t>10/9/2026</a:t>
+              <a:t>10/10/26</a:t>
             </a:fld>
             <a:endParaRPr lang="en-US"/>
           </a:p>
@@ -1356,7 +1357,7 @@
           <a:p>
             <a:fld id="{5BCAD085-E8A6-8845-BD4E-CB4CCA059FC4}" type="datetimeFigureOut">
               <a:rPr lang="en-US" smtClean="0"/>
-              <a:t>10/9/2026</a:t>
+              <a:t>10/10/26</a:t>
             </a:fld>
             <a:endParaRPr lang="en-US"/>
           </a:p>
@@ -1775,7 +1776,7 @@
           <a:p>
             <a:fld id="{5BCAD085-E8A6-8845-BD4E-CB4CCA059FC4}" type="datetimeFigureOut">
               <a:rPr lang="en-US" smtClean="0"/>
-              <a:t>10/9/2026</a:t>
+              <a:t>10/10/26</a:t>
             </a:fld>
             <a:endParaRPr lang="en-US"/>
           </a:p>
@@ -1892,7 +1893,7 @@
           <a:p>
             <a:fld id="{5BCAD085-E8A6-8845-BD4E-CB4CCA059FC4}" type="datetimeFigureOut">
               <a:rPr lang="en-US" smtClean="0"/>
-              <a:t>10/9/2026</a:t>
+              <a:t>10/10/26</a:t>
             </a:fld>
             <a:endParaRPr lang="en-US"/>
           </a:p>
@@ -1987,7 +1988,7 @@
           <a:p>
             <a:fld id="{5BCAD085-E8A6-8845-BD4E-CB4CCA059FC4}" type="datetimeFigureOut">
               <a:rPr lang="en-US" smtClean="0"/>
-              <a:t>10/9/2026</a:t>
+              <a:t>10/10/26</a:t>
             </a:fld>
             <a:endParaRPr lang="en-US"/>
           </a:p>
@@ -2262,7 +2263,7 @@
           <a:p>
             <a:fld id="{5BCAD085-E8A6-8845-BD4E-CB4CCA059FC4}" type="datetimeFigureOut">
               <a:rPr lang="en-US" smtClean="0"/>
-              <a:t>10/9/2026</a:t>
+              <a:t>10/10/26</a:t>
             </a:fld>
             <a:endParaRPr lang="en-US"/>
           </a:p>
@@ -2514,7 +2515,7 @@
           <a:p>
             <a:fld id="{5BCAD085-E8A6-8845-BD4E-CB4CCA059FC4}" type="datetimeFigureOut">
               <a:rPr lang="en-US" smtClean="0"/>
-              <a:t>10/9/2026</a:t>
+              <a:t>10/10/26</a:t>
             </a:fld>
             <a:endParaRPr lang="en-US"/>
           </a:p>
@@ -2725,7 +2726,7 @@
           <a:p>
             <a:fld id="{5BCAD085-E8A6-8845-BD4E-CB4CCA059FC4}" type="datetimeFigureOut">
               <a:rPr lang="en-US" smtClean="0"/>
-              <a:t>10/9/2026</a:t>
+              <a:t>10/10/26</a:t>
             </a:fld>
             <a:endParaRPr lang="en-US"/>
           </a:p>
@@ -3347,7 +3348,7 @@
           <a:p>
             <a:pPr algn="l"/>
             <a:r>
-              <a:rPr sz="1400" b="0">
+              <a:rPr sz="1400" b="0" dirty="0">
                 <a:solidFill>
                   <a:srgbClr val="FFFFFF"/>
                 </a:solidFill>
@@ -3565,7 +3566,7 @@
           <a:lstStyle/>
           <a:p>
             <a:pPr algn="ctr"/>
-            <a:endParaRPr/>
+            <a:endParaRPr dirty="0"/>
           </a:p>
         </p:txBody>
       </p:sp>
@@ -3634,7 +3635,7 @@
                 </a:solidFill>
                 <a:latin typeface="Calibri"/>
               </a:rPr>
-              <a:t>Scope, Limits &amp; Next Steps</a:t>
+              <a:t>Multi-Agent Architecture</a:t>
             </a:r>
           </a:p>
         </p:txBody>
@@ -3669,7 +3670,7 @@
                 </a:solidFill>
                 <a:latin typeface="Calibri"/>
               </a:rPr>
-              <a:t>Honest about today — clear about tomorrow</a:t>
+              <a:t>Clear roles. Predictable orchestration.</a:t>
             </a:r>
           </a:p>
         </p:txBody>
@@ -3683,7 +3684,7 @@
         <p:spPr>
           <a:xfrm>
             <a:off x="640080" y="1920240"/>
-            <a:ext cx="5212080" cy="4114800"/>
+            <a:ext cx="5394960" cy="1874519"/>
           </a:xfrm>
           <a:prstGeom prst="roundRect">
             <a:avLst>
@@ -3724,14 +3725,151 @@
       </p:sp>
       <p:sp>
         <p:nvSpPr>
-          <p:cNvPr id="7" name="Rounded Rectangle 6"/>
+          <p:cNvPr id="7" name="Rectangle 6"/>
           <p:cNvSpPr/>
           <p:nvPr/>
         </p:nvSpPr>
         <p:spPr>
           <a:xfrm>
+            <a:off x="640080" y="1920240"/>
+            <a:ext cx="109728" cy="1874519"/>
+          </a:xfrm>
+          <a:prstGeom prst="rect">
+            <a:avLst/>
+          </a:prstGeom>
+          <a:solidFill>
+            <a:srgbClr val="0F6B5C"/>
+          </a:solidFill>
+          <a:ln>
+            <a:noFill/>
+          </a:ln>
+        </p:spPr>
+        <p:style>
+          <a:lnRef idx="1">
+            <a:schemeClr val="accent1"/>
+          </a:lnRef>
+          <a:fillRef idx="3">
+            <a:schemeClr val="accent1"/>
+          </a:fillRef>
+          <a:effectRef idx="2">
+            <a:schemeClr val="accent1"/>
+          </a:effectRef>
+          <a:fontRef idx="minor">
+            <a:schemeClr val="lt1"/>
+          </a:fontRef>
+        </p:style>
+        <p:txBody>
+          <a:bodyPr rtlCol="0" anchor="ctr"/>
+          <a:lstStyle/>
+          <a:p>
+            <a:pPr algn="ctr"/>
+            <a:endParaRPr/>
+          </a:p>
+        </p:txBody>
+      </p:sp>
+      <p:sp>
+        <p:nvSpPr>
+          <p:cNvPr id="8" name="TextBox 7"/>
+          <p:cNvSpPr txBox="1"/>
+          <p:nvPr/>
+        </p:nvSpPr>
+        <p:spPr>
+          <a:xfrm>
+            <a:off x="1005840" y="2240280"/>
+            <a:ext cx="4754880" cy="365760"/>
+          </a:xfrm>
+          <a:prstGeom prst="rect">
+            <a:avLst/>
+          </a:prstGeom>
+          <a:noFill/>
+        </p:spPr>
+        <p:txBody>
+          <a:bodyPr wrap="square">
+            <a:spAutoFit/>
+          </a:bodyPr>
+          <a:lstStyle/>
+          <a:p>
+            <a:pPr algn="l"/>
+            <a:r>
+              <a:rPr lang="en-US" sz="1800" b="1" dirty="0">
+                <a:solidFill>
+                  <a:srgbClr val="523873"/>
+                </a:solidFill>
+                <a:latin typeface="Calibri"/>
+              </a:rPr>
+              <a:t>Interview Manager</a:t>
+            </a:r>
+            <a:endParaRPr sz="1800" b="1" dirty="0">
+              <a:solidFill>
+                <a:srgbClr val="523873"/>
+              </a:solidFill>
+              <a:latin typeface="Calibri"/>
+            </a:endParaRPr>
+          </a:p>
+        </p:txBody>
+      </p:sp>
+      <p:sp>
+        <p:nvSpPr>
+          <p:cNvPr id="9" name="TextBox 8"/>
+          <p:cNvSpPr txBox="1"/>
+          <p:nvPr/>
+        </p:nvSpPr>
+        <p:spPr>
+          <a:xfrm>
+            <a:off x="1005840" y="2743200"/>
+            <a:ext cx="4754880" cy="784830"/>
+          </a:xfrm>
+          <a:prstGeom prst="rect">
+            <a:avLst/>
+          </a:prstGeom>
+          <a:noFill/>
+        </p:spPr>
+        <p:txBody>
+          <a:bodyPr wrap="square">
+            <a:spAutoFit/>
+          </a:bodyPr>
+          <a:lstStyle/>
+          <a:p>
+            <a:r>
+              <a:rPr lang="en-IN" sz="1500" dirty="0">
+                <a:solidFill>
+                  <a:srgbClr val="5A6B66"/>
+                </a:solidFill>
+              </a:rPr>
+              <a:t>Owns session state &amp; turn order</a:t>
+            </a:r>
+          </a:p>
+          <a:p>
+            <a:r>
+              <a:rPr lang="en-IN" sz="1500" dirty="0">
+                <a:solidFill>
+                  <a:srgbClr val="5A6B66"/>
+                </a:solidFill>
+              </a:rPr>
+              <a:t>Coordinates the workflow</a:t>
+            </a:r>
+          </a:p>
+          <a:p>
+            <a:pPr algn="l"/>
+            <a:endParaRPr sz="1500" b="0" dirty="0">
+              <a:solidFill>
+                <a:srgbClr val="5A6B66"/>
+              </a:solidFill>
+              <a:latin typeface="Calibri"/>
+            </a:endParaRPr>
+          </a:p>
+        </p:txBody>
+      </p:sp>
+      <p:sp>
+        <p:nvSpPr>
+          <p:cNvPr id="10" name="Rounded Rectangle 9"/>
+          <p:cNvSpPr/>
+          <p:nvPr/>
+        </p:nvSpPr>
+        <p:spPr>
+          <a:xfrm>
             <a:off x="6309360" y="1920240"/>
-            <a:ext cx="5212080" cy="4114800"/>
+            <a:ext cx="5394960" cy="1874519"/>
           </a:xfrm>
           <a:prstGeom prst="roundRect">
             <a:avLst>
@@ -3772,13 +3910,57 @@
       </p:sp>
       <p:sp>
         <p:nvSpPr>
-          <p:cNvPr id="8" name="TextBox 7"/>
+          <p:cNvPr id="11" name="Rectangle 10"/>
+          <p:cNvSpPr/>
+          <p:nvPr/>
+        </p:nvSpPr>
+        <p:spPr>
+          <a:xfrm>
+            <a:off x="6309360" y="1920240"/>
+            <a:ext cx="109728" cy="1874519"/>
+          </a:xfrm>
+          <a:prstGeom prst="rect">
+            <a:avLst/>
+          </a:prstGeom>
+          <a:solidFill>
+            <a:srgbClr val="523873"/>
+          </a:solidFill>
+          <a:ln>
+            <a:noFill/>
+          </a:ln>
+        </p:spPr>
+        <p:style>
+          <a:lnRef idx="1">
+            <a:schemeClr val="accent1"/>
+          </a:lnRef>
+          <a:fillRef idx="3">
+            <a:schemeClr val="accent1"/>
+          </a:fillRef>
+          <a:effectRef idx="2">
+            <a:schemeClr val="accent1"/>
+          </a:effectRef>
+          <a:fontRef idx="minor">
+            <a:schemeClr val="lt1"/>
+          </a:fontRef>
+        </p:style>
+        <p:txBody>
+          <a:bodyPr rtlCol="0" anchor="ctr"/>
+          <a:lstStyle/>
+          <a:p>
+            <a:pPr algn="ctr"/>
+            <a:endParaRPr/>
+          </a:p>
+        </p:txBody>
+      </p:sp>
+      <p:sp>
+        <p:nvSpPr>
+          <p:cNvPr id="12" name="TextBox 11"/>
           <p:cNvSpPr txBox="1"/>
           <p:nvPr/>
         </p:nvSpPr>
         <p:spPr>
           <a:xfrm>
-            <a:off x="914400" y="2148840"/>
+            <a:off x="6528365" y="2240280"/>
             <a:ext cx="4754880" cy="365760"/>
           </a:xfrm>
           <a:prstGeom prst="rect">
@@ -3794,27 +3976,33 @@
           <a:p>
             <a:pPr algn="l"/>
             <a:r>
-              <a:rPr sz="1800" b="1">
+              <a:rPr lang="en-US" sz="1800" b="1" dirty="0">
                 <a:solidFill>
                   <a:srgbClr val="523873"/>
                 </a:solidFill>
                 <a:latin typeface="Calibri"/>
               </a:rPr>
-              <a:t>Current scope</a:t>
-            </a:r>
-          </a:p>
-        </p:txBody>
-      </p:sp>
-      <p:sp>
-        <p:nvSpPr>
-          <p:cNvPr id="9" name="TextBox 8"/>
+              <a:t>Job Analysis Agent</a:t>
+            </a:r>
+            <a:endParaRPr sz="1800" b="1" dirty="0">
+              <a:solidFill>
+                <a:srgbClr val="523873"/>
+              </a:solidFill>
+              <a:latin typeface="Calibri"/>
+            </a:endParaRPr>
+          </a:p>
+        </p:txBody>
+      </p:sp>
+      <p:sp>
+        <p:nvSpPr>
+          <p:cNvPr id="13" name="TextBox 12"/>
           <p:cNvSpPr txBox="1"/>
           <p:nvPr/>
         </p:nvSpPr>
         <p:spPr>
           <a:xfrm>
-            <a:off x="914400" y="2697480"/>
-            <a:ext cx="4754880" cy="3017520"/>
+            <a:off x="6675120" y="2743200"/>
+            <a:ext cx="4754880" cy="553998"/>
           </a:xfrm>
           <a:prstGeom prst="rect">
             <a:avLst/>
@@ -3827,81 +4015,139 @@
           </a:bodyPr>
           <a:lstStyle/>
           <a:p>
-            <a:pPr>
-              <a:spcAft>
-                <a:spcPts val="800"/>
-              </a:spcAft>
-            </a:pPr>
-            <a:r>
-              <a:rPr sz="1600" b="0">
-                <a:solidFill>
-                  <a:srgbClr val="1C2B28"/>
-                </a:solidFill>
-                <a:latin typeface="Calibri"/>
-              </a:rPr>
-              <a:t>•  Opening/closing questions are fixed</a:t>
-            </a:r>
-          </a:p>
-          <a:p>
-            <a:pPr>
-              <a:spcAft>
-                <a:spcPts val="800"/>
-              </a:spcAft>
-            </a:pPr>
-            <a:r>
-              <a:rPr sz="1600" b="0">
-                <a:solidFill>
-                  <a:srgbClr val="1C2B28"/>
-                </a:solidFill>
-                <a:latin typeface="Calibri"/>
-              </a:rPr>
-              <a:t>•  Four middle questions are tailored</a:t>
-            </a:r>
-          </a:p>
-          <a:p>
-            <a:pPr>
-              <a:spcAft>
-                <a:spcPts val="800"/>
-              </a:spcAft>
-            </a:pPr>
-            <a:r>
-              <a:rPr sz="1600" b="0">
-                <a:solidFill>
-                  <a:srgbClr val="1C2B28"/>
-                </a:solidFill>
-                <a:latin typeface="Calibri"/>
-              </a:rPr>
-              <a:t>•  Evaluation after the full interview</a:t>
-            </a:r>
-          </a:p>
-          <a:p>
-            <a:pPr>
-              <a:spcAft>
-                <a:spcPts val="800"/>
-              </a:spcAft>
-            </a:pPr>
-            <a:r>
-              <a:rPr sz="1600" b="0">
-                <a:solidFill>
-                  <a:srgbClr val="1C2B28"/>
-                </a:solidFill>
-                <a:latin typeface="Calibri"/>
-              </a:rPr>
-              <a:t>•  Local auth + local file storage</a:t>
-            </a:r>
-          </a:p>
-        </p:txBody>
-      </p:sp>
-      <p:sp>
-        <p:nvSpPr>
-          <p:cNvPr id="10" name="TextBox 9"/>
+            <a:pPr algn="l"/>
+            <a:r>
+              <a:rPr lang="en-US" sz="1500" b="0" dirty="0">
+                <a:solidFill>
+                  <a:srgbClr val="5A6B66"/>
+                </a:solidFill>
+                <a:latin typeface="Calibri"/>
+              </a:rPr>
+              <a:t>Extracts skills, matches, gaps</a:t>
+            </a:r>
+          </a:p>
+          <a:p>
+            <a:pPr algn="l"/>
+            <a:r>
+              <a:rPr lang="en-US" sz="1500" dirty="0">
+                <a:solidFill>
+                  <a:srgbClr val="5A6B66"/>
+                </a:solidFill>
+                <a:latin typeface="Calibri"/>
+              </a:rPr>
+              <a:t>Generates tailored questions</a:t>
+            </a:r>
+            <a:endParaRPr sz="1500" b="0" dirty="0">
+              <a:solidFill>
+                <a:srgbClr val="5A6B66"/>
+              </a:solidFill>
+              <a:latin typeface="Calibri"/>
+            </a:endParaRPr>
+          </a:p>
+        </p:txBody>
+      </p:sp>
+      <p:sp>
+        <p:nvSpPr>
+          <p:cNvPr id="14" name="Rounded Rectangle 13"/>
+          <p:cNvSpPr/>
+          <p:nvPr/>
+        </p:nvSpPr>
+        <p:spPr>
+          <a:xfrm>
+            <a:off x="640080" y="4023360"/>
+            <a:ext cx="5394960" cy="1874519"/>
+          </a:xfrm>
+          <a:prstGeom prst="roundRect">
+            <a:avLst>
+              <a:gd name="adj" fmla="val 8000"/>
+            </a:avLst>
+          </a:prstGeom>
+          <a:solidFill>
+            <a:srgbClr val="FFFFFF"/>
+          </a:solidFill>
+          <a:ln w="12700">
+            <a:solidFill>
+              <a:srgbClr val="D9E3DF"/>
+            </a:solidFill>
+          </a:ln>
+        </p:spPr>
+        <p:style>
+          <a:lnRef idx="1">
+            <a:schemeClr val="accent1"/>
+          </a:lnRef>
+          <a:fillRef idx="3">
+            <a:schemeClr val="accent1"/>
+          </a:fillRef>
+          <a:effectRef idx="2">
+            <a:schemeClr val="accent1"/>
+          </a:effectRef>
+          <a:fontRef idx="minor">
+            <a:schemeClr val="lt1"/>
+          </a:fontRef>
+        </p:style>
+        <p:txBody>
+          <a:bodyPr rtlCol="0" anchor="ctr"/>
+          <a:lstStyle/>
+          <a:p>
+            <a:pPr algn="ctr"/>
+            <a:endParaRPr dirty="0"/>
+          </a:p>
+        </p:txBody>
+      </p:sp>
+      <p:sp>
+        <p:nvSpPr>
+          <p:cNvPr id="15" name="Rectangle 14"/>
+          <p:cNvSpPr/>
+          <p:nvPr/>
+        </p:nvSpPr>
+        <p:spPr>
+          <a:xfrm>
+            <a:off x="640080" y="4023360"/>
+            <a:ext cx="109728" cy="1874519"/>
+          </a:xfrm>
+          <a:prstGeom prst="rect">
+            <a:avLst/>
+          </a:prstGeom>
+          <a:solidFill>
+            <a:srgbClr val="0F6B5C"/>
+          </a:solidFill>
+          <a:ln>
+            <a:noFill/>
+          </a:ln>
+        </p:spPr>
+        <p:style>
+          <a:lnRef idx="1">
+            <a:schemeClr val="accent1"/>
+          </a:lnRef>
+          <a:fillRef idx="3">
+            <a:schemeClr val="accent1"/>
+          </a:fillRef>
+          <a:effectRef idx="2">
+            <a:schemeClr val="accent1"/>
+          </a:effectRef>
+          <a:fontRef idx="minor">
+            <a:schemeClr val="lt1"/>
+          </a:fontRef>
+        </p:style>
+        <p:txBody>
+          <a:bodyPr rtlCol="0" anchor="ctr"/>
+          <a:lstStyle/>
+          <a:p>
+            <a:pPr algn="ctr"/>
+            <a:endParaRPr dirty="0"/>
+          </a:p>
+        </p:txBody>
+      </p:sp>
+      <p:sp>
+        <p:nvSpPr>
+          <p:cNvPr id="16" name="TextBox 15"/>
           <p:cNvSpPr txBox="1"/>
           <p:nvPr/>
         </p:nvSpPr>
         <p:spPr>
           <a:xfrm>
-            <a:off x="6583680" y="2148840"/>
-            <a:ext cx="4754880" cy="365760"/>
+            <a:off x="1005840" y="4343400"/>
+            <a:ext cx="4754880" cy="369332"/>
           </a:xfrm>
           <a:prstGeom prst="rect">
             <a:avLst/>
@@ -3914,29 +4160,27 @@
           </a:bodyPr>
           <a:lstStyle/>
           <a:p>
-            <a:pPr algn="l"/>
-            <a:r>
-              <a:rPr sz="1800" b="1">
-                <a:solidFill>
-                  <a:srgbClr val="0F6B5C"/>
-                </a:solidFill>
-                <a:latin typeface="Calibri"/>
-              </a:rPr>
-              <a:t>Next steps</a:t>
-            </a:r>
-          </a:p>
-        </p:txBody>
-      </p:sp>
-      <p:sp>
-        <p:nvSpPr>
-          <p:cNvPr id="11" name="TextBox 10"/>
+            <a:r>
+              <a:rPr lang="en-IN" b="1" dirty="0">
+                <a:solidFill>
+                  <a:srgbClr val="523873"/>
+                </a:solidFill>
+              </a:rPr>
+              <a:t>Interview Agent</a:t>
+            </a:r>
+          </a:p>
+        </p:txBody>
+      </p:sp>
+      <p:sp>
+        <p:nvSpPr>
+          <p:cNvPr id="17" name="TextBox 16"/>
           <p:cNvSpPr txBox="1"/>
           <p:nvPr/>
         </p:nvSpPr>
         <p:spPr>
           <a:xfrm>
-            <a:off x="6583680" y="2697480"/>
-            <a:ext cx="4754880" cy="3017520"/>
+            <a:off x="1005840" y="4846320"/>
+            <a:ext cx="4754880" cy="553998"/>
           </a:xfrm>
           <a:prstGeom prst="rect">
             <a:avLst/>
@@ -3949,67 +4193,197 @@
           </a:bodyPr>
           <a:lstStyle/>
           <a:p>
-            <a:pPr>
-              <a:spcAft>
-                <a:spcPts val="800"/>
-              </a:spcAft>
-            </a:pPr>
-            <a:r>
-              <a:rPr sz="1600" b="0">
-                <a:solidFill>
-                  <a:srgbClr val="1C2B28"/>
-                </a:solidFill>
-                <a:latin typeface="Calibri"/>
-              </a:rPr>
-              <a:t>•  Adaptive follow-up questions</a:t>
-            </a:r>
-          </a:p>
-          <a:p>
-            <a:pPr>
-              <a:spcAft>
-                <a:spcPts val="800"/>
-              </a:spcAft>
-            </a:pPr>
-            <a:r>
-              <a:rPr sz="1600" b="0">
-                <a:solidFill>
-                  <a:srgbClr val="1C2B28"/>
-                </a:solidFill>
-                <a:latin typeface="Calibri"/>
-              </a:rPr>
-              <a:t>•  Richer scoring rubric per answer</a:t>
-            </a:r>
-          </a:p>
-          <a:p>
-            <a:pPr>
-              <a:spcAft>
-                <a:spcPts val="800"/>
-              </a:spcAft>
-            </a:pPr>
-            <a:r>
-              <a:rPr sz="1600" b="0">
-                <a:solidFill>
-                  <a:srgbClr val="1C2B28"/>
-                </a:solidFill>
-                <a:latin typeface="Calibri"/>
-              </a:rPr>
-              <a:t>•  Cloud storage / stronger production auth</a:t>
-            </a:r>
-          </a:p>
-          <a:p>
-            <a:pPr>
-              <a:spcAft>
-                <a:spcPts val="800"/>
-              </a:spcAft>
-            </a:pPr>
-            <a:r>
-              <a:rPr sz="1600" b="0">
-                <a:solidFill>
-                  <a:srgbClr val="1C2B28"/>
-                </a:solidFill>
-                <a:latin typeface="Calibri"/>
-              </a:rPr>
-              <a:t>•  Progress analytics across sessions</a:t>
+            <a:r>
+              <a:rPr lang="en-IN" sz="1500" dirty="0">
+                <a:solidFill>
+                  <a:srgbClr val="5A6B66"/>
+                </a:solidFill>
+              </a:rPr>
+              <a:t>Runs question sequence</a:t>
+            </a:r>
+          </a:p>
+          <a:p>
+            <a:r>
+              <a:rPr lang="en-IN" sz="1500" dirty="0">
+                <a:solidFill>
+                  <a:srgbClr val="5A6B66"/>
+                </a:solidFill>
+              </a:rPr>
+              <a:t>Opening → tailored → close</a:t>
+            </a:r>
+          </a:p>
+        </p:txBody>
+      </p:sp>
+      <p:sp>
+        <p:nvSpPr>
+          <p:cNvPr id="18" name="Rounded Rectangle 17"/>
+          <p:cNvSpPr/>
+          <p:nvPr/>
+        </p:nvSpPr>
+        <p:spPr>
+          <a:xfrm>
+            <a:off x="6309360" y="4023360"/>
+            <a:ext cx="5394960" cy="1874519"/>
+          </a:xfrm>
+          <a:prstGeom prst="roundRect">
+            <a:avLst>
+              <a:gd name="adj" fmla="val 8000"/>
+            </a:avLst>
+          </a:prstGeom>
+          <a:solidFill>
+            <a:srgbClr val="FFFFFF"/>
+          </a:solidFill>
+          <a:ln w="12700">
+            <a:solidFill>
+              <a:srgbClr val="D9E3DF"/>
+            </a:solidFill>
+          </a:ln>
+        </p:spPr>
+        <p:style>
+          <a:lnRef idx="1">
+            <a:schemeClr val="accent1"/>
+          </a:lnRef>
+          <a:fillRef idx="3">
+            <a:schemeClr val="accent1"/>
+          </a:fillRef>
+          <a:effectRef idx="2">
+            <a:schemeClr val="accent1"/>
+          </a:effectRef>
+          <a:fontRef idx="minor">
+            <a:schemeClr val="lt1"/>
+          </a:fontRef>
+        </p:style>
+        <p:txBody>
+          <a:bodyPr rtlCol="0" anchor="ctr"/>
+          <a:lstStyle/>
+          <a:p>
+            <a:pPr algn="ctr"/>
+            <a:endParaRPr/>
+          </a:p>
+        </p:txBody>
+      </p:sp>
+      <p:sp>
+        <p:nvSpPr>
+          <p:cNvPr id="19" name="Rectangle 18"/>
+          <p:cNvSpPr/>
+          <p:nvPr/>
+        </p:nvSpPr>
+        <p:spPr>
+          <a:xfrm>
+            <a:off x="6309360" y="4023360"/>
+            <a:ext cx="109728" cy="1874519"/>
+          </a:xfrm>
+          <a:prstGeom prst="rect">
+            <a:avLst/>
+          </a:prstGeom>
+          <a:solidFill>
+            <a:srgbClr val="523873"/>
+          </a:solidFill>
+          <a:ln>
+            <a:noFill/>
+          </a:ln>
+        </p:spPr>
+        <p:style>
+          <a:lnRef idx="1">
+            <a:schemeClr val="accent1"/>
+          </a:lnRef>
+          <a:fillRef idx="3">
+            <a:schemeClr val="accent1"/>
+          </a:fillRef>
+          <a:effectRef idx="2">
+            <a:schemeClr val="accent1"/>
+          </a:effectRef>
+          <a:fontRef idx="minor">
+            <a:schemeClr val="lt1"/>
+          </a:fontRef>
+        </p:style>
+        <p:txBody>
+          <a:bodyPr rtlCol="0" anchor="ctr"/>
+          <a:lstStyle/>
+          <a:p>
+            <a:pPr algn="ctr"/>
+            <a:endParaRPr/>
+          </a:p>
+        </p:txBody>
+      </p:sp>
+      <p:sp>
+        <p:nvSpPr>
+          <p:cNvPr id="20" name="TextBox 19"/>
+          <p:cNvSpPr txBox="1"/>
+          <p:nvPr/>
+        </p:nvSpPr>
+        <p:spPr>
+          <a:xfrm>
+            <a:off x="6675120" y="4343400"/>
+            <a:ext cx="4754880" cy="365760"/>
+          </a:xfrm>
+          <a:prstGeom prst="rect">
+            <a:avLst/>
+          </a:prstGeom>
+          <a:noFill/>
+        </p:spPr>
+        <p:txBody>
+          <a:bodyPr wrap="square">
+            <a:spAutoFit/>
+          </a:bodyPr>
+          <a:lstStyle/>
+          <a:p>
+            <a:pPr algn="l"/>
+            <a:r>
+              <a:rPr sz="1800" b="1">
+                <a:solidFill>
+                  <a:srgbClr val="523873"/>
+                </a:solidFill>
+                <a:latin typeface="Calibri"/>
+              </a:rPr>
+              <a:t>Evaluation Agent</a:t>
+            </a:r>
+          </a:p>
+        </p:txBody>
+      </p:sp>
+      <p:sp>
+        <p:nvSpPr>
+          <p:cNvPr id="21" name="TextBox 20"/>
+          <p:cNvSpPr txBox="1"/>
+          <p:nvPr/>
+        </p:nvSpPr>
+        <p:spPr>
+          <a:xfrm>
+            <a:off x="6675120" y="4846320"/>
+            <a:ext cx="4754880" cy="822960"/>
+          </a:xfrm>
+          <a:prstGeom prst="rect">
+            <a:avLst/>
+          </a:prstGeom>
+          <a:noFill/>
+        </p:spPr>
+        <p:txBody>
+          <a:bodyPr wrap="square">
+            <a:spAutoFit/>
+          </a:bodyPr>
+          <a:lstStyle/>
+          <a:p>
+            <a:pPr algn="l"/>
+            <a:r>
+              <a:rPr sz="1500" b="0">
+                <a:solidFill>
+                  <a:srgbClr val="5A6B66"/>
+                </a:solidFill>
+                <a:latin typeface="Calibri"/>
+              </a:rPr>
+              <a:t>Reviews all Q&amp;A together</a:t>
+            </a:r>
+          </a:p>
+          <a:p>
+            <a:pPr algn="l"/>
+            <a:r>
+              <a:rPr sz="1500" b="0">
+                <a:solidFill>
+                  <a:srgbClr val="5A6B66"/>
+                </a:solidFill>
+                <a:latin typeface="Calibri"/>
+              </a:rPr>
+              <a:t>Produces final coaching feedback</a:t>
             </a:r>
           </a:p>
         </p:txBody>
@@ -4054,7 +4428,7 @@
             <a:avLst/>
           </a:prstGeom>
           <a:solidFill>
-            <a:srgbClr val="523873"/>
+            <a:srgbClr val="F3F6F4"/>
           </a:solidFill>
           <a:ln>
             <a:noFill/>
@@ -4085,23 +4459,132 @@
       </p:sp>
       <p:sp>
         <p:nvSpPr>
-          <p:cNvPr id="3" name="Rectangle 2"/>
+          <p:cNvPr id="3" name="TextBox 2"/>
+          <p:cNvSpPr txBox="1"/>
+          <p:nvPr/>
+        </p:nvSpPr>
+        <p:spPr>
+          <a:xfrm>
+            <a:off x="640080" y="320040"/>
+            <a:ext cx="10972800" cy="320040"/>
+          </a:xfrm>
+          <a:prstGeom prst="rect">
+            <a:avLst/>
+          </a:prstGeom>
+          <a:noFill/>
+        </p:spPr>
+        <p:txBody>
+          <a:bodyPr wrap="square">
+            <a:spAutoFit/>
+          </a:bodyPr>
+          <a:lstStyle/>
+          <a:p>
+            <a:pPr algn="l"/>
+            <a:r>
+              <a:rPr sz="1200" b="1">
+                <a:solidFill>
+                  <a:srgbClr val="0F6B5C"/>
+                </a:solidFill>
+                <a:latin typeface="Calibri"/>
+              </a:rPr>
+              <a:t>AI INTERVIEW COACH</a:t>
+            </a:r>
+          </a:p>
+        </p:txBody>
+      </p:sp>
+      <p:sp>
+        <p:nvSpPr>
+          <p:cNvPr id="4" name="TextBox 3"/>
+          <p:cNvSpPr txBox="1"/>
+          <p:nvPr/>
+        </p:nvSpPr>
+        <p:spPr>
+          <a:xfrm>
+            <a:off x="640080" y="594360"/>
+            <a:ext cx="10972800" cy="640080"/>
+          </a:xfrm>
+          <a:prstGeom prst="rect">
+            <a:avLst/>
+          </a:prstGeom>
+          <a:noFill/>
+        </p:spPr>
+        <p:txBody>
+          <a:bodyPr wrap="square">
+            <a:spAutoFit/>
+          </a:bodyPr>
+          <a:lstStyle/>
+          <a:p>
+            <a:pPr algn="l"/>
+            <a:r>
+              <a:rPr sz="3200" b="1">
+                <a:solidFill>
+                  <a:srgbClr val="523873"/>
+                </a:solidFill>
+                <a:latin typeface="Calibri"/>
+              </a:rPr>
+              <a:t>Tech Stack</a:t>
+            </a:r>
+          </a:p>
+        </p:txBody>
+      </p:sp>
+      <p:sp>
+        <p:nvSpPr>
+          <p:cNvPr id="5" name="TextBox 4"/>
+          <p:cNvSpPr txBox="1"/>
+          <p:nvPr/>
+        </p:nvSpPr>
+        <p:spPr>
+          <a:xfrm>
+            <a:off x="640080" y="1234440"/>
+            <a:ext cx="10972800" cy="457200"/>
+          </a:xfrm>
+          <a:prstGeom prst="rect">
+            <a:avLst/>
+          </a:prstGeom>
+          <a:noFill/>
+        </p:spPr>
+        <p:txBody>
+          <a:bodyPr wrap="square">
+            <a:spAutoFit/>
+          </a:bodyPr>
+          <a:lstStyle/>
+          <a:p>
+            <a:pPr algn="l"/>
+            <a:r>
+              <a:rPr sz="1600" b="0">
+                <a:solidFill>
+                  <a:srgbClr val="5A6B66"/>
+                </a:solidFill>
+                <a:latin typeface="Calibri"/>
+              </a:rPr>
+              <a:t>Practical tools for an agentic product demo</a:t>
+            </a:r>
+          </a:p>
+        </p:txBody>
+      </p:sp>
+      <p:sp>
+        <p:nvSpPr>
+          <p:cNvPr id="6" name="Rounded Rectangle 5"/>
           <p:cNvSpPr/>
           <p:nvPr/>
         </p:nvSpPr>
         <p:spPr>
           <a:xfrm>
-            <a:off x="0" y="6126480"/>
-            <a:ext cx="12191695" cy="731520"/>
-          </a:xfrm>
-          <a:prstGeom prst="rect">
-            <a:avLst/>
+            <a:off x="640080" y="2011680"/>
+            <a:ext cx="3566160" cy="1874519"/>
+          </a:xfrm>
+          <a:prstGeom prst="roundRect">
+            <a:avLst>
+              <a:gd name="adj" fmla="val 8000"/>
+            </a:avLst>
           </a:prstGeom>
           <a:solidFill>
-            <a:srgbClr val="0F6B5C"/>
+            <a:srgbClr val="FFFFFF"/>
           </a:solidFill>
-          <a:ln>
-            <a:noFill/>
+          <a:ln w="12700">
+            <a:solidFill>
+              <a:srgbClr val="D9E3DF"/>
+            </a:solidFill>
           </a:ln>
         </p:spPr>
         <p:style>
@@ -4129,14 +4612,14 @@
       </p:sp>
       <p:sp>
         <p:nvSpPr>
-          <p:cNvPr id="4" name="TextBox 3"/>
+          <p:cNvPr id="7" name="TextBox 6"/>
           <p:cNvSpPr txBox="1"/>
           <p:nvPr/>
         </p:nvSpPr>
         <p:spPr>
           <a:xfrm>
-            <a:off x="822960" y="1920240"/>
-            <a:ext cx="10515600" cy="365760"/>
+            <a:off x="914400" y="2468880"/>
+            <a:ext cx="3017520" cy="411480"/>
           </a:xfrm>
           <a:prstGeom prst="rect">
             <a:avLst/>
@@ -4151,27 +4634,27 @@
           <a:p>
             <a:pPr algn="l"/>
             <a:r>
-              <a:rPr sz="1400" b="1">
-                <a:solidFill>
-                  <a:srgbClr val="D9C9ED"/>
-                </a:solidFill>
-                <a:latin typeface="Calibri"/>
-              </a:rPr>
-              <a:t>CLOSING</a:t>
-            </a:r>
-          </a:p>
-        </p:txBody>
-      </p:sp>
-      <p:sp>
-        <p:nvSpPr>
-          <p:cNvPr id="5" name="TextBox 4"/>
+              <a:rPr sz="1700" b="1">
+                <a:solidFill>
+                  <a:srgbClr val="523873"/>
+                </a:solidFill>
+                <a:latin typeface="Calibri"/>
+              </a:rPr>
+              <a:t>Python</a:t>
+            </a:r>
+          </a:p>
+        </p:txBody>
+      </p:sp>
+      <p:sp>
+        <p:nvSpPr>
+          <p:cNvPr id="8" name="TextBox 7"/>
           <p:cNvSpPr txBox="1"/>
           <p:nvPr/>
         </p:nvSpPr>
         <p:spPr>
           <a:xfrm>
-            <a:off x="822960" y="2377440"/>
-            <a:ext cx="10515600" cy="1645920"/>
+            <a:off x="914400" y="3017520"/>
+            <a:ext cx="3017520" cy="640080"/>
           </a:xfrm>
           <a:prstGeom prst="rect">
             <a:avLst/>
@@ -4186,51 +4669,75 @@
           <a:p>
             <a:pPr algn="l"/>
             <a:r>
-              <a:rPr sz="2800" b="1">
-                <a:solidFill>
-                  <a:srgbClr val="FFFFFF"/>
-                </a:solidFill>
-                <a:latin typeface="Calibri"/>
-              </a:rPr>
-              <a:t>Agentic patterns become a real product:</a:t>
-            </a:r>
-          </a:p>
-          <a:p>
-            <a:pPr algn="l"/>
-            <a:r>
-              <a:rPr sz="2800" b="1">
-                <a:solidFill>
-                  <a:srgbClr val="FFFFFF"/>
-                </a:solidFill>
-                <a:latin typeface="Calibri"/>
-              </a:rPr>
-              <a:t>personalized practice, measurable feedback,</a:t>
-            </a:r>
-          </a:p>
-          <a:p>
-            <a:pPr algn="l"/>
-            <a:r>
-              <a:rPr sz="2800" b="1">
-                <a:solidFill>
-                  <a:srgbClr val="FFFFFF"/>
-                </a:solidFill>
-                <a:latin typeface="Calibri"/>
-              </a:rPr>
-              <a:t>and prep materials candidates can take away.</a:t>
-            </a:r>
-          </a:p>
-        </p:txBody>
-      </p:sp>
-      <p:sp>
-        <p:nvSpPr>
-          <p:cNvPr id="6" name="TextBox 5"/>
+              <a:rPr sz="1500" b="0">
+                <a:solidFill>
+                  <a:srgbClr val="5A6B66"/>
+                </a:solidFill>
+                <a:latin typeface="Calibri"/>
+              </a:rPr>
+              <a:t>Application logic &amp; orchestration</a:t>
+            </a:r>
+          </a:p>
+        </p:txBody>
+      </p:sp>
+      <p:sp>
+        <p:nvSpPr>
+          <p:cNvPr id="9" name="Rounded Rectangle 8"/>
+          <p:cNvSpPr/>
+          <p:nvPr/>
+        </p:nvSpPr>
+        <p:spPr>
+          <a:xfrm>
+            <a:off x="4389120" y="2011680"/>
+            <a:ext cx="3566160" cy="1874519"/>
+          </a:xfrm>
+          <a:prstGeom prst="roundRect">
+            <a:avLst>
+              <a:gd name="adj" fmla="val 8000"/>
+            </a:avLst>
+          </a:prstGeom>
+          <a:solidFill>
+            <a:srgbClr val="FFFFFF"/>
+          </a:solidFill>
+          <a:ln w="12700">
+            <a:solidFill>
+              <a:srgbClr val="D9E3DF"/>
+            </a:solidFill>
+          </a:ln>
+        </p:spPr>
+        <p:style>
+          <a:lnRef idx="1">
+            <a:schemeClr val="accent1"/>
+          </a:lnRef>
+          <a:fillRef idx="3">
+            <a:schemeClr val="accent1"/>
+          </a:fillRef>
+          <a:effectRef idx="2">
+            <a:schemeClr val="accent1"/>
+          </a:effectRef>
+          <a:fontRef idx="minor">
+            <a:schemeClr val="lt1"/>
+          </a:fontRef>
+        </p:style>
+        <p:txBody>
+          <a:bodyPr rtlCol="0" anchor="ctr"/>
+          <a:lstStyle/>
+          <a:p>
+            <a:pPr algn="ctr"/>
+            <a:endParaRPr/>
+          </a:p>
+        </p:txBody>
+      </p:sp>
+      <p:sp>
+        <p:nvSpPr>
+          <p:cNvPr id="10" name="TextBox 9"/>
           <p:cNvSpPr txBox="1"/>
           <p:nvPr/>
         </p:nvSpPr>
         <p:spPr>
           <a:xfrm>
-            <a:off x="822960" y="4572000"/>
-            <a:ext cx="10515600" cy="457200"/>
+            <a:off x="4663440" y="2468880"/>
+            <a:ext cx="3017520" cy="411480"/>
           </a:xfrm>
           <a:prstGeom prst="rect">
             <a:avLst/>
@@ -4245,27 +4752,27 @@
           <a:p>
             <a:pPr algn="l"/>
             <a:r>
-              <a:rPr sz="2200" b="1">
-                <a:solidFill>
-                  <a:srgbClr val="B8E6D8"/>
-                </a:solidFill>
-                <a:latin typeface="Calibri"/>
-              </a:rPr>
-              <a:t>Questions?</a:t>
-            </a:r>
-          </a:p>
-        </p:txBody>
-      </p:sp>
-      <p:sp>
-        <p:nvSpPr>
-          <p:cNvPr id="7" name="TextBox 6"/>
+              <a:rPr sz="1700" b="1">
+                <a:solidFill>
+                  <a:srgbClr val="523873"/>
+                </a:solidFill>
+                <a:latin typeface="Calibri"/>
+              </a:rPr>
+              <a:t>Gradio</a:t>
+            </a:r>
+          </a:p>
+        </p:txBody>
+      </p:sp>
+      <p:sp>
+        <p:nvSpPr>
+          <p:cNvPr id="11" name="TextBox 10"/>
           <p:cNvSpPr txBox="1"/>
           <p:nvPr/>
         </p:nvSpPr>
         <p:spPr>
           <a:xfrm>
-            <a:off x="822960" y="6263640"/>
-            <a:ext cx="10515600" cy="365760"/>
+            <a:off x="4663440" y="3017520"/>
+            <a:ext cx="3017520" cy="640080"/>
           </a:xfrm>
           <a:prstGeom prst="rect">
             <a:avLst/>
@@ -4280,13 +4787,999 @@
           <a:p>
             <a:pPr algn="l"/>
             <a:r>
-              <a:rPr sz="1400" b="0">
-                <a:solidFill>
-                  <a:srgbClr val="FFFFFF"/>
-                </a:solidFill>
-                <a:latin typeface="Calibri"/>
-              </a:rPr>
-              <a:t>AI Interview Coach  ·  Thank you</a:t>
+              <a:rPr sz="1500" b="0">
+                <a:solidFill>
+                  <a:srgbClr val="5A6B66"/>
+                </a:solidFill>
+                <a:latin typeface="Calibri"/>
+              </a:rPr>
+              <a:t>Interactive interview UI</a:t>
+            </a:r>
+          </a:p>
+        </p:txBody>
+      </p:sp>
+      <p:sp>
+        <p:nvSpPr>
+          <p:cNvPr id="12" name="Rounded Rectangle 11"/>
+          <p:cNvSpPr/>
+          <p:nvPr/>
+        </p:nvSpPr>
+        <p:spPr>
+          <a:xfrm>
+            <a:off x="8138159" y="2011680"/>
+            <a:ext cx="3566160" cy="1874519"/>
+          </a:xfrm>
+          <a:prstGeom prst="roundRect">
+            <a:avLst>
+              <a:gd name="adj" fmla="val 8000"/>
+            </a:avLst>
+          </a:prstGeom>
+          <a:solidFill>
+            <a:srgbClr val="FFFFFF"/>
+          </a:solidFill>
+          <a:ln w="12700">
+            <a:solidFill>
+              <a:srgbClr val="D9E3DF"/>
+            </a:solidFill>
+          </a:ln>
+        </p:spPr>
+        <p:style>
+          <a:lnRef idx="1">
+            <a:schemeClr val="accent1"/>
+          </a:lnRef>
+          <a:fillRef idx="3">
+            <a:schemeClr val="accent1"/>
+          </a:fillRef>
+          <a:effectRef idx="2">
+            <a:schemeClr val="accent1"/>
+          </a:effectRef>
+          <a:fontRef idx="minor">
+            <a:schemeClr val="lt1"/>
+          </a:fontRef>
+        </p:style>
+        <p:txBody>
+          <a:bodyPr rtlCol="0" anchor="ctr"/>
+          <a:lstStyle/>
+          <a:p>
+            <a:pPr algn="ctr"/>
+            <a:endParaRPr/>
+          </a:p>
+        </p:txBody>
+      </p:sp>
+      <p:sp>
+        <p:nvSpPr>
+          <p:cNvPr id="13" name="TextBox 12"/>
+          <p:cNvSpPr txBox="1"/>
+          <p:nvPr/>
+        </p:nvSpPr>
+        <p:spPr>
+          <a:xfrm>
+            <a:off x="8412479" y="2468880"/>
+            <a:ext cx="3017520" cy="411480"/>
+          </a:xfrm>
+          <a:prstGeom prst="rect">
+            <a:avLst/>
+          </a:prstGeom>
+          <a:noFill/>
+        </p:spPr>
+        <p:txBody>
+          <a:bodyPr wrap="square">
+            <a:spAutoFit/>
+          </a:bodyPr>
+          <a:lstStyle/>
+          <a:p>
+            <a:pPr algn="l"/>
+            <a:r>
+              <a:rPr sz="1700" b="1">
+                <a:solidFill>
+                  <a:srgbClr val="523873"/>
+                </a:solidFill>
+                <a:latin typeface="Calibri"/>
+              </a:rPr>
+              <a:t>OpenAI API</a:t>
+            </a:r>
+          </a:p>
+        </p:txBody>
+      </p:sp>
+      <p:sp>
+        <p:nvSpPr>
+          <p:cNvPr id="14" name="TextBox 13"/>
+          <p:cNvSpPr txBox="1"/>
+          <p:nvPr/>
+        </p:nvSpPr>
+        <p:spPr>
+          <a:xfrm>
+            <a:off x="8412479" y="3017520"/>
+            <a:ext cx="3017520" cy="640080"/>
+          </a:xfrm>
+          <a:prstGeom prst="rect">
+            <a:avLst/>
+          </a:prstGeom>
+          <a:noFill/>
+        </p:spPr>
+        <p:txBody>
+          <a:bodyPr wrap="square">
+            <a:spAutoFit/>
+          </a:bodyPr>
+          <a:lstStyle/>
+          <a:p>
+            <a:pPr algn="l"/>
+            <a:r>
+              <a:rPr sz="1500" b="0">
+                <a:solidFill>
+                  <a:srgbClr val="5A6B66"/>
+                </a:solidFill>
+                <a:latin typeface="Calibri"/>
+              </a:rPr>
+              <a:t>Analysis, interview, STT, TTS, evaluation</a:t>
+            </a:r>
+          </a:p>
+        </p:txBody>
+      </p:sp>
+      <p:sp>
+        <p:nvSpPr>
+          <p:cNvPr id="15" name="Rounded Rectangle 14"/>
+          <p:cNvSpPr/>
+          <p:nvPr/>
+        </p:nvSpPr>
+        <p:spPr>
+          <a:xfrm>
+            <a:off x="640080" y="4114800"/>
+            <a:ext cx="3566160" cy="1874519"/>
+          </a:xfrm>
+          <a:prstGeom prst="roundRect">
+            <a:avLst>
+              <a:gd name="adj" fmla="val 8000"/>
+            </a:avLst>
+          </a:prstGeom>
+          <a:solidFill>
+            <a:srgbClr val="FFFFFF"/>
+          </a:solidFill>
+          <a:ln w="12700">
+            <a:solidFill>
+              <a:srgbClr val="D9E3DF"/>
+            </a:solidFill>
+          </a:ln>
+        </p:spPr>
+        <p:style>
+          <a:lnRef idx="1">
+            <a:schemeClr val="accent1"/>
+          </a:lnRef>
+          <a:fillRef idx="3">
+            <a:schemeClr val="accent1"/>
+          </a:fillRef>
+          <a:effectRef idx="2">
+            <a:schemeClr val="accent1"/>
+          </a:effectRef>
+          <a:fontRef idx="minor">
+            <a:schemeClr val="lt1"/>
+          </a:fontRef>
+        </p:style>
+        <p:txBody>
+          <a:bodyPr rtlCol="0" anchor="ctr"/>
+          <a:lstStyle/>
+          <a:p>
+            <a:pPr algn="ctr"/>
+            <a:endParaRPr/>
+          </a:p>
+        </p:txBody>
+      </p:sp>
+      <p:sp>
+        <p:nvSpPr>
+          <p:cNvPr id="16" name="TextBox 15"/>
+          <p:cNvSpPr txBox="1"/>
+          <p:nvPr/>
+        </p:nvSpPr>
+        <p:spPr>
+          <a:xfrm>
+            <a:off x="914400" y="4572000"/>
+            <a:ext cx="3017520" cy="411480"/>
+          </a:xfrm>
+          <a:prstGeom prst="rect">
+            <a:avLst/>
+          </a:prstGeom>
+          <a:noFill/>
+        </p:spPr>
+        <p:txBody>
+          <a:bodyPr wrap="square">
+            <a:spAutoFit/>
+          </a:bodyPr>
+          <a:lstStyle/>
+          <a:p>
+            <a:pPr algn="l"/>
+            <a:r>
+              <a:rPr sz="1700" b="1">
+                <a:solidFill>
+                  <a:srgbClr val="523873"/>
+                </a:solidFill>
+                <a:latin typeface="Calibri"/>
+              </a:rPr>
+              <a:t>Multi-agent design</a:t>
+            </a:r>
+          </a:p>
+        </p:txBody>
+      </p:sp>
+      <p:sp>
+        <p:nvSpPr>
+          <p:cNvPr id="17" name="TextBox 16"/>
+          <p:cNvSpPr txBox="1"/>
+          <p:nvPr/>
+        </p:nvSpPr>
+        <p:spPr>
+          <a:xfrm>
+            <a:off x="914400" y="5120640"/>
+            <a:ext cx="3017520" cy="640080"/>
+          </a:xfrm>
+          <a:prstGeom prst="rect">
+            <a:avLst/>
+          </a:prstGeom>
+          <a:noFill/>
+        </p:spPr>
+        <p:txBody>
+          <a:bodyPr wrap="square">
+            <a:spAutoFit/>
+          </a:bodyPr>
+          <a:lstStyle/>
+          <a:p>
+            <a:pPr algn="l"/>
+            <a:r>
+              <a:rPr sz="1500" b="0">
+                <a:solidFill>
+                  <a:srgbClr val="5A6B66"/>
+                </a:solidFill>
+                <a:latin typeface="Calibri"/>
+              </a:rPr>
+              <a:t>Specialized roles + manager workflow</a:t>
+            </a:r>
+          </a:p>
+        </p:txBody>
+      </p:sp>
+      <p:sp>
+        <p:nvSpPr>
+          <p:cNvPr id="18" name="Rounded Rectangle 17"/>
+          <p:cNvSpPr/>
+          <p:nvPr/>
+        </p:nvSpPr>
+        <p:spPr>
+          <a:xfrm>
+            <a:off x="4389120" y="4114800"/>
+            <a:ext cx="3566160" cy="1874519"/>
+          </a:xfrm>
+          <a:prstGeom prst="roundRect">
+            <a:avLst>
+              <a:gd name="adj" fmla="val 8000"/>
+            </a:avLst>
+          </a:prstGeom>
+          <a:solidFill>
+            <a:srgbClr val="FFFFFF"/>
+          </a:solidFill>
+          <a:ln w="12700">
+            <a:solidFill>
+              <a:srgbClr val="D9E3DF"/>
+            </a:solidFill>
+          </a:ln>
+        </p:spPr>
+        <p:style>
+          <a:lnRef idx="1">
+            <a:schemeClr val="accent1"/>
+          </a:lnRef>
+          <a:fillRef idx="3">
+            <a:schemeClr val="accent1"/>
+          </a:fillRef>
+          <a:effectRef idx="2">
+            <a:schemeClr val="accent1"/>
+          </a:effectRef>
+          <a:fontRef idx="minor">
+            <a:schemeClr val="lt1"/>
+          </a:fontRef>
+        </p:style>
+        <p:txBody>
+          <a:bodyPr rtlCol="0" anchor="ctr"/>
+          <a:lstStyle/>
+          <a:p>
+            <a:pPr algn="ctr"/>
+            <a:endParaRPr/>
+          </a:p>
+        </p:txBody>
+      </p:sp>
+      <p:sp>
+        <p:nvSpPr>
+          <p:cNvPr id="19" name="TextBox 18"/>
+          <p:cNvSpPr txBox="1"/>
+          <p:nvPr/>
+        </p:nvSpPr>
+        <p:spPr>
+          <a:xfrm>
+            <a:off x="4663440" y="4572000"/>
+            <a:ext cx="3017520" cy="411480"/>
+          </a:xfrm>
+          <a:prstGeom prst="rect">
+            <a:avLst/>
+          </a:prstGeom>
+          <a:noFill/>
+        </p:spPr>
+        <p:txBody>
+          <a:bodyPr wrap="square">
+            <a:spAutoFit/>
+          </a:bodyPr>
+          <a:lstStyle/>
+          <a:p>
+            <a:pPr algn="l"/>
+            <a:r>
+              <a:rPr sz="1700" b="1">
+                <a:solidFill>
+                  <a:srgbClr val="523873"/>
+                </a:solidFill>
+                <a:latin typeface="Calibri"/>
+              </a:rPr>
+              <a:t>python-docx / fpdf2 / pypdf</a:t>
+            </a:r>
+          </a:p>
+        </p:txBody>
+      </p:sp>
+      <p:sp>
+        <p:nvSpPr>
+          <p:cNvPr id="20" name="TextBox 19"/>
+          <p:cNvSpPr txBox="1"/>
+          <p:nvPr/>
+        </p:nvSpPr>
+        <p:spPr>
+          <a:xfrm>
+            <a:off x="4663440" y="5120640"/>
+            <a:ext cx="3017520" cy="640080"/>
+          </a:xfrm>
+          <a:prstGeom prst="rect">
+            <a:avLst/>
+          </a:prstGeom>
+          <a:noFill/>
+        </p:spPr>
+        <p:txBody>
+          <a:bodyPr wrap="square">
+            <a:spAutoFit/>
+          </a:bodyPr>
+          <a:lstStyle/>
+          <a:p>
+            <a:pPr algn="l"/>
+            <a:r>
+              <a:rPr sz="1500" b="0">
+                <a:solidFill>
+                  <a:srgbClr val="5A6B66"/>
+                </a:solidFill>
+                <a:latin typeface="Calibri"/>
+              </a:rPr>
+              <a:t>Document read &amp; report export</a:t>
+            </a:r>
+          </a:p>
+        </p:txBody>
+      </p:sp>
+      <p:sp>
+        <p:nvSpPr>
+          <p:cNvPr id="21" name="Rounded Rectangle 20"/>
+          <p:cNvSpPr/>
+          <p:nvPr/>
+        </p:nvSpPr>
+        <p:spPr>
+          <a:xfrm>
+            <a:off x="8138159" y="4114800"/>
+            <a:ext cx="3566160" cy="1874519"/>
+          </a:xfrm>
+          <a:prstGeom prst="roundRect">
+            <a:avLst>
+              <a:gd name="adj" fmla="val 8000"/>
+            </a:avLst>
+          </a:prstGeom>
+          <a:solidFill>
+            <a:srgbClr val="FFFFFF"/>
+          </a:solidFill>
+          <a:ln w="12700">
+            <a:solidFill>
+              <a:srgbClr val="D9E3DF"/>
+            </a:solidFill>
+          </a:ln>
+        </p:spPr>
+        <p:style>
+          <a:lnRef idx="1">
+            <a:schemeClr val="accent1"/>
+          </a:lnRef>
+          <a:fillRef idx="3">
+            <a:schemeClr val="accent1"/>
+          </a:fillRef>
+          <a:effectRef idx="2">
+            <a:schemeClr val="accent1"/>
+          </a:effectRef>
+          <a:fontRef idx="minor">
+            <a:schemeClr val="lt1"/>
+          </a:fontRef>
+        </p:style>
+        <p:txBody>
+          <a:bodyPr rtlCol="0" anchor="ctr"/>
+          <a:lstStyle/>
+          <a:p>
+            <a:pPr algn="ctr"/>
+            <a:endParaRPr/>
+          </a:p>
+        </p:txBody>
+      </p:sp>
+      <p:sp>
+        <p:nvSpPr>
+          <p:cNvPr id="22" name="TextBox 21"/>
+          <p:cNvSpPr txBox="1"/>
+          <p:nvPr/>
+        </p:nvSpPr>
+        <p:spPr>
+          <a:xfrm>
+            <a:off x="8412479" y="4572000"/>
+            <a:ext cx="3017520" cy="411480"/>
+          </a:xfrm>
+          <a:prstGeom prst="rect">
+            <a:avLst/>
+          </a:prstGeom>
+          <a:noFill/>
+        </p:spPr>
+        <p:txBody>
+          <a:bodyPr wrap="square">
+            <a:spAutoFit/>
+          </a:bodyPr>
+          <a:lstStyle/>
+          <a:p>
+            <a:pPr algn="l"/>
+            <a:r>
+              <a:rPr sz="1700" b="1">
+                <a:solidFill>
+                  <a:srgbClr val="523873"/>
+                </a:solidFill>
+                <a:latin typeface="Calibri"/>
+              </a:rPr>
+              <a:t>Local user_data store</a:t>
+            </a:r>
+          </a:p>
+        </p:txBody>
+      </p:sp>
+      <p:sp>
+        <p:nvSpPr>
+          <p:cNvPr id="23" name="TextBox 22"/>
+          <p:cNvSpPr txBox="1"/>
+          <p:nvPr/>
+        </p:nvSpPr>
+        <p:spPr>
+          <a:xfrm>
+            <a:off x="8412479" y="5120640"/>
+            <a:ext cx="3017520" cy="640080"/>
+          </a:xfrm>
+          <a:prstGeom prst="rect">
+            <a:avLst/>
+          </a:prstGeom>
+          <a:noFill/>
+        </p:spPr>
+        <p:txBody>
+          <a:bodyPr wrap="square">
+            <a:spAutoFit/>
+          </a:bodyPr>
+          <a:lstStyle/>
+          <a:p>
+            <a:pPr algn="l"/>
+            <a:r>
+              <a:rPr sz="1500" b="0">
+                <a:solidFill>
+                  <a:srgbClr val="5A6B66"/>
+                </a:solidFill>
+                <a:latin typeface="Calibri"/>
+              </a:rPr>
+              <a:t>Resumes, JDs, conversations, audio</a:t>
+            </a:r>
+          </a:p>
+        </p:txBody>
+      </p:sp>
+    </p:spTree>
+  </p:cSld>
+  <p:clrMapOvr>
+    <a:masterClrMapping/>
+  </p:clrMapOvr>
+</p:sld>
+</file>
+
+<file path=ppt/slides/slide12.xml><?xml version="1.0" encoding="utf-8"?>
+<p:sld xmlns:a="http://schemas.openxmlformats.org/drawingml/2006/main" xmlns:r="http://schemas.openxmlformats.org/officeDocument/2006/relationships" xmlns:p="http://schemas.openxmlformats.org/presentationml/2006/main">
+  <p:cSld>
+    <p:spTree>
+      <p:nvGrpSpPr>
+        <p:cNvPr id="1" name=""/>
+        <p:cNvGrpSpPr/>
+        <p:nvPr/>
+      </p:nvGrpSpPr>
+      <p:grpSpPr>
+        <a:xfrm>
+          <a:off x="0" y="0"/>
+          <a:ext cx="0" cy="0"/>
+          <a:chOff x="0" y="0"/>
+          <a:chExt cx="0" cy="0"/>
+        </a:xfrm>
+      </p:grpSpPr>
+      <p:sp>
+        <p:nvSpPr>
+          <p:cNvPr id="2" name="Rectangle 1"/>
+          <p:cNvSpPr/>
+          <p:nvPr/>
+        </p:nvSpPr>
+        <p:spPr>
+          <a:xfrm>
+            <a:off x="0" y="0"/>
+            <a:ext cx="12191695" cy="6858000"/>
+          </a:xfrm>
+          <a:prstGeom prst="rect">
+            <a:avLst/>
+          </a:prstGeom>
+          <a:solidFill>
+            <a:srgbClr val="F3F6F4"/>
+          </a:solidFill>
+          <a:ln>
+            <a:noFill/>
+          </a:ln>
+        </p:spPr>
+        <p:style>
+          <a:lnRef idx="1">
+            <a:schemeClr val="accent1"/>
+          </a:lnRef>
+          <a:fillRef idx="3">
+            <a:schemeClr val="accent1"/>
+          </a:fillRef>
+          <a:effectRef idx="2">
+            <a:schemeClr val="accent1"/>
+          </a:effectRef>
+          <a:fontRef idx="minor">
+            <a:schemeClr val="lt1"/>
+          </a:fontRef>
+        </p:style>
+        <p:txBody>
+          <a:bodyPr rtlCol="0" anchor="ctr"/>
+          <a:lstStyle/>
+          <a:p>
+            <a:pPr algn="ctr"/>
+            <a:endParaRPr/>
+          </a:p>
+        </p:txBody>
+      </p:sp>
+      <p:sp>
+        <p:nvSpPr>
+          <p:cNvPr id="3" name="TextBox 2"/>
+          <p:cNvSpPr txBox="1"/>
+          <p:nvPr/>
+        </p:nvSpPr>
+        <p:spPr>
+          <a:xfrm>
+            <a:off x="640080" y="320040"/>
+            <a:ext cx="10972800" cy="320040"/>
+          </a:xfrm>
+          <a:prstGeom prst="rect">
+            <a:avLst/>
+          </a:prstGeom>
+          <a:noFill/>
+        </p:spPr>
+        <p:txBody>
+          <a:bodyPr wrap="square">
+            <a:spAutoFit/>
+          </a:bodyPr>
+          <a:lstStyle/>
+          <a:p>
+            <a:pPr algn="l"/>
+            <a:r>
+              <a:rPr sz="1200" b="1">
+                <a:solidFill>
+                  <a:srgbClr val="0F6B5C"/>
+                </a:solidFill>
+                <a:latin typeface="Calibri"/>
+              </a:rPr>
+              <a:t>AI INTERVIEW COACH</a:t>
+            </a:r>
+          </a:p>
+        </p:txBody>
+      </p:sp>
+      <p:sp>
+        <p:nvSpPr>
+          <p:cNvPr id="4" name="TextBox 3"/>
+          <p:cNvSpPr txBox="1"/>
+          <p:nvPr/>
+        </p:nvSpPr>
+        <p:spPr>
+          <a:xfrm>
+            <a:off x="640080" y="594360"/>
+            <a:ext cx="10972800" cy="640080"/>
+          </a:xfrm>
+          <a:prstGeom prst="rect">
+            <a:avLst/>
+          </a:prstGeom>
+          <a:noFill/>
+        </p:spPr>
+        <p:txBody>
+          <a:bodyPr wrap="square">
+            <a:spAutoFit/>
+          </a:bodyPr>
+          <a:lstStyle/>
+          <a:p>
+            <a:pPr algn="l"/>
+            <a:r>
+              <a:rPr sz="3200" b="1">
+                <a:solidFill>
+                  <a:srgbClr val="523873"/>
+                </a:solidFill>
+                <a:latin typeface="Calibri"/>
+              </a:rPr>
+              <a:t>Scope, Limits &amp; Next Steps</a:t>
+            </a:r>
+          </a:p>
+        </p:txBody>
+      </p:sp>
+      <p:sp>
+        <p:nvSpPr>
+          <p:cNvPr id="5" name="TextBox 4"/>
+          <p:cNvSpPr txBox="1"/>
+          <p:nvPr/>
+        </p:nvSpPr>
+        <p:spPr>
+          <a:xfrm>
+            <a:off x="640080" y="1234440"/>
+            <a:ext cx="10972800" cy="457200"/>
+          </a:xfrm>
+          <a:prstGeom prst="rect">
+            <a:avLst/>
+          </a:prstGeom>
+          <a:noFill/>
+        </p:spPr>
+        <p:txBody>
+          <a:bodyPr wrap="square">
+            <a:spAutoFit/>
+          </a:bodyPr>
+          <a:lstStyle/>
+          <a:p>
+            <a:pPr algn="l"/>
+            <a:r>
+              <a:rPr sz="1600" b="0">
+                <a:solidFill>
+                  <a:srgbClr val="5A6B66"/>
+                </a:solidFill>
+                <a:latin typeface="Calibri"/>
+              </a:rPr>
+              <a:t>Honest about today — clear about tomorrow</a:t>
+            </a:r>
+          </a:p>
+        </p:txBody>
+      </p:sp>
+      <p:sp>
+        <p:nvSpPr>
+          <p:cNvPr id="6" name="Rounded Rectangle 5"/>
+          <p:cNvSpPr/>
+          <p:nvPr/>
+        </p:nvSpPr>
+        <p:spPr>
+          <a:xfrm>
+            <a:off x="640080" y="1920240"/>
+            <a:ext cx="5212080" cy="4114800"/>
+          </a:xfrm>
+          <a:prstGeom prst="roundRect">
+            <a:avLst>
+              <a:gd name="adj" fmla="val 8000"/>
+            </a:avLst>
+          </a:prstGeom>
+          <a:solidFill>
+            <a:srgbClr val="FFFFFF"/>
+          </a:solidFill>
+          <a:ln w="12700">
+            <a:solidFill>
+              <a:srgbClr val="D9E3DF"/>
+            </a:solidFill>
+          </a:ln>
+        </p:spPr>
+        <p:style>
+          <a:lnRef idx="1">
+            <a:schemeClr val="accent1"/>
+          </a:lnRef>
+          <a:fillRef idx="3">
+            <a:schemeClr val="accent1"/>
+          </a:fillRef>
+          <a:effectRef idx="2">
+            <a:schemeClr val="accent1"/>
+          </a:effectRef>
+          <a:fontRef idx="minor">
+            <a:schemeClr val="lt1"/>
+          </a:fontRef>
+        </p:style>
+        <p:txBody>
+          <a:bodyPr rtlCol="0" anchor="ctr"/>
+          <a:lstStyle/>
+          <a:p>
+            <a:pPr algn="ctr"/>
+            <a:endParaRPr/>
+          </a:p>
+        </p:txBody>
+      </p:sp>
+      <p:sp>
+        <p:nvSpPr>
+          <p:cNvPr id="7" name="Rounded Rectangle 6"/>
+          <p:cNvSpPr/>
+          <p:nvPr/>
+        </p:nvSpPr>
+        <p:spPr>
+          <a:xfrm>
+            <a:off x="6309360" y="1920240"/>
+            <a:ext cx="5212080" cy="4114800"/>
+          </a:xfrm>
+          <a:prstGeom prst="roundRect">
+            <a:avLst>
+              <a:gd name="adj" fmla="val 8000"/>
+            </a:avLst>
+          </a:prstGeom>
+          <a:solidFill>
+            <a:srgbClr val="FFFFFF"/>
+          </a:solidFill>
+          <a:ln w="12700">
+            <a:solidFill>
+              <a:srgbClr val="D9E3DF"/>
+            </a:solidFill>
+          </a:ln>
+        </p:spPr>
+        <p:style>
+          <a:lnRef idx="1">
+            <a:schemeClr val="accent1"/>
+          </a:lnRef>
+          <a:fillRef idx="3">
+            <a:schemeClr val="accent1"/>
+          </a:fillRef>
+          <a:effectRef idx="2">
+            <a:schemeClr val="accent1"/>
+          </a:effectRef>
+          <a:fontRef idx="minor">
+            <a:schemeClr val="lt1"/>
+          </a:fontRef>
+        </p:style>
+        <p:txBody>
+          <a:bodyPr rtlCol="0" anchor="ctr"/>
+          <a:lstStyle/>
+          <a:p>
+            <a:pPr algn="ctr"/>
+            <a:endParaRPr/>
+          </a:p>
+        </p:txBody>
+      </p:sp>
+      <p:sp>
+        <p:nvSpPr>
+          <p:cNvPr id="8" name="TextBox 7"/>
+          <p:cNvSpPr txBox="1"/>
+          <p:nvPr/>
+        </p:nvSpPr>
+        <p:spPr>
+          <a:xfrm>
+            <a:off x="914400" y="2148840"/>
+            <a:ext cx="4754880" cy="365760"/>
+          </a:xfrm>
+          <a:prstGeom prst="rect">
+            <a:avLst/>
+          </a:prstGeom>
+          <a:noFill/>
+        </p:spPr>
+        <p:txBody>
+          <a:bodyPr wrap="square">
+            <a:spAutoFit/>
+          </a:bodyPr>
+          <a:lstStyle/>
+          <a:p>
+            <a:pPr algn="l"/>
+            <a:r>
+              <a:rPr sz="1800" b="1">
+                <a:solidFill>
+                  <a:srgbClr val="523873"/>
+                </a:solidFill>
+                <a:latin typeface="Calibri"/>
+              </a:rPr>
+              <a:t>Current scope</a:t>
+            </a:r>
+          </a:p>
+        </p:txBody>
+      </p:sp>
+      <p:sp>
+        <p:nvSpPr>
+          <p:cNvPr id="9" name="TextBox 8"/>
+          <p:cNvSpPr txBox="1"/>
+          <p:nvPr/>
+        </p:nvSpPr>
+        <p:spPr>
+          <a:xfrm>
+            <a:off x="914400" y="2697480"/>
+            <a:ext cx="4754880" cy="3017520"/>
+          </a:xfrm>
+          <a:prstGeom prst="rect">
+            <a:avLst/>
+          </a:prstGeom>
+          <a:noFill/>
+        </p:spPr>
+        <p:txBody>
+          <a:bodyPr wrap="square">
+            <a:spAutoFit/>
+          </a:bodyPr>
+          <a:lstStyle/>
+          <a:p>
+            <a:pPr>
+              <a:spcAft>
+                <a:spcPts val="800"/>
+              </a:spcAft>
+            </a:pPr>
+            <a:r>
+              <a:rPr sz="1600" b="0">
+                <a:solidFill>
+                  <a:srgbClr val="1C2B28"/>
+                </a:solidFill>
+                <a:latin typeface="Calibri"/>
+              </a:rPr>
+              <a:t>•  Opening/closing questions are fixed</a:t>
+            </a:r>
+          </a:p>
+          <a:p>
+            <a:pPr>
+              <a:spcAft>
+                <a:spcPts val="800"/>
+              </a:spcAft>
+            </a:pPr>
+            <a:r>
+              <a:rPr sz="1600" b="0">
+                <a:solidFill>
+                  <a:srgbClr val="1C2B28"/>
+                </a:solidFill>
+                <a:latin typeface="Calibri"/>
+              </a:rPr>
+              <a:t>•  Four middle questions are tailored</a:t>
+            </a:r>
+          </a:p>
+          <a:p>
+            <a:pPr>
+              <a:spcAft>
+                <a:spcPts val="800"/>
+              </a:spcAft>
+            </a:pPr>
+            <a:r>
+              <a:rPr sz="1600" b="0">
+                <a:solidFill>
+                  <a:srgbClr val="1C2B28"/>
+                </a:solidFill>
+                <a:latin typeface="Calibri"/>
+              </a:rPr>
+              <a:t>•  Evaluation after the full interview</a:t>
+            </a:r>
+          </a:p>
+          <a:p>
+            <a:pPr>
+              <a:spcAft>
+                <a:spcPts val="800"/>
+              </a:spcAft>
+            </a:pPr>
+            <a:r>
+              <a:rPr sz="1600" b="0">
+                <a:solidFill>
+                  <a:srgbClr val="1C2B28"/>
+                </a:solidFill>
+                <a:latin typeface="Calibri"/>
+              </a:rPr>
+              <a:t>•  Local auth + local file storage</a:t>
+            </a:r>
+          </a:p>
+        </p:txBody>
+      </p:sp>
+      <p:sp>
+        <p:nvSpPr>
+          <p:cNvPr id="10" name="TextBox 9"/>
+          <p:cNvSpPr txBox="1"/>
+          <p:nvPr/>
+        </p:nvSpPr>
+        <p:spPr>
+          <a:xfrm>
+            <a:off x="6583680" y="2148840"/>
+            <a:ext cx="4754880" cy="365760"/>
+          </a:xfrm>
+          <a:prstGeom prst="rect">
+            <a:avLst/>
+          </a:prstGeom>
+          <a:noFill/>
+        </p:spPr>
+        <p:txBody>
+          <a:bodyPr wrap="square">
+            <a:spAutoFit/>
+          </a:bodyPr>
+          <a:lstStyle/>
+          <a:p>
+            <a:pPr algn="l"/>
+            <a:r>
+              <a:rPr sz="1800" b="1">
+                <a:solidFill>
+                  <a:srgbClr val="0F6B5C"/>
+                </a:solidFill>
+                <a:latin typeface="Calibri"/>
+              </a:rPr>
+              <a:t>Next steps</a:t>
+            </a:r>
+          </a:p>
+        </p:txBody>
+      </p:sp>
+      <p:sp>
+        <p:nvSpPr>
+          <p:cNvPr id="11" name="TextBox 10"/>
+          <p:cNvSpPr txBox="1"/>
+          <p:nvPr/>
+        </p:nvSpPr>
+        <p:spPr>
+          <a:xfrm>
+            <a:off x="6583680" y="2697480"/>
+            <a:ext cx="4754880" cy="3017520"/>
+          </a:xfrm>
+          <a:prstGeom prst="rect">
+            <a:avLst/>
+          </a:prstGeom>
+          <a:noFill/>
+        </p:spPr>
+        <p:txBody>
+          <a:bodyPr wrap="square">
+            <a:spAutoFit/>
+          </a:bodyPr>
+          <a:lstStyle/>
+          <a:p>
+            <a:pPr>
+              <a:spcAft>
+                <a:spcPts val="800"/>
+              </a:spcAft>
+            </a:pPr>
+            <a:r>
+              <a:rPr sz="1600" b="0">
+                <a:solidFill>
+                  <a:srgbClr val="1C2B28"/>
+                </a:solidFill>
+                <a:latin typeface="Calibri"/>
+              </a:rPr>
+              <a:t>•  Adaptive follow-up questions</a:t>
+            </a:r>
+          </a:p>
+          <a:p>
+            <a:pPr>
+              <a:spcAft>
+                <a:spcPts val="800"/>
+              </a:spcAft>
+            </a:pPr>
+            <a:r>
+              <a:rPr sz="1600" b="0">
+                <a:solidFill>
+                  <a:srgbClr val="1C2B28"/>
+                </a:solidFill>
+                <a:latin typeface="Calibri"/>
+              </a:rPr>
+              <a:t>•  Richer scoring rubric per answer</a:t>
+            </a:r>
+          </a:p>
+          <a:p>
+            <a:pPr>
+              <a:spcAft>
+                <a:spcPts val="800"/>
+              </a:spcAft>
+            </a:pPr>
+            <a:r>
+              <a:rPr sz="1600" b="0">
+                <a:solidFill>
+                  <a:srgbClr val="1C2B28"/>
+                </a:solidFill>
+                <a:latin typeface="Calibri"/>
+              </a:rPr>
+              <a:t>•  Cloud storage / stronger production auth</a:t>
+            </a:r>
+          </a:p>
+          <a:p>
+            <a:pPr>
+              <a:spcAft>
+                <a:spcPts val="800"/>
+              </a:spcAft>
+            </a:pPr>
+            <a:r>
+              <a:rPr sz="1600" b="0">
+                <a:solidFill>
+                  <a:srgbClr val="1C2B28"/>
+                </a:solidFill>
+                <a:latin typeface="Calibri"/>
+              </a:rPr>
+              <a:t>•  Progress analytics across sessions</a:t>
             </a:r>
           </a:p>
         </p:txBody>
@@ -5761,10 +7254,10 @@
       </p:grpSpPr>
       <p:pic>
         <p:nvPicPr>
-          <p:cNvPr id="3" name="Picture 2">
+          <p:cNvPr id="4" name="Picture 3">
             <a:extLst>
               <a:ext uri="{FF2B5EF4-FFF2-40B4-BE49-F238E27FC236}">
-                <a16:creationId xmlns:a16="http://schemas.microsoft.com/office/drawing/2014/main" id="{1F34BAD7-C8D9-D7A1-2A41-63E5320C1A14}"/>
+                <a16:creationId xmlns:a16="http://schemas.microsoft.com/office/drawing/2014/main" id="{B156F8DD-E7A2-BE35-84A4-C8BAFDAD3C74}"/>
               </a:ext>
             </a:extLst>
           </p:cNvPr>
@@ -5781,8 +7274,8 @@
         </p:blipFill>
         <p:spPr>
           <a:xfrm>
-            <a:off x="533400" y="143933"/>
-            <a:ext cx="11252200" cy="6595534"/>
+            <a:off x="519289" y="358422"/>
+            <a:ext cx="11176000" cy="6141156"/>
           </a:xfrm>
           <a:prstGeom prst="rect">
             <a:avLst/>
@@ -5928,7 +7421,7 @@
                 </a:solidFill>
                 <a:latin typeface="Calibri"/>
               </a:rPr>
-              <a:t>Multi-Agent Architecture</a:t>
+              <a:t>Product Layer Around the Agents</a:t>
             </a:r>
           </a:p>
         </p:txBody>
@@ -5963,7 +7456,7 @@
                 </a:solidFill>
                 <a:latin typeface="Calibri"/>
               </a:rPr>
-              <a:t>Clear roles. Predictable orchestration.</a:t>
+              <a:t>From model calls to a usable practice product</a:t>
             </a:r>
           </a:p>
         </p:txBody>
@@ -5976,8 +7469,8 @@
         </p:nvSpPr>
         <p:spPr>
           <a:xfrm>
-            <a:off x="640080" y="1920240"/>
-            <a:ext cx="5394960" cy="1874519"/>
+            <a:off x="640080" y="1965960"/>
+            <a:ext cx="3566160" cy="1920240"/>
           </a:xfrm>
           <a:prstGeom prst="roundRect">
             <a:avLst>
@@ -6018,58 +7511,14 @@
       </p:sp>
       <p:sp>
         <p:nvSpPr>
-          <p:cNvPr id="7" name="Rectangle 6"/>
-          <p:cNvSpPr/>
-          <p:nvPr/>
-        </p:nvSpPr>
-        <p:spPr>
-          <a:xfrm>
-            <a:off x="640080" y="1920240"/>
-            <a:ext cx="109728" cy="1874519"/>
-          </a:xfrm>
-          <a:prstGeom prst="rect">
-            <a:avLst/>
-          </a:prstGeom>
-          <a:solidFill>
-            <a:srgbClr val="0F6B5C"/>
-          </a:solidFill>
-          <a:ln>
-            <a:noFill/>
-          </a:ln>
-        </p:spPr>
-        <p:style>
-          <a:lnRef idx="1">
-            <a:schemeClr val="accent1"/>
-          </a:lnRef>
-          <a:fillRef idx="3">
-            <a:schemeClr val="accent1"/>
-          </a:fillRef>
-          <a:effectRef idx="2">
-            <a:schemeClr val="accent1"/>
-          </a:effectRef>
-          <a:fontRef idx="minor">
-            <a:schemeClr val="lt1"/>
-          </a:fontRef>
-        </p:style>
-        <p:txBody>
-          <a:bodyPr rtlCol="0" anchor="ctr"/>
-          <a:lstStyle/>
-          <a:p>
-            <a:pPr algn="ctr"/>
-            <a:endParaRPr/>
-          </a:p>
-        </p:txBody>
-      </p:sp>
-      <p:sp>
-        <p:nvSpPr>
-          <p:cNvPr id="8" name="TextBox 7"/>
+          <p:cNvPr id="7" name="TextBox 6"/>
           <p:cNvSpPr txBox="1"/>
           <p:nvPr/>
         </p:nvSpPr>
         <p:spPr>
           <a:xfrm>
-            <a:off x="1005840" y="2240280"/>
-            <a:ext cx="4754880" cy="365760"/>
+            <a:off x="914400" y="2377440"/>
+            <a:ext cx="3017520" cy="365760"/>
           </a:xfrm>
           <a:prstGeom prst="rect">
             <a:avLst/>
@@ -6086,25 +7535,25 @@
             <a:r>
               <a:rPr sz="1800" b="1">
                 <a:solidFill>
-                  <a:srgbClr val="523873"/>
-                </a:solidFill>
-                <a:latin typeface="Calibri"/>
-              </a:rPr>
-              <a:t>Job Analysis Agent</a:t>
-            </a:r>
-          </a:p>
-        </p:txBody>
-      </p:sp>
-      <p:sp>
-        <p:nvSpPr>
-          <p:cNvPr id="9" name="TextBox 8"/>
+                  <a:srgbClr val="0F6B5C"/>
+                </a:solidFill>
+                <a:latin typeface="Calibri"/>
+              </a:rPr>
+              <a:t>Auth</a:t>
+            </a:r>
+          </a:p>
+        </p:txBody>
+      </p:sp>
+      <p:sp>
+        <p:nvSpPr>
+          <p:cNvPr id="8" name="TextBox 7"/>
           <p:cNvSpPr txBox="1"/>
           <p:nvPr/>
         </p:nvSpPr>
         <p:spPr>
           <a:xfrm>
-            <a:off x="1005840" y="2743200"/>
-            <a:ext cx="4754880" cy="822960"/>
+            <a:off x="914400" y="2926080"/>
+            <a:ext cx="3017520" cy="731520"/>
           </a:xfrm>
           <a:prstGeom prst="rect">
             <a:avLst/>
@@ -6121,37 +7570,25 @@
             <a:r>
               <a:rPr sz="1500" b="0">
                 <a:solidFill>
-                  <a:srgbClr val="5A6B66"/>
-                </a:solidFill>
-                <a:latin typeface="Calibri"/>
-              </a:rPr>
-              <a:t>Extracts skills, matches, gaps</a:t>
-            </a:r>
-          </a:p>
-          <a:p>
-            <a:pPr algn="l"/>
-            <a:r>
-              <a:rPr sz="1500" b="0">
-                <a:solidFill>
-                  <a:srgbClr val="5A6B66"/>
-                </a:solidFill>
-                <a:latin typeface="Calibri"/>
-              </a:rPr>
-              <a:t>Generates tailored questions</a:t>
-            </a:r>
-          </a:p>
-        </p:txBody>
-      </p:sp>
-      <p:sp>
-        <p:nvSpPr>
-          <p:cNvPr id="10" name="Rounded Rectangle 9"/>
+                  <a:srgbClr val="1C2B28"/>
+                </a:solidFill>
+                <a:latin typeface="Calibri"/>
+              </a:rPr>
+              <a:t>Email/password accounts with hashed credentials</a:t>
+            </a:r>
+          </a:p>
+        </p:txBody>
+      </p:sp>
+      <p:sp>
+        <p:nvSpPr>
+          <p:cNvPr id="9" name="Rounded Rectangle 8"/>
           <p:cNvSpPr/>
           <p:nvPr/>
         </p:nvSpPr>
         <p:spPr>
           <a:xfrm>
-            <a:off x="6309360" y="1920240"/>
-            <a:ext cx="5394960" cy="1874519"/>
+            <a:off x="4389120" y="1965960"/>
+            <a:ext cx="3566160" cy="1920240"/>
           </a:xfrm>
           <a:prstGeom prst="roundRect">
             <a:avLst>
@@ -6192,58 +7629,14 @@
       </p:sp>
       <p:sp>
         <p:nvSpPr>
-          <p:cNvPr id="11" name="Rectangle 10"/>
-          <p:cNvSpPr/>
-          <p:nvPr/>
-        </p:nvSpPr>
-        <p:spPr>
-          <a:xfrm>
-            <a:off x="6309360" y="1920240"/>
-            <a:ext cx="109728" cy="1874519"/>
-          </a:xfrm>
-          <a:prstGeom prst="rect">
-            <a:avLst/>
-          </a:prstGeom>
-          <a:solidFill>
-            <a:srgbClr val="523873"/>
-          </a:solidFill>
-          <a:ln>
-            <a:noFill/>
-          </a:ln>
-        </p:spPr>
-        <p:style>
-          <a:lnRef idx="1">
-            <a:schemeClr val="accent1"/>
-          </a:lnRef>
-          <a:fillRef idx="3">
-            <a:schemeClr val="accent1"/>
-          </a:fillRef>
-          <a:effectRef idx="2">
-            <a:schemeClr val="accent1"/>
-          </a:effectRef>
-          <a:fontRef idx="minor">
-            <a:schemeClr val="lt1"/>
-          </a:fontRef>
-        </p:style>
-        <p:txBody>
-          <a:bodyPr rtlCol="0" anchor="ctr"/>
-          <a:lstStyle/>
-          <a:p>
-            <a:pPr algn="ctr"/>
-            <a:endParaRPr/>
-          </a:p>
-        </p:txBody>
-      </p:sp>
-      <p:sp>
-        <p:nvSpPr>
-          <p:cNvPr id="12" name="TextBox 11"/>
+          <p:cNvPr id="10" name="TextBox 9"/>
           <p:cNvSpPr txBox="1"/>
           <p:nvPr/>
         </p:nvSpPr>
         <p:spPr>
           <a:xfrm>
-            <a:off x="6675120" y="2240280"/>
-            <a:ext cx="4754880" cy="365760"/>
+            <a:off x="4663440" y="2377440"/>
+            <a:ext cx="3017520" cy="365760"/>
           </a:xfrm>
           <a:prstGeom prst="rect">
             <a:avLst/>
@@ -6260,25 +7653,25 @@
             <a:r>
               <a:rPr sz="1800" b="1">
                 <a:solidFill>
-                  <a:srgbClr val="523873"/>
-                </a:solidFill>
-                <a:latin typeface="Calibri"/>
-              </a:rPr>
-              <a:t>Interview Agent</a:t>
-            </a:r>
-          </a:p>
-        </p:txBody>
-      </p:sp>
-      <p:sp>
-        <p:nvSpPr>
-          <p:cNvPr id="13" name="TextBox 12"/>
+                  <a:srgbClr val="0F6B5C"/>
+                </a:solidFill>
+                <a:latin typeface="Calibri"/>
+              </a:rPr>
+              <a:t>Document library</a:t>
+            </a:r>
+          </a:p>
+        </p:txBody>
+      </p:sp>
+      <p:sp>
+        <p:nvSpPr>
+          <p:cNvPr id="11" name="TextBox 10"/>
           <p:cNvSpPr txBox="1"/>
           <p:nvPr/>
         </p:nvSpPr>
         <p:spPr>
           <a:xfrm>
-            <a:off x="6675120" y="2743200"/>
-            <a:ext cx="4754880" cy="822960"/>
+            <a:off x="4663440" y="2926080"/>
+            <a:ext cx="3017520" cy="731520"/>
           </a:xfrm>
           <a:prstGeom prst="rect">
             <a:avLst/>
@@ -6295,37 +7688,25 @@
             <a:r>
               <a:rPr sz="1500" b="0">
                 <a:solidFill>
-                  <a:srgbClr val="5A6B66"/>
-                </a:solidFill>
-                <a:latin typeface="Calibri"/>
-              </a:rPr>
-              <a:t>Runs question sequence</a:t>
-            </a:r>
-          </a:p>
-          <a:p>
-            <a:pPr algn="l"/>
-            <a:r>
-              <a:rPr sz="1500" b="0">
-                <a:solidFill>
-                  <a:srgbClr val="5A6B66"/>
-                </a:solidFill>
-                <a:latin typeface="Calibri"/>
-              </a:rPr>
-              <a:t>Opening → tailored → close</a:t>
-            </a:r>
-          </a:p>
-        </p:txBody>
-      </p:sp>
-      <p:sp>
-        <p:nvSpPr>
-          <p:cNvPr id="14" name="Rounded Rectangle 13"/>
+                  <a:srgbClr val="1C2B28"/>
+                </a:solidFill>
+                <a:latin typeface="Calibri"/>
+              </a:rPr>
+              <a:t>Save and reuse resumes &amp; job descriptions</a:t>
+            </a:r>
+          </a:p>
+        </p:txBody>
+      </p:sp>
+      <p:sp>
+        <p:nvSpPr>
+          <p:cNvPr id="12" name="Rounded Rectangle 11"/>
           <p:cNvSpPr/>
           <p:nvPr/>
         </p:nvSpPr>
         <p:spPr>
           <a:xfrm>
-            <a:off x="640080" y="4023360"/>
-            <a:ext cx="5394960" cy="1874519"/>
+            <a:off x="8138159" y="1965960"/>
+            <a:ext cx="3566160" cy="1920240"/>
           </a:xfrm>
           <a:prstGeom prst="roundRect">
             <a:avLst>
@@ -6366,58 +7747,14 @@
       </p:sp>
       <p:sp>
         <p:nvSpPr>
-          <p:cNvPr id="15" name="Rectangle 14"/>
-          <p:cNvSpPr/>
-          <p:nvPr/>
-        </p:nvSpPr>
-        <p:spPr>
-          <a:xfrm>
-            <a:off x="640080" y="4023360"/>
-            <a:ext cx="109728" cy="1874519"/>
-          </a:xfrm>
-          <a:prstGeom prst="rect">
-            <a:avLst/>
-          </a:prstGeom>
-          <a:solidFill>
-            <a:srgbClr val="0F6B5C"/>
-          </a:solidFill>
-          <a:ln>
-            <a:noFill/>
-          </a:ln>
-        </p:spPr>
-        <p:style>
-          <a:lnRef idx="1">
-            <a:schemeClr val="accent1"/>
-          </a:lnRef>
-          <a:fillRef idx="3">
-            <a:schemeClr val="accent1"/>
-          </a:fillRef>
-          <a:effectRef idx="2">
-            <a:schemeClr val="accent1"/>
-          </a:effectRef>
-          <a:fontRef idx="minor">
-            <a:schemeClr val="lt1"/>
-          </a:fontRef>
-        </p:style>
-        <p:txBody>
-          <a:bodyPr rtlCol="0" anchor="ctr"/>
-          <a:lstStyle/>
-          <a:p>
-            <a:pPr algn="ctr"/>
-            <a:endParaRPr/>
-          </a:p>
-        </p:txBody>
-      </p:sp>
-      <p:sp>
-        <p:nvSpPr>
-          <p:cNvPr id="16" name="TextBox 15"/>
+          <p:cNvPr id="13" name="TextBox 12"/>
           <p:cNvSpPr txBox="1"/>
           <p:nvPr/>
         </p:nvSpPr>
         <p:spPr>
           <a:xfrm>
-            <a:off x="1005840" y="4343400"/>
-            <a:ext cx="4754880" cy="365760"/>
+            <a:off x="8412479" y="2377440"/>
+            <a:ext cx="3017520" cy="365760"/>
           </a:xfrm>
           <a:prstGeom prst="rect">
             <a:avLst/>
@@ -6434,25 +7771,25 @@
             <a:r>
               <a:rPr sz="1800" b="1">
                 <a:solidFill>
-                  <a:srgbClr val="523873"/>
-                </a:solidFill>
-                <a:latin typeface="Calibri"/>
-              </a:rPr>
-              <a:t>Interview Manager</a:t>
-            </a:r>
-          </a:p>
-        </p:txBody>
-      </p:sp>
-      <p:sp>
-        <p:nvSpPr>
-          <p:cNvPr id="17" name="TextBox 16"/>
+                  <a:srgbClr val="0F6B5C"/>
+                </a:solidFill>
+                <a:latin typeface="Calibri"/>
+              </a:rPr>
+              <a:t>Conversation history</a:t>
+            </a:r>
+          </a:p>
+        </p:txBody>
+      </p:sp>
+      <p:sp>
+        <p:nvSpPr>
+          <p:cNvPr id="14" name="TextBox 13"/>
           <p:cNvSpPr txBox="1"/>
           <p:nvPr/>
         </p:nvSpPr>
         <p:spPr>
           <a:xfrm>
-            <a:off x="1005840" y="4846320"/>
-            <a:ext cx="4754880" cy="822960"/>
+            <a:off x="8412479" y="2926080"/>
+            <a:ext cx="3017520" cy="731520"/>
           </a:xfrm>
           <a:prstGeom prst="rect">
             <a:avLst/>
@@ -6469,37 +7806,25 @@
             <a:r>
               <a:rPr sz="1500" b="0">
                 <a:solidFill>
-                  <a:srgbClr val="5A6B66"/>
-                </a:solidFill>
-                <a:latin typeface="Calibri"/>
-              </a:rPr>
-              <a:t>Owns session state &amp; turn order</a:t>
-            </a:r>
-          </a:p>
-          <a:p>
-            <a:pPr algn="l"/>
-            <a:r>
-              <a:rPr sz="1500" b="0">
-                <a:solidFill>
-                  <a:srgbClr val="5A6B66"/>
-                </a:solidFill>
-                <a:latin typeface="Calibri"/>
-              </a:rPr>
-              <a:t>Coordinates the workflow</a:t>
-            </a:r>
-          </a:p>
-        </p:txBody>
-      </p:sp>
-      <p:sp>
-        <p:nvSpPr>
-          <p:cNvPr id="18" name="Rounded Rectangle 17"/>
+                  <a:srgbClr val="1C2B28"/>
+                </a:solidFill>
+                <a:latin typeface="Calibri"/>
+              </a:rPr>
+              <a:t>Reopen past interviews; replay audio clips</a:t>
+            </a:r>
+          </a:p>
+        </p:txBody>
+      </p:sp>
+      <p:sp>
+        <p:nvSpPr>
+          <p:cNvPr id="15" name="Rounded Rectangle 14"/>
           <p:cNvSpPr/>
           <p:nvPr/>
         </p:nvSpPr>
         <p:spPr>
           <a:xfrm>
-            <a:off x="6309360" y="4023360"/>
-            <a:ext cx="5394960" cy="1874519"/>
+            <a:off x="640080" y="4114800"/>
+            <a:ext cx="3566160" cy="1920240"/>
           </a:xfrm>
           <a:prstGeom prst="roundRect">
             <a:avLst>
@@ -6540,23 +7865,97 @@
       </p:sp>
       <p:sp>
         <p:nvSpPr>
-          <p:cNvPr id="19" name="Rectangle 18"/>
+          <p:cNvPr id="16" name="TextBox 15"/>
+          <p:cNvSpPr txBox="1"/>
+          <p:nvPr/>
+        </p:nvSpPr>
+        <p:spPr>
+          <a:xfrm>
+            <a:off x="914400" y="4526280"/>
+            <a:ext cx="3017520" cy="365760"/>
+          </a:xfrm>
+          <a:prstGeom prst="rect">
+            <a:avLst/>
+          </a:prstGeom>
+          <a:noFill/>
+        </p:spPr>
+        <p:txBody>
+          <a:bodyPr wrap="square">
+            <a:spAutoFit/>
+          </a:bodyPr>
+          <a:lstStyle/>
+          <a:p>
+            <a:pPr algn="l"/>
+            <a:r>
+              <a:rPr sz="1800" b="1">
+                <a:solidFill>
+                  <a:srgbClr val="0F6B5C"/>
+                </a:solidFill>
+                <a:latin typeface="Calibri"/>
+              </a:rPr>
+              <a:t>Downloads</a:t>
+            </a:r>
+          </a:p>
+        </p:txBody>
+      </p:sp>
+      <p:sp>
+        <p:nvSpPr>
+          <p:cNvPr id="17" name="TextBox 16"/>
+          <p:cNvSpPr txBox="1"/>
+          <p:nvPr/>
+        </p:nvSpPr>
+        <p:spPr>
+          <a:xfrm>
+            <a:off x="914400" y="5074920"/>
+            <a:ext cx="3017520" cy="731520"/>
+          </a:xfrm>
+          <a:prstGeom prst="rect">
+            <a:avLst/>
+          </a:prstGeom>
+          <a:noFill/>
+        </p:spPr>
+        <p:txBody>
+          <a:bodyPr wrap="square">
+            <a:spAutoFit/>
+          </a:bodyPr>
+          <a:lstStyle/>
+          <a:p>
+            <a:pPr algn="l"/>
+            <a:r>
+              <a:rPr sz="1500" b="0">
+                <a:solidFill>
+                  <a:srgbClr val="1C2B28"/>
+                </a:solidFill>
+                <a:latin typeface="Calibri"/>
+              </a:rPr>
+              <a:t>Feedback report + study pack (PDF / DOCX)</a:t>
+            </a:r>
+          </a:p>
+        </p:txBody>
+      </p:sp>
+      <p:sp>
+        <p:nvSpPr>
+          <p:cNvPr id="18" name="Rounded Rectangle 17"/>
           <p:cNvSpPr/>
           <p:nvPr/>
         </p:nvSpPr>
         <p:spPr>
           <a:xfrm>
-            <a:off x="6309360" y="4023360"/>
-            <a:ext cx="109728" cy="1874519"/>
-          </a:xfrm>
-          <a:prstGeom prst="rect">
-            <a:avLst/>
+            <a:off x="4389120" y="4114800"/>
+            <a:ext cx="3566160" cy="1920240"/>
+          </a:xfrm>
+          <a:prstGeom prst="roundRect">
+            <a:avLst>
+              <a:gd name="adj" fmla="val 8000"/>
+            </a:avLst>
           </a:prstGeom>
           <a:solidFill>
-            <a:srgbClr val="523873"/>
+            <a:srgbClr val="FFFFFF"/>
           </a:solidFill>
-          <a:ln>
-            <a:noFill/>
+          <a:ln w="12700">
+            <a:solidFill>
+              <a:srgbClr val="D9E3DF"/>
+            </a:solidFill>
           </a:ln>
         </p:spPr>
         <p:style>
@@ -6584,14 +7983,14 @@
       </p:sp>
       <p:sp>
         <p:nvSpPr>
-          <p:cNvPr id="20" name="TextBox 19"/>
+          <p:cNvPr id="19" name="TextBox 18"/>
           <p:cNvSpPr txBox="1"/>
           <p:nvPr/>
         </p:nvSpPr>
         <p:spPr>
           <a:xfrm>
-            <a:off x="6675120" y="4343400"/>
-            <a:ext cx="4754880" cy="365760"/>
+            <a:off x="4663440" y="4526280"/>
+            <a:ext cx="3017520" cy="365760"/>
           </a:xfrm>
           <a:prstGeom prst="rect">
             <a:avLst/>
@@ -6608,25 +8007,25 @@
             <a:r>
               <a:rPr sz="1800" b="1">
                 <a:solidFill>
-                  <a:srgbClr val="523873"/>
-                </a:solidFill>
-                <a:latin typeface="Calibri"/>
-              </a:rPr>
-              <a:t>Evaluation Agent</a:t>
-            </a:r>
-          </a:p>
-        </p:txBody>
-      </p:sp>
-      <p:sp>
-        <p:nvSpPr>
-          <p:cNvPr id="21" name="TextBox 20"/>
+                  <a:srgbClr val="0F6B5C"/>
+                </a:solidFill>
+                <a:latin typeface="Calibri"/>
+              </a:rPr>
+              <a:t>Voice loop</a:t>
+            </a:r>
+          </a:p>
+        </p:txBody>
+      </p:sp>
+      <p:sp>
+        <p:nvSpPr>
+          <p:cNvPr id="20" name="TextBox 19"/>
           <p:cNvSpPr txBox="1"/>
           <p:nvPr/>
         </p:nvSpPr>
         <p:spPr>
           <a:xfrm>
-            <a:off x="6675120" y="4846320"/>
-            <a:ext cx="4754880" cy="822960"/>
+            <a:off x="4663440" y="5074920"/>
+            <a:ext cx="3017520" cy="731520"/>
           </a:xfrm>
           <a:prstGeom prst="rect">
             <a:avLst/>
@@ -6643,23 +8042,129 @@
             <a:r>
               <a:rPr sz="1500" b="0">
                 <a:solidFill>
-                  <a:srgbClr val="5A6B66"/>
-                </a:solidFill>
-                <a:latin typeface="Calibri"/>
-              </a:rPr>
-              <a:t>Reviews all Q&amp;A together</a:t>
-            </a:r>
-          </a:p>
+                  <a:srgbClr val="1C2B28"/>
+                </a:solidFill>
+                <a:latin typeface="Calibri"/>
+              </a:rPr>
+              <a:t>Speech-to-text answers and text-to-speech questions</a:t>
+            </a:r>
+          </a:p>
+        </p:txBody>
+      </p:sp>
+      <p:sp>
+        <p:nvSpPr>
+          <p:cNvPr id="21" name="Rounded Rectangle 20"/>
+          <p:cNvSpPr/>
+          <p:nvPr/>
+        </p:nvSpPr>
+        <p:spPr>
+          <a:xfrm>
+            <a:off x="8138159" y="4114800"/>
+            <a:ext cx="3566160" cy="1920240"/>
+          </a:xfrm>
+          <a:prstGeom prst="roundRect">
+            <a:avLst>
+              <a:gd name="adj" fmla="val 8000"/>
+            </a:avLst>
+          </a:prstGeom>
+          <a:solidFill>
+            <a:srgbClr val="FFFFFF"/>
+          </a:solidFill>
+          <a:ln w="12700">
+            <a:solidFill>
+              <a:srgbClr val="D9E3DF"/>
+            </a:solidFill>
+          </a:ln>
+        </p:spPr>
+        <p:style>
+          <a:lnRef idx="1">
+            <a:schemeClr val="accent1"/>
+          </a:lnRef>
+          <a:fillRef idx="3">
+            <a:schemeClr val="accent1"/>
+          </a:fillRef>
+          <a:effectRef idx="2">
+            <a:schemeClr val="accent1"/>
+          </a:effectRef>
+          <a:fontRef idx="minor">
+            <a:schemeClr val="lt1"/>
+          </a:fontRef>
+        </p:style>
+        <p:txBody>
+          <a:bodyPr rtlCol="0" anchor="ctr"/>
+          <a:lstStyle/>
+          <a:p>
+            <a:pPr algn="ctr"/>
+            <a:endParaRPr/>
+          </a:p>
+        </p:txBody>
+      </p:sp>
+      <p:sp>
+        <p:nvSpPr>
+          <p:cNvPr id="22" name="TextBox 21"/>
+          <p:cNvSpPr txBox="1"/>
+          <p:nvPr/>
+        </p:nvSpPr>
+        <p:spPr>
+          <a:xfrm>
+            <a:off x="8412479" y="4526280"/>
+            <a:ext cx="3017520" cy="365760"/>
+          </a:xfrm>
+          <a:prstGeom prst="rect">
+            <a:avLst/>
+          </a:prstGeom>
+          <a:noFill/>
+        </p:spPr>
+        <p:txBody>
+          <a:bodyPr wrap="square">
+            <a:spAutoFit/>
+          </a:bodyPr>
+          <a:lstStyle/>
           <a:p>
             <a:pPr algn="l"/>
             <a:r>
+              <a:rPr sz="1800" b="1">
+                <a:solidFill>
+                  <a:srgbClr val="0F6B5C"/>
+                </a:solidFill>
+                <a:latin typeface="Calibri"/>
+              </a:rPr>
+              <a:t>Modular codebase</a:t>
+            </a:r>
+          </a:p>
+        </p:txBody>
+      </p:sp>
+      <p:sp>
+        <p:nvSpPr>
+          <p:cNvPr id="23" name="TextBox 22"/>
+          <p:cNvSpPr txBox="1"/>
+          <p:nvPr/>
+        </p:nvSpPr>
+        <p:spPr>
+          <a:xfrm>
+            <a:off x="8412479" y="5074920"/>
+            <a:ext cx="3017520" cy="731520"/>
+          </a:xfrm>
+          <a:prstGeom prst="rect">
+            <a:avLst/>
+          </a:prstGeom>
+          <a:noFill/>
+        </p:spPr>
+        <p:txBody>
+          <a:bodyPr wrap="square">
+            <a:spAutoFit/>
+          </a:bodyPr>
+          <a:lstStyle/>
+          <a:p>
+            <a:pPr algn="l"/>
+            <a:r>
               <a:rPr sz="1500" b="0">
                 <a:solidFill>
-                  <a:srgbClr val="5A6B66"/>
-                </a:solidFill>
-                <a:latin typeface="Calibri"/>
-              </a:rPr>
-              <a:t>Produces final coaching feedback</a:t>
+                  <a:srgbClr val="1C2B28"/>
+                </a:solidFill>
+                <a:latin typeface="Calibri"/>
+              </a:rPr>
+              <a:t>agents / auth / library / reports / ui</a:t>
             </a:r>
           </a:p>
         </p:txBody>
@@ -6798,7 +8303,7 @@
                 </a:solidFill>
                 <a:latin typeface="Calibri"/>
               </a:rPr>
-              <a:t>Product Layer Around the Agents</a:t>
+              <a:t>Engineering Highlights</a:t>
             </a:r>
           </a:p>
         </p:txBody>
@@ -6833,69 +8338,21 @@
                 </a:solidFill>
                 <a:latin typeface="Calibri"/>
               </a:rPr>
-              <a:t>From model calls to a usable practice product</a:t>
-            </a:r>
-          </a:p>
-        </p:txBody>
-      </p:sp>
-      <p:sp>
-        <p:nvSpPr>
-          <p:cNvPr id="6" name="Rounded Rectangle 5"/>
-          <p:cNvSpPr/>
-          <p:nvPr/>
-        </p:nvSpPr>
-        <p:spPr>
-          <a:xfrm>
-            <a:off x="640080" y="1965960"/>
-            <a:ext cx="3566160" cy="1920240"/>
-          </a:xfrm>
-          <a:prstGeom prst="roundRect">
-            <a:avLst>
-              <a:gd name="adj" fmla="val 8000"/>
-            </a:avLst>
-          </a:prstGeom>
-          <a:solidFill>
-            <a:srgbClr val="FFFFFF"/>
-          </a:solidFill>
-          <a:ln w="12700">
-            <a:solidFill>
-              <a:srgbClr val="D9E3DF"/>
-            </a:solidFill>
-          </a:ln>
-        </p:spPr>
-        <p:style>
-          <a:lnRef idx="1">
-            <a:schemeClr val="accent1"/>
-          </a:lnRef>
-          <a:fillRef idx="3">
-            <a:schemeClr val="accent1"/>
-          </a:fillRef>
-          <a:effectRef idx="2">
-            <a:schemeClr val="accent1"/>
-          </a:effectRef>
-          <a:fontRef idx="minor">
-            <a:schemeClr val="lt1"/>
-          </a:fontRef>
-        </p:style>
-        <p:txBody>
-          <a:bodyPr rtlCol="0" anchor="ctr"/>
-          <a:lstStyle/>
-          <a:p>
-            <a:pPr algn="ctr"/>
-            <a:endParaRPr/>
-          </a:p>
-        </p:txBody>
-      </p:sp>
-      <p:sp>
-        <p:nvSpPr>
-          <p:cNvPr id="7" name="TextBox 6"/>
+              <a:t>What makes this more than a chatbot wrapper</a:t>
+            </a:r>
+          </a:p>
+        </p:txBody>
+      </p:sp>
+      <p:sp>
+        <p:nvSpPr>
+          <p:cNvPr id="6" name="TextBox 5"/>
           <p:cNvSpPr txBox="1"/>
           <p:nvPr/>
         </p:nvSpPr>
         <p:spPr>
           <a:xfrm>
-            <a:off x="914400" y="2377440"/>
-            <a:ext cx="3017520" cy="365760"/>
+            <a:off x="822960" y="2011680"/>
+            <a:ext cx="10515600" cy="4114800"/>
           </a:xfrm>
           <a:prstGeom prst="rect">
             <a:avLst/>
@@ -6908,640 +8365,99 @@
           </a:bodyPr>
           <a:lstStyle/>
           <a:p>
-            <a:pPr algn="l"/>
-            <a:r>
-              <a:rPr sz="1800" b="1">
-                <a:solidFill>
-                  <a:srgbClr val="0F6B5C"/>
-                </a:solidFill>
-                <a:latin typeface="Calibri"/>
-              </a:rPr>
-              <a:t>Auth</a:t>
-            </a:r>
-          </a:p>
-        </p:txBody>
-      </p:sp>
-      <p:sp>
-        <p:nvSpPr>
-          <p:cNvPr id="8" name="TextBox 7"/>
-          <p:cNvSpPr txBox="1"/>
-          <p:nvPr/>
-        </p:nvSpPr>
-        <p:spPr>
-          <a:xfrm>
-            <a:off x="914400" y="2926080"/>
-            <a:ext cx="3017520" cy="731520"/>
-          </a:xfrm>
-          <a:prstGeom prst="rect">
-            <a:avLst/>
-          </a:prstGeom>
-          <a:noFill/>
-        </p:spPr>
-        <p:txBody>
-          <a:bodyPr wrap="square">
-            <a:spAutoFit/>
-          </a:bodyPr>
-          <a:lstStyle/>
-          <a:p>
-            <a:pPr algn="l"/>
-            <a:r>
-              <a:rPr sz="1500" b="0">
+            <a:pPr>
+              <a:spcAft>
+                <a:spcPts val="800"/>
+              </a:spcAft>
+            </a:pPr>
+            <a:r>
+              <a:rPr sz="1800" b="0">
                 <a:solidFill>
                   <a:srgbClr val="1C2B28"/>
                 </a:solidFill>
                 <a:latin typeface="Calibri"/>
               </a:rPr>
-              <a:t>Email/password accounts with hashed credentials</a:t>
-            </a:r>
-          </a:p>
-        </p:txBody>
-      </p:sp>
-      <p:sp>
-        <p:nvSpPr>
-          <p:cNvPr id="9" name="Rounded Rectangle 8"/>
-          <p:cNvSpPr/>
-          <p:nvPr/>
-        </p:nvSpPr>
-        <p:spPr>
-          <a:xfrm>
-            <a:off x="4389120" y="1965960"/>
-            <a:ext cx="3566160" cy="1920240"/>
-          </a:xfrm>
-          <a:prstGeom prst="roundRect">
-            <a:avLst>
-              <a:gd name="adj" fmla="val 8000"/>
-            </a:avLst>
-          </a:prstGeom>
-          <a:solidFill>
-            <a:srgbClr val="FFFFFF"/>
-          </a:solidFill>
-          <a:ln w="12700">
-            <a:solidFill>
-              <a:srgbClr val="D9E3DF"/>
-            </a:solidFill>
-          </a:ln>
-        </p:spPr>
-        <p:style>
-          <a:lnRef idx="1">
-            <a:schemeClr val="accent1"/>
-          </a:lnRef>
-          <a:fillRef idx="3">
-            <a:schemeClr val="accent1"/>
-          </a:fillRef>
-          <a:effectRef idx="2">
-            <a:schemeClr val="accent1"/>
-          </a:effectRef>
-          <a:fontRef idx="minor">
-            <a:schemeClr val="lt1"/>
-          </a:fontRef>
-        </p:style>
-        <p:txBody>
-          <a:bodyPr rtlCol="0" anchor="ctr"/>
-          <a:lstStyle/>
-          <a:p>
-            <a:pPr algn="ctr"/>
-            <a:endParaRPr/>
-          </a:p>
-        </p:txBody>
-      </p:sp>
-      <p:sp>
-        <p:nvSpPr>
-          <p:cNvPr id="10" name="TextBox 9"/>
-          <p:cNvSpPr txBox="1"/>
-          <p:nvPr/>
-        </p:nvSpPr>
-        <p:spPr>
-          <a:xfrm>
-            <a:off x="4663440" y="2377440"/>
-            <a:ext cx="3017520" cy="365760"/>
-          </a:xfrm>
-          <a:prstGeom prst="rect">
-            <a:avLst/>
-          </a:prstGeom>
-          <a:noFill/>
-        </p:spPr>
-        <p:txBody>
-          <a:bodyPr wrap="square">
-            <a:spAutoFit/>
-          </a:bodyPr>
-          <a:lstStyle/>
-          <a:p>
-            <a:pPr algn="l"/>
-            <a:r>
-              <a:rPr sz="1800" b="1">
-                <a:solidFill>
-                  <a:srgbClr val="0F6B5C"/>
-                </a:solidFill>
-                <a:latin typeface="Calibri"/>
-              </a:rPr>
-              <a:t>Document library</a:t>
-            </a:r>
-          </a:p>
-        </p:txBody>
-      </p:sp>
-      <p:sp>
-        <p:nvSpPr>
-          <p:cNvPr id="11" name="TextBox 10"/>
-          <p:cNvSpPr txBox="1"/>
-          <p:nvPr/>
-        </p:nvSpPr>
-        <p:spPr>
-          <a:xfrm>
-            <a:off x="4663440" y="2926080"/>
-            <a:ext cx="3017520" cy="731520"/>
-          </a:xfrm>
-          <a:prstGeom prst="rect">
-            <a:avLst/>
-          </a:prstGeom>
-          <a:noFill/>
-        </p:spPr>
-        <p:txBody>
-          <a:bodyPr wrap="square">
-            <a:spAutoFit/>
-          </a:bodyPr>
-          <a:lstStyle/>
-          <a:p>
-            <a:pPr algn="l"/>
-            <a:r>
-              <a:rPr sz="1500" b="0">
+              <a:t>•  Separation of concerns: analysis, interviewing, evaluation, and orchestration are distinct agents</a:t>
+            </a:r>
+          </a:p>
+          <a:p>
+            <a:pPr>
+              <a:spcAft>
+                <a:spcPts val="800"/>
+              </a:spcAft>
+            </a:pPr>
+            <a:r>
+              <a:rPr sz="1800" b="0">
                 <a:solidFill>
                   <a:srgbClr val="1C2B28"/>
                 </a:solidFill>
                 <a:latin typeface="Calibri"/>
               </a:rPr>
-              <a:t>Save and reuse resumes &amp; job descriptions</a:t>
-            </a:r>
-          </a:p>
-        </p:txBody>
-      </p:sp>
-      <p:sp>
-        <p:nvSpPr>
-          <p:cNvPr id="12" name="Rounded Rectangle 11"/>
-          <p:cNvSpPr/>
-          <p:nvPr/>
-        </p:nvSpPr>
-        <p:spPr>
-          <a:xfrm>
-            <a:off x="8138159" y="1965960"/>
-            <a:ext cx="3566160" cy="1920240"/>
-          </a:xfrm>
-          <a:prstGeom prst="roundRect">
-            <a:avLst>
-              <a:gd name="adj" fmla="val 8000"/>
-            </a:avLst>
-          </a:prstGeom>
-          <a:solidFill>
-            <a:srgbClr val="FFFFFF"/>
-          </a:solidFill>
-          <a:ln w="12700">
-            <a:solidFill>
-              <a:srgbClr val="D9E3DF"/>
-            </a:solidFill>
-          </a:ln>
-        </p:spPr>
-        <p:style>
-          <a:lnRef idx="1">
-            <a:schemeClr val="accent1"/>
-          </a:lnRef>
-          <a:fillRef idx="3">
-            <a:schemeClr val="accent1"/>
-          </a:fillRef>
-          <a:effectRef idx="2">
-            <a:schemeClr val="accent1"/>
-          </a:effectRef>
-          <a:fontRef idx="minor">
-            <a:schemeClr val="lt1"/>
-          </a:fontRef>
-        </p:style>
-        <p:txBody>
-          <a:bodyPr rtlCol="0" anchor="ctr"/>
-          <a:lstStyle/>
-          <a:p>
-            <a:pPr algn="ctr"/>
-            <a:endParaRPr/>
-          </a:p>
-        </p:txBody>
-      </p:sp>
-      <p:sp>
-        <p:nvSpPr>
-          <p:cNvPr id="13" name="TextBox 12"/>
-          <p:cNvSpPr txBox="1"/>
-          <p:nvPr/>
-        </p:nvSpPr>
-        <p:spPr>
-          <a:xfrm>
-            <a:off x="8412479" y="2377440"/>
-            <a:ext cx="3017520" cy="365760"/>
-          </a:xfrm>
-          <a:prstGeom prst="rect">
-            <a:avLst/>
-          </a:prstGeom>
-          <a:noFill/>
-        </p:spPr>
-        <p:txBody>
-          <a:bodyPr wrap="square">
-            <a:spAutoFit/>
-          </a:bodyPr>
-          <a:lstStyle/>
-          <a:p>
-            <a:pPr algn="l"/>
-            <a:r>
-              <a:rPr sz="1800" b="1">
-                <a:solidFill>
-                  <a:srgbClr val="0F6B5C"/>
-                </a:solidFill>
-                <a:latin typeface="Calibri"/>
-              </a:rPr>
-              <a:t>Conversation history</a:t>
-            </a:r>
-          </a:p>
-        </p:txBody>
-      </p:sp>
-      <p:sp>
-        <p:nvSpPr>
-          <p:cNvPr id="14" name="TextBox 13"/>
-          <p:cNvSpPr txBox="1"/>
-          <p:nvPr/>
-        </p:nvSpPr>
-        <p:spPr>
-          <a:xfrm>
-            <a:off x="8412479" y="2926080"/>
-            <a:ext cx="3017520" cy="731520"/>
-          </a:xfrm>
-          <a:prstGeom prst="rect">
-            <a:avLst/>
-          </a:prstGeom>
-          <a:noFill/>
-        </p:spPr>
-        <p:txBody>
-          <a:bodyPr wrap="square">
-            <a:spAutoFit/>
-          </a:bodyPr>
-          <a:lstStyle/>
-          <a:p>
-            <a:pPr algn="l"/>
-            <a:r>
-              <a:rPr sz="1500" b="0">
+              <a:t>•  Deterministic interview pipeline in code for a reliable 6-question flow</a:t>
+            </a:r>
+          </a:p>
+          <a:p>
+            <a:pPr>
+              <a:spcAft>
+                <a:spcPts val="800"/>
+              </a:spcAft>
+            </a:pPr>
+            <a:r>
+              <a:rPr sz="1800" b="0">
                 <a:solidFill>
                   <a:srgbClr val="1C2B28"/>
                 </a:solidFill>
                 <a:latin typeface="Calibri"/>
               </a:rPr>
-              <a:t>Reopen past interviews; replay audio clips</a:t>
-            </a:r>
-          </a:p>
-        </p:txBody>
-      </p:sp>
-      <p:sp>
-        <p:nvSpPr>
-          <p:cNvPr id="15" name="Rounded Rectangle 14"/>
-          <p:cNvSpPr/>
-          <p:nvPr/>
-        </p:nvSpPr>
-        <p:spPr>
-          <a:xfrm>
-            <a:off x="640080" y="4114800"/>
-            <a:ext cx="3566160" cy="1920240"/>
-          </a:xfrm>
-          <a:prstGeom prst="roundRect">
-            <a:avLst>
-              <a:gd name="adj" fmla="val 8000"/>
-            </a:avLst>
-          </a:prstGeom>
-          <a:solidFill>
-            <a:srgbClr val="FFFFFF"/>
-          </a:solidFill>
-          <a:ln w="12700">
-            <a:solidFill>
-              <a:srgbClr val="D9E3DF"/>
-            </a:solidFill>
-          </a:ln>
-        </p:spPr>
-        <p:style>
-          <a:lnRef idx="1">
-            <a:schemeClr val="accent1"/>
-          </a:lnRef>
-          <a:fillRef idx="3">
-            <a:schemeClr val="accent1"/>
-          </a:fillRef>
-          <a:effectRef idx="2">
-            <a:schemeClr val="accent1"/>
-          </a:effectRef>
-          <a:fontRef idx="minor">
-            <a:schemeClr val="lt1"/>
-          </a:fontRef>
-        </p:style>
-        <p:txBody>
-          <a:bodyPr rtlCol="0" anchor="ctr"/>
-          <a:lstStyle/>
-          <a:p>
-            <a:pPr algn="ctr"/>
-            <a:endParaRPr/>
-          </a:p>
-        </p:txBody>
-      </p:sp>
-      <p:sp>
-        <p:nvSpPr>
-          <p:cNvPr id="16" name="TextBox 15"/>
-          <p:cNvSpPr txBox="1"/>
-          <p:nvPr/>
-        </p:nvSpPr>
-        <p:spPr>
-          <a:xfrm>
-            <a:off x="914400" y="4526280"/>
-            <a:ext cx="3017520" cy="365760"/>
-          </a:xfrm>
-          <a:prstGeom prst="rect">
-            <a:avLst/>
-          </a:prstGeom>
-          <a:noFill/>
-        </p:spPr>
-        <p:txBody>
-          <a:bodyPr wrap="square">
-            <a:spAutoFit/>
-          </a:bodyPr>
-          <a:lstStyle/>
-          <a:p>
-            <a:pPr algn="l"/>
-            <a:r>
-              <a:rPr sz="1800" b="1">
-                <a:solidFill>
-                  <a:srgbClr val="0F6B5C"/>
-                </a:solidFill>
-                <a:latin typeface="Calibri"/>
-              </a:rPr>
-              <a:t>Downloads</a:t>
-            </a:r>
-          </a:p>
-        </p:txBody>
-      </p:sp>
-      <p:sp>
-        <p:nvSpPr>
-          <p:cNvPr id="17" name="TextBox 16"/>
-          <p:cNvSpPr txBox="1"/>
-          <p:nvPr/>
-        </p:nvSpPr>
-        <p:spPr>
-          <a:xfrm>
-            <a:off x="914400" y="5074920"/>
-            <a:ext cx="3017520" cy="731520"/>
-          </a:xfrm>
-          <a:prstGeom prst="rect">
-            <a:avLst/>
-          </a:prstGeom>
-          <a:noFill/>
-        </p:spPr>
-        <p:txBody>
-          <a:bodyPr wrap="square">
-            <a:spAutoFit/>
-          </a:bodyPr>
-          <a:lstStyle/>
-          <a:p>
-            <a:pPr algn="l"/>
-            <a:r>
-              <a:rPr sz="1500" b="0">
+              <a:t>•  Session state tracks questions, answers, and audio for history + reporting</a:t>
+            </a:r>
+          </a:p>
+          <a:p>
+            <a:pPr>
+              <a:spcAft>
+                <a:spcPts val="800"/>
+              </a:spcAft>
+            </a:pPr>
+            <a:r>
+              <a:rPr sz="1800" b="0">
                 <a:solidFill>
                   <a:srgbClr val="1C2B28"/>
                 </a:solidFill>
                 <a:latin typeface="Calibri"/>
               </a:rPr>
-              <a:t>Feedback report + study pack (PDF / DOCX)</a:t>
-            </a:r>
-          </a:p>
-        </p:txBody>
-      </p:sp>
-      <p:sp>
-        <p:nvSpPr>
-          <p:cNvPr id="18" name="Rounded Rectangle 17"/>
-          <p:cNvSpPr/>
-          <p:nvPr/>
-        </p:nvSpPr>
-        <p:spPr>
-          <a:xfrm>
-            <a:off x="4389120" y="4114800"/>
-            <a:ext cx="3566160" cy="1920240"/>
-          </a:xfrm>
-          <a:prstGeom prst="roundRect">
-            <a:avLst>
-              <a:gd name="adj" fmla="val 8000"/>
-            </a:avLst>
-          </a:prstGeom>
-          <a:solidFill>
-            <a:srgbClr val="FFFFFF"/>
-          </a:solidFill>
-          <a:ln w="12700">
-            <a:solidFill>
-              <a:srgbClr val="D9E3DF"/>
-            </a:solidFill>
-          </a:ln>
-        </p:spPr>
-        <p:style>
-          <a:lnRef idx="1">
-            <a:schemeClr val="accent1"/>
-          </a:lnRef>
-          <a:fillRef idx="3">
-            <a:schemeClr val="accent1"/>
-          </a:fillRef>
-          <a:effectRef idx="2">
-            <a:schemeClr val="accent1"/>
-          </a:effectRef>
-          <a:fontRef idx="minor">
-            <a:schemeClr val="lt1"/>
-          </a:fontRef>
-        </p:style>
-        <p:txBody>
-          <a:bodyPr rtlCol="0" anchor="ctr"/>
-          <a:lstStyle/>
-          <a:p>
-            <a:pPr algn="ctr"/>
-            <a:endParaRPr/>
-          </a:p>
-        </p:txBody>
-      </p:sp>
-      <p:sp>
-        <p:nvSpPr>
-          <p:cNvPr id="19" name="TextBox 18"/>
-          <p:cNvSpPr txBox="1"/>
-          <p:nvPr/>
-        </p:nvSpPr>
-        <p:spPr>
-          <a:xfrm>
-            <a:off x="4663440" y="4526280"/>
-            <a:ext cx="3017520" cy="365760"/>
-          </a:xfrm>
-          <a:prstGeom prst="rect">
-            <a:avLst/>
-          </a:prstGeom>
-          <a:noFill/>
-        </p:spPr>
-        <p:txBody>
-          <a:bodyPr wrap="square">
-            <a:spAutoFit/>
-          </a:bodyPr>
-          <a:lstStyle/>
-          <a:p>
-            <a:pPr algn="l"/>
-            <a:r>
-              <a:rPr sz="1800" b="1">
-                <a:solidFill>
-                  <a:srgbClr val="0F6B5C"/>
-                </a:solidFill>
-                <a:latin typeface="Calibri"/>
-              </a:rPr>
-              <a:t>Voice loop</a:t>
-            </a:r>
-          </a:p>
-        </p:txBody>
-      </p:sp>
-      <p:sp>
-        <p:nvSpPr>
-          <p:cNvPr id="20" name="TextBox 19"/>
-          <p:cNvSpPr txBox="1"/>
-          <p:nvPr/>
-        </p:nvSpPr>
-        <p:spPr>
-          <a:xfrm>
-            <a:off x="4663440" y="5074920"/>
-            <a:ext cx="3017520" cy="731520"/>
-          </a:xfrm>
-          <a:prstGeom prst="rect">
-            <a:avLst/>
-          </a:prstGeom>
-          <a:noFill/>
-        </p:spPr>
-        <p:txBody>
-          <a:bodyPr wrap="square">
-            <a:spAutoFit/>
-          </a:bodyPr>
-          <a:lstStyle/>
-          <a:p>
-            <a:pPr algn="l"/>
-            <a:r>
-              <a:rPr sz="1500" b="0">
+              <a:t>•  Per-user persistence: document library and past conversations under user_data/</a:t>
+            </a:r>
+          </a:p>
+          <a:p>
+            <a:pPr>
+              <a:spcAft>
+                <a:spcPts val="800"/>
+              </a:spcAft>
+            </a:pPr>
+            <a:r>
+              <a:rPr sz="1800" b="0">
                 <a:solidFill>
                   <a:srgbClr val="1C2B28"/>
                 </a:solidFill>
                 <a:latin typeface="Calibri"/>
               </a:rPr>
-              <a:t>Speech-to-text answers and text-to-speech questions</a:t>
-            </a:r>
-          </a:p>
-        </p:txBody>
-      </p:sp>
-      <p:sp>
-        <p:nvSpPr>
-          <p:cNvPr id="21" name="Rounded Rectangle 20"/>
-          <p:cNvSpPr/>
-          <p:nvPr/>
-        </p:nvSpPr>
-        <p:spPr>
-          <a:xfrm>
-            <a:off x="8138159" y="4114800"/>
-            <a:ext cx="3566160" cy="1920240"/>
-          </a:xfrm>
-          <a:prstGeom prst="roundRect">
-            <a:avLst>
-              <a:gd name="adj" fmla="val 8000"/>
-            </a:avLst>
-          </a:prstGeom>
-          <a:solidFill>
-            <a:srgbClr val="FFFFFF"/>
-          </a:solidFill>
-          <a:ln w="12700">
-            <a:solidFill>
-              <a:srgbClr val="D9E3DF"/>
-            </a:solidFill>
-          </a:ln>
-        </p:spPr>
-        <p:style>
-          <a:lnRef idx="1">
-            <a:schemeClr val="accent1"/>
-          </a:lnRef>
-          <a:fillRef idx="3">
-            <a:schemeClr val="accent1"/>
-          </a:fillRef>
-          <a:effectRef idx="2">
-            <a:schemeClr val="accent1"/>
-          </a:effectRef>
-          <a:fontRef idx="minor">
-            <a:schemeClr val="lt1"/>
-          </a:fontRef>
-        </p:style>
-        <p:txBody>
-          <a:bodyPr rtlCol="0" anchor="ctr"/>
-          <a:lstStyle/>
-          <a:p>
-            <a:pPr algn="ctr"/>
-            <a:endParaRPr/>
-          </a:p>
-        </p:txBody>
-      </p:sp>
-      <p:sp>
-        <p:nvSpPr>
-          <p:cNvPr id="22" name="TextBox 21"/>
-          <p:cNvSpPr txBox="1"/>
-          <p:nvPr/>
-        </p:nvSpPr>
-        <p:spPr>
-          <a:xfrm>
-            <a:off x="8412479" y="4526280"/>
-            <a:ext cx="3017520" cy="365760"/>
-          </a:xfrm>
-          <a:prstGeom prst="rect">
-            <a:avLst/>
-          </a:prstGeom>
-          <a:noFill/>
-        </p:spPr>
-        <p:txBody>
-          <a:bodyPr wrap="square">
-            <a:spAutoFit/>
-          </a:bodyPr>
-          <a:lstStyle/>
-          <a:p>
-            <a:pPr algn="l"/>
-            <a:r>
-              <a:rPr sz="1800" b="1">
-                <a:solidFill>
-                  <a:srgbClr val="0F6B5C"/>
-                </a:solidFill>
-                <a:latin typeface="Calibri"/>
-              </a:rPr>
-              <a:t>Modular codebase</a:t>
-            </a:r>
-          </a:p>
-        </p:txBody>
-      </p:sp>
-      <p:sp>
-        <p:nvSpPr>
-          <p:cNvPr id="23" name="TextBox 22"/>
-          <p:cNvSpPr txBox="1"/>
-          <p:nvPr/>
-        </p:nvSpPr>
-        <p:spPr>
-          <a:xfrm>
-            <a:off x="8412479" y="5074920"/>
-            <a:ext cx="3017520" cy="731520"/>
-          </a:xfrm>
-          <a:prstGeom prst="rect">
-            <a:avLst/>
-          </a:prstGeom>
-          <a:noFill/>
-        </p:spPr>
-        <p:txBody>
-          <a:bodyPr wrap="square">
-            <a:spAutoFit/>
-          </a:bodyPr>
-          <a:lstStyle/>
-          <a:p>
-            <a:pPr algn="l"/>
-            <a:r>
-              <a:rPr sz="1500" b="0">
+              <a:t>•  Downloadable coaching artifacts: feedback report and study pack with model answers + concepts</a:t>
+            </a:r>
+          </a:p>
+          <a:p>
+            <a:pPr>
+              <a:spcAft>
+                <a:spcPts val="800"/>
+              </a:spcAft>
+            </a:pPr>
+            <a:r>
+              <a:rPr sz="1800" b="0">
                 <a:solidFill>
                   <a:srgbClr val="1C2B28"/>
                 </a:solidFill>
                 <a:latin typeface="Calibri"/>
               </a:rPr>
-              <a:t>agents / auth / library / reports / ui</a:t>
+              <a:t>•  Modular project layout: agents/, auth/, library/, reports/, ui/</a:t>
             </a:r>
           </a:p>
         </p:txBody>
@@ -8369,7 +9285,7 @@
             <a:avLst/>
           </a:prstGeom>
           <a:solidFill>
-            <a:srgbClr val="F3F6F4"/>
+            <a:srgbClr val="523873"/>
           </a:solidFill>
           <a:ln>
             <a:noFill/>
@@ -8394,138 +9310,29 @@
           <a:lstStyle/>
           <a:p>
             <a:pPr algn="ctr"/>
-            <a:endParaRPr/>
-          </a:p>
-        </p:txBody>
-      </p:sp>
-      <p:sp>
-        <p:nvSpPr>
-          <p:cNvPr id="3" name="TextBox 2"/>
-          <p:cNvSpPr txBox="1"/>
-          <p:nvPr/>
-        </p:nvSpPr>
-        <p:spPr>
-          <a:xfrm>
-            <a:off x="640080" y="320040"/>
-            <a:ext cx="10972800" cy="320040"/>
-          </a:xfrm>
-          <a:prstGeom prst="rect">
-            <a:avLst/>
-          </a:prstGeom>
-          <a:noFill/>
-        </p:spPr>
-        <p:txBody>
-          <a:bodyPr wrap="square">
-            <a:spAutoFit/>
-          </a:bodyPr>
-          <a:lstStyle/>
-          <a:p>
-            <a:pPr algn="l"/>
-            <a:r>
-              <a:rPr sz="1200" b="1">
-                <a:solidFill>
-                  <a:srgbClr val="0F6B5C"/>
-                </a:solidFill>
-                <a:latin typeface="Calibri"/>
-              </a:rPr>
-              <a:t>AI INTERVIEW COACH</a:t>
-            </a:r>
-          </a:p>
-        </p:txBody>
-      </p:sp>
-      <p:sp>
-        <p:nvSpPr>
-          <p:cNvPr id="4" name="TextBox 3"/>
-          <p:cNvSpPr txBox="1"/>
-          <p:nvPr/>
-        </p:nvSpPr>
-        <p:spPr>
-          <a:xfrm>
-            <a:off x="640080" y="594360"/>
-            <a:ext cx="10972800" cy="640080"/>
-          </a:xfrm>
-          <a:prstGeom prst="rect">
-            <a:avLst/>
-          </a:prstGeom>
-          <a:noFill/>
-        </p:spPr>
-        <p:txBody>
-          <a:bodyPr wrap="square">
-            <a:spAutoFit/>
-          </a:bodyPr>
-          <a:lstStyle/>
-          <a:p>
-            <a:pPr algn="l"/>
-            <a:r>
-              <a:rPr sz="3200" b="1">
-                <a:solidFill>
-                  <a:srgbClr val="523873"/>
-                </a:solidFill>
-                <a:latin typeface="Calibri"/>
-              </a:rPr>
-              <a:t>Tech Stack</a:t>
-            </a:r>
-          </a:p>
-        </p:txBody>
-      </p:sp>
-      <p:sp>
-        <p:nvSpPr>
-          <p:cNvPr id="5" name="TextBox 4"/>
-          <p:cNvSpPr txBox="1"/>
-          <p:nvPr/>
-        </p:nvSpPr>
-        <p:spPr>
-          <a:xfrm>
-            <a:off x="640080" y="1234440"/>
-            <a:ext cx="10972800" cy="457200"/>
-          </a:xfrm>
-          <a:prstGeom prst="rect">
-            <a:avLst/>
-          </a:prstGeom>
-          <a:noFill/>
-        </p:spPr>
-        <p:txBody>
-          <a:bodyPr wrap="square">
-            <a:spAutoFit/>
-          </a:bodyPr>
-          <a:lstStyle/>
-          <a:p>
-            <a:pPr algn="l"/>
-            <a:r>
-              <a:rPr sz="1600" b="0">
-                <a:solidFill>
-                  <a:srgbClr val="5A6B66"/>
-                </a:solidFill>
-                <a:latin typeface="Calibri"/>
-              </a:rPr>
-              <a:t>Practical tools for an agentic product demo</a:t>
-            </a:r>
-          </a:p>
-        </p:txBody>
-      </p:sp>
-      <p:sp>
-        <p:nvSpPr>
-          <p:cNvPr id="6" name="Rounded Rectangle 5"/>
+            <a:endParaRPr dirty="0"/>
+          </a:p>
+        </p:txBody>
+      </p:sp>
+      <p:sp>
+        <p:nvSpPr>
+          <p:cNvPr id="3" name="Rectangle 2"/>
           <p:cNvSpPr/>
           <p:nvPr/>
         </p:nvSpPr>
         <p:spPr>
           <a:xfrm>
-            <a:off x="640080" y="2011680"/>
-            <a:ext cx="3566160" cy="1874519"/>
-          </a:xfrm>
-          <a:prstGeom prst="roundRect">
-            <a:avLst>
-              <a:gd name="adj" fmla="val 8000"/>
-            </a:avLst>
+            <a:off x="0" y="6126480"/>
+            <a:ext cx="12191695" cy="731520"/>
+          </a:xfrm>
+          <a:prstGeom prst="rect">
+            <a:avLst/>
           </a:prstGeom>
           <a:solidFill>
-            <a:srgbClr val="FFFFFF"/>
+            <a:srgbClr val="0F6B5C"/>
           </a:solidFill>
-          <a:ln w="12700">
-            <a:solidFill>
-              <a:srgbClr val="D9E3DF"/>
-            </a:solidFill>
+          <a:ln>
+            <a:noFill/>
           </a:ln>
         </p:spPr>
         <p:style>
@@ -8553,14 +9360,14 @@
       </p:sp>
       <p:sp>
         <p:nvSpPr>
-          <p:cNvPr id="7" name="TextBox 6"/>
+          <p:cNvPr id="4" name="TextBox 3"/>
           <p:cNvSpPr txBox="1"/>
           <p:nvPr/>
         </p:nvSpPr>
         <p:spPr>
           <a:xfrm>
-            <a:off x="914400" y="2468880"/>
-            <a:ext cx="3017520" cy="411480"/>
+            <a:off x="822960" y="1920240"/>
+            <a:ext cx="10515600" cy="307777"/>
           </a:xfrm>
           <a:prstGeom prst="rect">
             <a:avLst/>
@@ -8573,29 +9380,35 @@
           </a:bodyPr>
           <a:lstStyle/>
           <a:p>
-            <a:pPr algn="l"/>
-            <a:r>
-              <a:rPr sz="1700" b="1">
-                <a:solidFill>
-                  <a:srgbClr val="523873"/>
-                </a:solidFill>
-                <a:latin typeface="Calibri"/>
-              </a:rPr>
-              <a:t>Python</a:t>
-            </a:r>
-          </a:p>
-        </p:txBody>
-      </p:sp>
-      <p:sp>
-        <p:nvSpPr>
-          <p:cNvPr id="8" name="TextBox 7"/>
+            <a:pPr algn="ctr"/>
+            <a:r>
+              <a:rPr lang="en-US" sz="1400" b="1" dirty="0">
+                <a:solidFill>
+                  <a:srgbClr val="D9C9ED"/>
+                </a:solidFill>
+                <a:latin typeface="Calibri"/>
+              </a:rPr>
+              <a:t>THANK YOU</a:t>
+            </a:r>
+            <a:endParaRPr sz="1400" b="1" dirty="0">
+              <a:solidFill>
+                <a:srgbClr val="D9C9ED"/>
+              </a:solidFill>
+              <a:latin typeface="Calibri"/>
+            </a:endParaRPr>
+          </a:p>
+        </p:txBody>
+      </p:sp>
+      <p:sp>
+        <p:nvSpPr>
+          <p:cNvPr id="6" name="TextBox 5"/>
           <p:cNvSpPr txBox="1"/>
           <p:nvPr/>
         </p:nvSpPr>
         <p:spPr>
           <a:xfrm>
-            <a:off x="914400" y="3017520"/>
-            <a:ext cx="3017520" cy="640080"/>
+            <a:off x="822960" y="2834640"/>
+            <a:ext cx="10515600" cy="430887"/>
           </a:xfrm>
           <a:prstGeom prst="rect">
             <a:avLst/>
@@ -8608,77 +9421,29 @@
           </a:bodyPr>
           <a:lstStyle/>
           <a:p>
-            <a:pPr algn="l"/>
-            <a:r>
-              <a:rPr sz="1500" b="0">
-                <a:solidFill>
-                  <a:srgbClr val="5A6B66"/>
-                </a:solidFill>
-                <a:latin typeface="Calibri"/>
-              </a:rPr>
-              <a:t>Application logic &amp; orchestration</a:t>
-            </a:r>
-          </a:p>
-        </p:txBody>
-      </p:sp>
-      <p:sp>
-        <p:nvSpPr>
-          <p:cNvPr id="9" name="Rounded Rectangle 8"/>
-          <p:cNvSpPr/>
-          <p:nvPr/>
-        </p:nvSpPr>
-        <p:spPr>
-          <a:xfrm>
-            <a:off x="4389120" y="2011680"/>
-            <a:ext cx="3566160" cy="1874519"/>
-          </a:xfrm>
-          <a:prstGeom prst="roundRect">
-            <a:avLst>
-              <a:gd name="adj" fmla="val 8000"/>
-            </a:avLst>
-          </a:prstGeom>
-          <a:solidFill>
-            <a:srgbClr val="FFFFFF"/>
-          </a:solidFill>
-          <a:ln w="12700">
-            <a:solidFill>
-              <a:srgbClr val="D9E3DF"/>
-            </a:solidFill>
-          </a:ln>
-        </p:spPr>
-        <p:style>
-          <a:lnRef idx="1">
-            <a:schemeClr val="accent1"/>
-          </a:lnRef>
-          <a:fillRef idx="3">
-            <a:schemeClr val="accent1"/>
-          </a:fillRef>
-          <a:effectRef idx="2">
-            <a:schemeClr val="accent1"/>
-          </a:effectRef>
-          <a:fontRef idx="minor">
-            <a:schemeClr val="lt1"/>
-          </a:fontRef>
-        </p:style>
-        <p:txBody>
-          <a:bodyPr rtlCol="0" anchor="ctr"/>
-          <a:lstStyle/>
-          <a:p>
             <a:pPr algn="ctr"/>
-            <a:endParaRPr/>
-          </a:p>
-        </p:txBody>
-      </p:sp>
-      <p:sp>
-        <p:nvSpPr>
-          <p:cNvPr id="10" name="TextBox 9"/>
+            <a:r>
+              <a:rPr sz="2200" b="1" dirty="0">
+                <a:solidFill>
+                  <a:srgbClr val="B8E6D8"/>
+                </a:solidFill>
+                <a:latin typeface="Calibri"/>
+              </a:rPr>
+              <a:t>Questions?</a:t>
+            </a:r>
+          </a:p>
+        </p:txBody>
+      </p:sp>
+      <p:sp>
+        <p:nvSpPr>
+          <p:cNvPr id="7" name="TextBox 6"/>
           <p:cNvSpPr txBox="1"/>
           <p:nvPr/>
         </p:nvSpPr>
         <p:spPr>
           <a:xfrm>
-            <a:off x="4663440" y="2468880"/>
-            <a:ext cx="3017520" cy="411480"/>
+            <a:off x="822960" y="6263640"/>
+            <a:ext cx="10515600" cy="365760"/>
           </a:xfrm>
           <a:prstGeom prst="rect">
             <a:avLst/>
@@ -8693,520 +9458,13 @@
           <a:p>
             <a:pPr algn="l"/>
             <a:r>
-              <a:rPr sz="1700" b="1">
-                <a:solidFill>
-                  <a:srgbClr val="523873"/>
-                </a:solidFill>
-                <a:latin typeface="Calibri"/>
-              </a:rPr>
-              <a:t>Gradio</a:t>
-            </a:r>
-          </a:p>
-        </p:txBody>
-      </p:sp>
-      <p:sp>
-        <p:nvSpPr>
-          <p:cNvPr id="11" name="TextBox 10"/>
-          <p:cNvSpPr txBox="1"/>
-          <p:nvPr/>
-        </p:nvSpPr>
-        <p:spPr>
-          <a:xfrm>
-            <a:off x="4663440" y="3017520"/>
-            <a:ext cx="3017520" cy="640080"/>
-          </a:xfrm>
-          <a:prstGeom prst="rect">
-            <a:avLst/>
-          </a:prstGeom>
-          <a:noFill/>
-        </p:spPr>
-        <p:txBody>
-          <a:bodyPr wrap="square">
-            <a:spAutoFit/>
-          </a:bodyPr>
-          <a:lstStyle/>
-          <a:p>
-            <a:pPr algn="l"/>
-            <a:r>
-              <a:rPr sz="1500" b="0">
-                <a:solidFill>
-                  <a:srgbClr val="5A6B66"/>
-                </a:solidFill>
-                <a:latin typeface="Calibri"/>
-              </a:rPr>
-              <a:t>Interactive interview UI</a:t>
-            </a:r>
-          </a:p>
-        </p:txBody>
-      </p:sp>
-      <p:sp>
-        <p:nvSpPr>
-          <p:cNvPr id="12" name="Rounded Rectangle 11"/>
-          <p:cNvSpPr/>
-          <p:nvPr/>
-        </p:nvSpPr>
-        <p:spPr>
-          <a:xfrm>
-            <a:off x="8138159" y="2011680"/>
-            <a:ext cx="3566160" cy="1874519"/>
-          </a:xfrm>
-          <a:prstGeom prst="roundRect">
-            <a:avLst>
-              <a:gd name="adj" fmla="val 8000"/>
-            </a:avLst>
-          </a:prstGeom>
-          <a:solidFill>
-            <a:srgbClr val="FFFFFF"/>
-          </a:solidFill>
-          <a:ln w="12700">
-            <a:solidFill>
-              <a:srgbClr val="D9E3DF"/>
-            </a:solidFill>
-          </a:ln>
-        </p:spPr>
-        <p:style>
-          <a:lnRef idx="1">
-            <a:schemeClr val="accent1"/>
-          </a:lnRef>
-          <a:fillRef idx="3">
-            <a:schemeClr val="accent1"/>
-          </a:fillRef>
-          <a:effectRef idx="2">
-            <a:schemeClr val="accent1"/>
-          </a:effectRef>
-          <a:fontRef idx="minor">
-            <a:schemeClr val="lt1"/>
-          </a:fontRef>
-        </p:style>
-        <p:txBody>
-          <a:bodyPr rtlCol="0" anchor="ctr"/>
-          <a:lstStyle/>
-          <a:p>
-            <a:pPr algn="ctr"/>
-            <a:endParaRPr/>
-          </a:p>
-        </p:txBody>
-      </p:sp>
-      <p:sp>
-        <p:nvSpPr>
-          <p:cNvPr id="13" name="TextBox 12"/>
-          <p:cNvSpPr txBox="1"/>
-          <p:nvPr/>
-        </p:nvSpPr>
-        <p:spPr>
-          <a:xfrm>
-            <a:off x="8412479" y="2468880"/>
-            <a:ext cx="3017520" cy="411480"/>
-          </a:xfrm>
-          <a:prstGeom prst="rect">
-            <a:avLst/>
-          </a:prstGeom>
-          <a:noFill/>
-        </p:spPr>
-        <p:txBody>
-          <a:bodyPr wrap="square">
-            <a:spAutoFit/>
-          </a:bodyPr>
-          <a:lstStyle/>
-          <a:p>
-            <a:pPr algn="l"/>
-            <a:r>
-              <a:rPr sz="1700" b="1">
-                <a:solidFill>
-                  <a:srgbClr val="523873"/>
-                </a:solidFill>
-                <a:latin typeface="Calibri"/>
-              </a:rPr>
-              <a:t>OpenAI API</a:t>
-            </a:r>
-          </a:p>
-        </p:txBody>
-      </p:sp>
-      <p:sp>
-        <p:nvSpPr>
-          <p:cNvPr id="14" name="TextBox 13"/>
-          <p:cNvSpPr txBox="1"/>
-          <p:nvPr/>
-        </p:nvSpPr>
-        <p:spPr>
-          <a:xfrm>
-            <a:off x="8412479" y="3017520"/>
-            <a:ext cx="3017520" cy="640080"/>
-          </a:xfrm>
-          <a:prstGeom prst="rect">
-            <a:avLst/>
-          </a:prstGeom>
-          <a:noFill/>
-        </p:spPr>
-        <p:txBody>
-          <a:bodyPr wrap="square">
-            <a:spAutoFit/>
-          </a:bodyPr>
-          <a:lstStyle/>
-          <a:p>
-            <a:pPr algn="l"/>
-            <a:r>
-              <a:rPr sz="1500" b="0">
-                <a:solidFill>
-                  <a:srgbClr val="5A6B66"/>
-                </a:solidFill>
-                <a:latin typeface="Calibri"/>
-              </a:rPr>
-              <a:t>Analysis, interview, STT, TTS, evaluation</a:t>
-            </a:r>
-          </a:p>
-        </p:txBody>
-      </p:sp>
-      <p:sp>
-        <p:nvSpPr>
-          <p:cNvPr id="15" name="Rounded Rectangle 14"/>
-          <p:cNvSpPr/>
-          <p:nvPr/>
-        </p:nvSpPr>
-        <p:spPr>
-          <a:xfrm>
-            <a:off x="640080" y="4114800"/>
-            <a:ext cx="3566160" cy="1874519"/>
-          </a:xfrm>
-          <a:prstGeom prst="roundRect">
-            <a:avLst>
-              <a:gd name="adj" fmla="val 8000"/>
-            </a:avLst>
-          </a:prstGeom>
-          <a:solidFill>
-            <a:srgbClr val="FFFFFF"/>
-          </a:solidFill>
-          <a:ln w="12700">
-            <a:solidFill>
-              <a:srgbClr val="D9E3DF"/>
-            </a:solidFill>
-          </a:ln>
-        </p:spPr>
-        <p:style>
-          <a:lnRef idx="1">
-            <a:schemeClr val="accent1"/>
-          </a:lnRef>
-          <a:fillRef idx="3">
-            <a:schemeClr val="accent1"/>
-          </a:fillRef>
-          <a:effectRef idx="2">
-            <a:schemeClr val="accent1"/>
-          </a:effectRef>
-          <a:fontRef idx="minor">
-            <a:schemeClr val="lt1"/>
-          </a:fontRef>
-        </p:style>
-        <p:txBody>
-          <a:bodyPr rtlCol="0" anchor="ctr"/>
-          <a:lstStyle/>
-          <a:p>
-            <a:pPr algn="ctr"/>
-            <a:endParaRPr/>
-          </a:p>
-        </p:txBody>
-      </p:sp>
-      <p:sp>
-        <p:nvSpPr>
-          <p:cNvPr id="16" name="TextBox 15"/>
-          <p:cNvSpPr txBox="1"/>
-          <p:nvPr/>
-        </p:nvSpPr>
-        <p:spPr>
-          <a:xfrm>
-            <a:off x="914400" y="4572000"/>
-            <a:ext cx="3017520" cy="411480"/>
-          </a:xfrm>
-          <a:prstGeom prst="rect">
-            <a:avLst/>
-          </a:prstGeom>
-          <a:noFill/>
-        </p:spPr>
-        <p:txBody>
-          <a:bodyPr wrap="square">
-            <a:spAutoFit/>
-          </a:bodyPr>
-          <a:lstStyle/>
-          <a:p>
-            <a:pPr algn="l"/>
-            <a:r>
-              <a:rPr sz="1700" b="1">
-                <a:solidFill>
-                  <a:srgbClr val="523873"/>
-                </a:solidFill>
-                <a:latin typeface="Calibri"/>
-              </a:rPr>
-              <a:t>Multi-agent design</a:t>
-            </a:r>
-          </a:p>
-        </p:txBody>
-      </p:sp>
-      <p:sp>
-        <p:nvSpPr>
-          <p:cNvPr id="17" name="TextBox 16"/>
-          <p:cNvSpPr txBox="1"/>
-          <p:nvPr/>
-        </p:nvSpPr>
-        <p:spPr>
-          <a:xfrm>
-            <a:off x="914400" y="5120640"/>
-            <a:ext cx="3017520" cy="640080"/>
-          </a:xfrm>
-          <a:prstGeom prst="rect">
-            <a:avLst/>
-          </a:prstGeom>
-          <a:noFill/>
-        </p:spPr>
-        <p:txBody>
-          <a:bodyPr wrap="square">
-            <a:spAutoFit/>
-          </a:bodyPr>
-          <a:lstStyle/>
-          <a:p>
-            <a:pPr algn="l"/>
-            <a:r>
-              <a:rPr sz="1500" b="0">
-                <a:solidFill>
-                  <a:srgbClr val="5A6B66"/>
-                </a:solidFill>
-                <a:latin typeface="Calibri"/>
-              </a:rPr>
-              <a:t>Specialized roles + manager workflow</a:t>
-            </a:r>
-          </a:p>
-        </p:txBody>
-      </p:sp>
-      <p:sp>
-        <p:nvSpPr>
-          <p:cNvPr id="18" name="Rounded Rectangle 17"/>
-          <p:cNvSpPr/>
-          <p:nvPr/>
-        </p:nvSpPr>
-        <p:spPr>
-          <a:xfrm>
-            <a:off x="4389120" y="4114800"/>
-            <a:ext cx="3566160" cy="1874519"/>
-          </a:xfrm>
-          <a:prstGeom prst="roundRect">
-            <a:avLst>
-              <a:gd name="adj" fmla="val 8000"/>
-            </a:avLst>
-          </a:prstGeom>
-          <a:solidFill>
-            <a:srgbClr val="FFFFFF"/>
-          </a:solidFill>
-          <a:ln w="12700">
-            <a:solidFill>
-              <a:srgbClr val="D9E3DF"/>
-            </a:solidFill>
-          </a:ln>
-        </p:spPr>
-        <p:style>
-          <a:lnRef idx="1">
-            <a:schemeClr val="accent1"/>
-          </a:lnRef>
-          <a:fillRef idx="3">
-            <a:schemeClr val="accent1"/>
-          </a:fillRef>
-          <a:effectRef idx="2">
-            <a:schemeClr val="accent1"/>
-          </a:effectRef>
-          <a:fontRef idx="minor">
-            <a:schemeClr val="lt1"/>
-          </a:fontRef>
-        </p:style>
-        <p:txBody>
-          <a:bodyPr rtlCol="0" anchor="ctr"/>
-          <a:lstStyle/>
-          <a:p>
-            <a:pPr algn="ctr"/>
-            <a:endParaRPr/>
-          </a:p>
-        </p:txBody>
-      </p:sp>
-      <p:sp>
-        <p:nvSpPr>
-          <p:cNvPr id="19" name="TextBox 18"/>
-          <p:cNvSpPr txBox="1"/>
-          <p:nvPr/>
-        </p:nvSpPr>
-        <p:spPr>
-          <a:xfrm>
-            <a:off x="4663440" y="4572000"/>
-            <a:ext cx="3017520" cy="411480"/>
-          </a:xfrm>
-          <a:prstGeom prst="rect">
-            <a:avLst/>
-          </a:prstGeom>
-          <a:noFill/>
-        </p:spPr>
-        <p:txBody>
-          <a:bodyPr wrap="square">
-            <a:spAutoFit/>
-          </a:bodyPr>
-          <a:lstStyle/>
-          <a:p>
-            <a:pPr algn="l"/>
-            <a:r>
-              <a:rPr sz="1700" b="1">
-                <a:solidFill>
-                  <a:srgbClr val="523873"/>
-                </a:solidFill>
-                <a:latin typeface="Calibri"/>
-              </a:rPr>
-              <a:t>python-docx / fpdf2 / pypdf</a:t>
-            </a:r>
-          </a:p>
-        </p:txBody>
-      </p:sp>
-      <p:sp>
-        <p:nvSpPr>
-          <p:cNvPr id="20" name="TextBox 19"/>
-          <p:cNvSpPr txBox="1"/>
-          <p:nvPr/>
-        </p:nvSpPr>
-        <p:spPr>
-          <a:xfrm>
-            <a:off x="4663440" y="5120640"/>
-            <a:ext cx="3017520" cy="640080"/>
-          </a:xfrm>
-          <a:prstGeom prst="rect">
-            <a:avLst/>
-          </a:prstGeom>
-          <a:noFill/>
-        </p:spPr>
-        <p:txBody>
-          <a:bodyPr wrap="square">
-            <a:spAutoFit/>
-          </a:bodyPr>
-          <a:lstStyle/>
-          <a:p>
-            <a:pPr algn="l"/>
-            <a:r>
-              <a:rPr sz="1500" b="0">
-                <a:solidFill>
-                  <a:srgbClr val="5A6B66"/>
-                </a:solidFill>
-                <a:latin typeface="Calibri"/>
-              </a:rPr>
-              <a:t>Document read &amp; report export</a:t>
-            </a:r>
-          </a:p>
-        </p:txBody>
-      </p:sp>
-      <p:sp>
-        <p:nvSpPr>
-          <p:cNvPr id="21" name="Rounded Rectangle 20"/>
-          <p:cNvSpPr/>
-          <p:nvPr/>
-        </p:nvSpPr>
-        <p:spPr>
-          <a:xfrm>
-            <a:off x="8138159" y="4114800"/>
-            <a:ext cx="3566160" cy="1874519"/>
-          </a:xfrm>
-          <a:prstGeom prst="roundRect">
-            <a:avLst>
-              <a:gd name="adj" fmla="val 8000"/>
-            </a:avLst>
-          </a:prstGeom>
-          <a:solidFill>
-            <a:srgbClr val="FFFFFF"/>
-          </a:solidFill>
-          <a:ln w="12700">
-            <a:solidFill>
-              <a:srgbClr val="D9E3DF"/>
-            </a:solidFill>
-          </a:ln>
-        </p:spPr>
-        <p:style>
-          <a:lnRef idx="1">
-            <a:schemeClr val="accent1"/>
-          </a:lnRef>
-          <a:fillRef idx="3">
-            <a:schemeClr val="accent1"/>
-          </a:fillRef>
-          <a:effectRef idx="2">
-            <a:schemeClr val="accent1"/>
-          </a:effectRef>
-          <a:fontRef idx="minor">
-            <a:schemeClr val="lt1"/>
-          </a:fontRef>
-        </p:style>
-        <p:txBody>
-          <a:bodyPr rtlCol="0" anchor="ctr"/>
-          <a:lstStyle/>
-          <a:p>
-            <a:pPr algn="ctr"/>
-            <a:endParaRPr/>
-          </a:p>
-        </p:txBody>
-      </p:sp>
-      <p:sp>
-        <p:nvSpPr>
-          <p:cNvPr id="22" name="TextBox 21"/>
-          <p:cNvSpPr txBox="1"/>
-          <p:nvPr/>
-        </p:nvSpPr>
-        <p:spPr>
-          <a:xfrm>
-            <a:off x="8412479" y="4572000"/>
-            <a:ext cx="3017520" cy="411480"/>
-          </a:xfrm>
-          <a:prstGeom prst="rect">
-            <a:avLst/>
-          </a:prstGeom>
-          <a:noFill/>
-        </p:spPr>
-        <p:txBody>
-          <a:bodyPr wrap="square">
-            <a:spAutoFit/>
-          </a:bodyPr>
-          <a:lstStyle/>
-          <a:p>
-            <a:pPr algn="l"/>
-            <a:r>
-              <a:rPr sz="1700" b="1">
-                <a:solidFill>
-                  <a:srgbClr val="523873"/>
-                </a:solidFill>
-                <a:latin typeface="Calibri"/>
-              </a:rPr>
-              <a:t>Local user_data store</a:t>
-            </a:r>
-          </a:p>
-        </p:txBody>
-      </p:sp>
-      <p:sp>
-        <p:nvSpPr>
-          <p:cNvPr id="23" name="TextBox 22"/>
-          <p:cNvSpPr txBox="1"/>
-          <p:nvPr/>
-        </p:nvSpPr>
-        <p:spPr>
-          <a:xfrm>
-            <a:off x="8412479" y="5120640"/>
-            <a:ext cx="3017520" cy="640080"/>
-          </a:xfrm>
-          <a:prstGeom prst="rect">
-            <a:avLst/>
-          </a:prstGeom>
-          <a:noFill/>
-        </p:spPr>
-        <p:txBody>
-          <a:bodyPr wrap="square">
-            <a:spAutoFit/>
-          </a:bodyPr>
-          <a:lstStyle/>
-          <a:p>
-            <a:pPr algn="l"/>
-            <a:r>
-              <a:rPr sz="1500" b="0">
-                <a:solidFill>
-                  <a:srgbClr val="5A6B66"/>
-                </a:solidFill>
-                <a:latin typeface="Calibri"/>
-              </a:rPr>
-              <a:t>Resumes, JDs, conversations, audio</a:t>
+              <a:rPr sz="1400" b="0">
+                <a:solidFill>
+                  <a:srgbClr val="FFFFFF"/>
+                </a:solidFill>
+                <a:latin typeface="Calibri"/>
+              </a:rPr>
+              <a:t>AI Interview Coach  ·  Thank you</a:t>
             </a:r>
           </a:p>
         </p:txBody>
@@ -9238,58 +9496,20 @@
       </p:grpSpPr>
       <p:sp>
         <p:nvSpPr>
-          <p:cNvPr id="2" name="Rectangle 1"/>
-          <p:cNvSpPr/>
-          <p:nvPr/>
-        </p:nvSpPr>
-        <p:spPr>
-          <a:xfrm>
-            <a:off x="0" y="0"/>
-            <a:ext cx="12191695" cy="6858000"/>
-          </a:xfrm>
-          <a:prstGeom prst="rect">
-            <a:avLst/>
-          </a:prstGeom>
-          <a:solidFill>
-            <a:srgbClr val="F3F6F4"/>
-          </a:solidFill>
-          <a:ln>
-            <a:noFill/>
-          </a:ln>
-        </p:spPr>
-        <p:style>
-          <a:lnRef idx="1">
-            <a:schemeClr val="accent1"/>
-          </a:lnRef>
-          <a:fillRef idx="3">
-            <a:schemeClr val="accent1"/>
-          </a:fillRef>
-          <a:effectRef idx="2">
-            <a:schemeClr val="accent1"/>
-          </a:effectRef>
-          <a:fontRef idx="minor">
-            <a:schemeClr val="lt1"/>
-          </a:fontRef>
-        </p:style>
-        <p:txBody>
-          <a:bodyPr rtlCol="0" anchor="ctr"/>
-          <a:lstStyle/>
-          <a:p>
-            <a:pPr algn="ctr"/>
-            <a:endParaRPr/>
-          </a:p>
-        </p:txBody>
-      </p:sp>
-      <p:sp>
-        <p:nvSpPr>
-          <p:cNvPr id="3" name="TextBox 2"/>
+          <p:cNvPr id="2" name="TextBox 1">
+            <a:extLst>
+              <a:ext uri="{FF2B5EF4-FFF2-40B4-BE49-F238E27FC236}">
+                <a16:creationId xmlns:a16="http://schemas.microsoft.com/office/drawing/2014/main" id="{E2BCEF21-7E7C-2833-B81A-3A95F9161E8C}"/>
+              </a:ext>
+            </a:extLst>
+          </p:cNvPr>
           <p:cNvSpPr txBox="1"/>
           <p:nvPr/>
         </p:nvSpPr>
         <p:spPr>
           <a:xfrm>
-            <a:off x="640080" y="320040"/>
-            <a:ext cx="10972800" cy="320040"/>
+            <a:off x="3905956" y="2201333"/>
+            <a:ext cx="2168286" cy="369332"/>
           </a:xfrm>
           <a:prstGeom prst="rect">
             <a:avLst/>
@@ -9297,214 +9517,24 @@
           <a:noFill/>
         </p:spPr>
         <p:txBody>
-          <a:bodyPr wrap="square">
+          <a:bodyPr wrap="none" rtlCol="0">
             <a:spAutoFit/>
           </a:bodyPr>
           <a:lstStyle/>
           <a:p>
-            <a:pPr algn="l"/>
-            <a:r>
-              <a:rPr sz="1200" b="1">
-                <a:solidFill>
-                  <a:srgbClr val="0F6B5C"/>
-                </a:solidFill>
-                <a:latin typeface="Calibri"/>
-              </a:rPr>
-              <a:t>AI INTERVIEW COACH</a:t>
-            </a:r>
-          </a:p>
-        </p:txBody>
-      </p:sp>
-      <p:sp>
-        <p:nvSpPr>
-          <p:cNvPr id="4" name="TextBox 3"/>
-          <p:cNvSpPr txBox="1"/>
-          <p:nvPr/>
-        </p:nvSpPr>
-        <p:spPr>
-          <a:xfrm>
-            <a:off x="640080" y="594360"/>
-            <a:ext cx="10972800" cy="640080"/>
-          </a:xfrm>
-          <a:prstGeom prst="rect">
-            <a:avLst/>
-          </a:prstGeom>
-          <a:noFill/>
-        </p:spPr>
-        <p:txBody>
-          <a:bodyPr wrap="square">
-            <a:spAutoFit/>
-          </a:bodyPr>
-          <a:lstStyle/>
-          <a:p>
-            <a:pPr algn="l"/>
-            <a:r>
-              <a:rPr sz="3200" b="1">
-                <a:solidFill>
-                  <a:srgbClr val="523873"/>
-                </a:solidFill>
-                <a:latin typeface="Calibri"/>
-              </a:rPr>
-              <a:t>Engineering Highlights</a:t>
-            </a:r>
-          </a:p>
-        </p:txBody>
-      </p:sp>
-      <p:sp>
-        <p:nvSpPr>
-          <p:cNvPr id="5" name="TextBox 4"/>
-          <p:cNvSpPr txBox="1"/>
-          <p:nvPr/>
-        </p:nvSpPr>
-        <p:spPr>
-          <a:xfrm>
-            <a:off x="640080" y="1234440"/>
-            <a:ext cx="10972800" cy="457200"/>
-          </a:xfrm>
-          <a:prstGeom prst="rect">
-            <a:avLst/>
-          </a:prstGeom>
-          <a:noFill/>
-        </p:spPr>
-        <p:txBody>
-          <a:bodyPr wrap="square">
-            <a:spAutoFit/>
-          </a:bodyPr>
-          <a:lstStyle/>
-          <a:p>
-            <a:pPr algn="l"/>
-            <a:r>
-              <a:rPr sz="1600" b="0">
-                <a:solidFill>
-                  <a:srgbClr val="5A6B66"/>
-                </a:solidFill>
-                <a:latin typeface="Calibri"/>
-              </a:rPr>
-              <a:t>What makes this more than a chatbot wrapper</a:t>
-            </a:r>
-          </a:p>
-        </p:txBody>
-      </p:sp>
-      <p:sp>
-        <p:nvSpPr>
-          <p:cNvPr id="6" name="TextBox 5"/>
-          <p:cNvSpPr txBox="1"/>
-          <p:nvPr/>
-        </p:nvSpPr>
-        <p:spPr>
-          <a:xfrm>
-            <a:off x="822960" y="2011680"/>
-            <a:ext cx="10515600" cy="4114800"/>
-          </a:xfrm>
-          <a:prstGeom prst="rect">
-            <a:avLst/>
-          </a:prstGeom>
-          <a:noFill/>
-        </p:spPr>
-        <p:txBody>
-          <a:bodyPr wrap="square">
-            <a:spAutoFit/>
-          </a:bodyPr>
-          <a:lstStyle/>
-          <a:p>
-            <a:pPr>
-              <a:spcAft>
-                <a:spcPts val="800"/>
-              </a:spcAft>
-            </a:pPr>
-            <a:r>
-              <a:rPr sz="1800" b="0">
-                <a:solidFill>
-                  <a:srgbClr val="1C2B28"/>
-                </a:solidFill>
-                <a:latin typeface="Calibri"/>
-              </a:rPr>
-              <a:t>•  Separation of concerns: analysis, interviewing, evaluation, and orchestration are distinct agents</a:t>
-            </a:r>
-          </a:p>
-          <a:p>
-            <a:pPr>
-              <a:spcAft>
-                <a:spcPts val="800"/>
-              </a:spcAft>
-            </a:pPr>
-            <a:r>
-              <a:rPr sz="1800" b="0">
-                <a:solidFill>
-                  <a:srgbClr val="1C2B28"/>
-                </a:solidFill>
-                <a:latin typeface="Calibri"/>
-              </a:rPr>
-              <a:t>•  Deterministic interview pipeline in code for a reliable 6-question flow</a:t>
-            </a:r>
-          </a:p>
-          <a:p>
-            <a:pPr>
-              <a:spcAft>
-                <a:spcPts val="800"/>
-              </a:spcAft>
-            </a:pPr>
-            <a:r>
-              <a:rPr sz="1800" b="0">
-                <a:solidFill>
-                  <a:srgbClr val="1C2B28"/>
-                </a:solidFill>
-                <a:latin typeface="Calibri"/>
-              </a:rPr>
-              <a:t>•  Session state tracks questions, answers, and audio for history + reporting</a:t>
-            </a:r>
-          </a:p>
-          <a:p>
-            <a:pPr>
-              <a:spcAft>
-                <a:spcPts val="800"/>
-              </a:spcAft>
-            </a:pPr>
-            <a:r>
-              <a:rPr sz="1800" b="0">
-                <a:solidFill>
-                  <a:srgbClr val="1C2B28"/>
-                </a:solidFill>
-                <a:latin typeface="Calibri"/>
-              </a:rPr>
-              <a:t>•  Per-user persistence: document library and past conversations under user_data/</a:t>
-            </a:r>
-          </a:p>
-          <a:p>
-            <a:pPr>
-              <a:spcAft>
-                <a:spcPts val="800"/>
-              </a:spcAft>
-            </a:pPr>
-            <a:r>
-              <a:rPr sz="1800" b="0">
-                <a:solidFill>
-                  <a:srgbClr val="1C2B28"/>
-                </a:solidFill>
-                <a:latin typeface="Calibri"/>
-              </a:rPr>
-              <a:t>•  Downloadable coaching artifacts: feedback report and study pack with model answers + concepts</a:t>
-            </a:r>
-          </a:p>
-          <a:p>
-            <a:pPr>
-              <a:spcAft>
-                <a:spcPts val="800"/>
-              </a:spcAft>
-            </a:pPr>
-            <a:r>
-              <a:rPr sz="1800" b="0">
-                <a:solidFill>
-                  <a:srgbClr val="1C2B28"/>
-                </a:solidFill>
-                <a:latin typeface="Calibri"/>
-              </a:rPr>
-              <a:t>•  Modular project layout: agents/, auth/, library/, reports/, ui/</a:t>
+            <a:r>
+              <a:rPr lang="en-US" dirty="0"/>
+              <a:t>Back Up Slides Below</a:t>
             </a:r>
           </a:p>
         </p:txBody>
       </p:sp>
     </p:spTree>
+    <p:extLst>
+      <p:ext uri="{BB962C8B-B14F-4D97-AF65-F5344CB8AC3E}">
+        <p14:creationId xmlns:p14="http://schemas.microsoft.com/office/powerpoint/2010/main" val="1822176473"/>
+      </p:ext>
+    </p:extLst>
   </p:cSld>
   <p:clrMapOvr>
     <a:masterClrMapping/>
